--- a/docs/demo_ppts/IBM CoE Hackathon - SpecSentinel Presentation.pptx
+++ b/docs/demo_ppts/IBM CoE Hackathon - SpecSentinel Presentation.pptx
@@ -5,7 +5,7 @@
     <p:sldMasterId id="2147483648" r:id="rId1"/>
   </p:sldMasterIdLst>
   <p:notesMasterIdLst>
-    <p:notesMasterId r:id="rId11"/>
+    <p:notesMasterId r:id="rId12"/>
   </p:notesMasterIdLst>
   <p:sldIdLst>
     <p:sldId id="256" r:id="rId2"/>
@@ -16,7 +16,8 @@
     <p:sldId id="280" r:id="rId7"/>
     <p:sldId id="274" r:id="rId8"/>
     <p:sldId id="275" r:id="rId9"/>
-    <p:sldId id="276" r:id="rId10"/>
+    <p:sldId id="284" r:id="rId10"/>
+    <p:sldId id="276" r:id="rId11"/>
   </p:sldIdLst>
   <p:sldSz cx="12192000" cy="6858000"/>
   <p:notesSz cx="6858000" cy="12192000"/>
@@ -125,11 +126,13 @@
             <p14:sldId id="280"/>
             <p14:sldId id="274"/>
             <p14:sldId id="275"/>
-            <p14:sldId id="276"/>
+            <p14:sldId id="284"/>
           </p14:sldIdLst>
         </p14:section>
         <p14:section name="Backup" id="{0AC94B4D-05AE-402F-9ED3-EAB19F63F455}">
-          <p14:sldIdLst/>
+          <p14:sldIdLst>
+            <p14:sldId id="276"/>
+          </p14:sldIdLst>
         </p14:section>
       </p14:sectionLst>
     </p:ext>
@@ -891,7 +894,7 @@
 <dgm:dataModel xmlns:dgm="http://schemas.openxmlformats.org/drawingml/2006/diagram" xmlns:a="http://schemas.openxmlformats.org/drawingml/2006/main">
   <dgm:ptLst>
     <dgm:pt modelId="{4C0B4C7E-D777-43F7-BC7D-E42F65165527}" type="doc">
-      <dgm:prSet loTypeId="urn:microsoft.com/office/officeart/2008/layout/LinedList" loCatId="list" qsTypeId="urn:microsoft.com/office/officeart/2005/8/quickstyle/simple1" qsCatId="simple" csTypeId="urn:microsoft.com/office/officeart/2005/8/colors/accent1_2" csCatId="accent1"/>
+      <dgm:prSet loTypeId="urn:microsoft.com/office/officeart/2008/layout/LinedList" loCatId="list" qsTypeId="urn:microsoft.com/office/officeart/2005/8/quickstyle/simple1" qsCatId="simple" csTypeId="urn:microsoft.com/office/officeart/2005/8/colors/accent1_2" csCatId="accent1" phldr="1"/>
       <dgm:spPr/>
       <dgm:t>
         <a:bodyPr/>
@@ -1125,8 +1128,8 @@
         <a:lstStyle/>
         <a:p>
           <a:r>
-            <a:rPr lang="en-US"/>
-            <a:t>Demo and Code base</a:t>
+            <a:rPr lang="en-US" dirty="0"/>
+            <a:t>Demo</a:t>
           </a:r>
         </a:p>
       </dgm:t>
@@ -1161,8 +1164,8 @@
         <a:lstStyle/>
         <a:p>
           <a:r>
-            <a:rPr lang="en-US"/>
-            <a:t>Team Details</a:t>
+            <a:rPr lang="en-US" dirty="0"/>
+            <a:t>Closing note</a:t>
           </a:r>
         </a:p>
       </dgm:t>
@@ -1458,7 +1461,7 @@
   <dgm:whole/>
   <dgm:extLst>
     <a:ext uri="http://schemas.microsoft.com/office/drawing/2008/diagram">
-      <dsp:dataModelExt xmlns:dsp="http://schemas.microsoft.com/office/drawing/2008/diagram" relId="rId6" minVer="http://schemas.openxmlformats.org/drawingml/2006/diagram"/>
+      <dsp:dataModelExt xmlns:dsp="http://schemas.microsoft.com/office/drawing/2008/diagram" relId="rId7" minVer="http://schemas.openxmlformats.org/drawingml/2006/diagram"/>
     </a:ext>
   </dgm:extLst>
 </dgm:dataModel>
@@ -2177,8 +2180,8 @@
             <a:buNone/>
           </a:pPr>
           <a:r>
-            <a:rPr lang="en-US" sz="2800" kern="1200"/>
-            <a:t>Demo and Code base</a:t>
+            <a:rPr lang="en-US" sz="2800" kern="1200" dirty="0"/>
+            <a:t>Demo</a:t>
           </a:r>
         </a:p>
       </dsp:txBody>
@@ -2286,8 +2289,8 @@
             <a:buNone/>
           </a:pPr>
           <a:r>
-            <a:rPr lang="en-US" sz="2800" kern="1200"/>
-            <a:t>Team Details</a:t>
+            <a:rPr lang="en-US" sz="2800" kern="1200" dirty="0"/>
+            <a:t>Closing note</a:t>
           </a:r>
         </a:p>
       </dsp:txBody>
@@ -4018,6 +4021,64 @@
           <a:bodyPr/>
           <a:lstStyle/>
           <a:p>
+            <a:r>
+              <a:rPr lang="en-US" b="1" dirty="0"/>
+              <a:t>Slide 1 — Title (0:00–0:20)</a:t>
+            </a:r>
+          </a:p>
+          <a:p>
+            <a:r>
+              <a:rPr lang="en-US" dirty="0"/>
+              <a:t>Good afternoon, everyone. We are Team Sentinel — Debapriyo Dasgupta and Niveed Kumar Reddy Bollapally— and today we're presenting </a:t>
+            </a:r>
+            <a:r>
+              <a:rPr lang="en-US" b="1" dirty="0" err="1"/>
+              <a:t>SpecSentinel</a:t>
+            </a:r>
+            <a:r>
+              <a:rPr lang="en-US" dirty="0"/>
+              <a:t>: an autonomous, agentic API governance engine built powered by AI (IBM watsonx.ai).</a:t>
+            </a:r>
+          </a:p>
+          <a:p>
+            <a:r>
+              <a:rPr lang="en-US" dirty="0"/>
+              <a:t>What makes </a:t>
+            </a:r>
+            <a:r>
+              <a:rPr lang="en-US" dirty="0" err="1"/>
+              <a:t>SpecSentinel</a:t>
+            </a:r>
+            <a:r>
+              <a:rPr lang="en-US" dirty="0"/>
+              <a:t> different from every other API linter or validation tool out there? It doesn't just check rules. It </a:t>
+            </a:r>
+            <a:r>
+              <a:rPr lang="en-US" i="1" dirty="0"/>
+              <a:t>thinks</a:t>
+            </a:r>
+            <a:r>
+              <a:rPr lang="en-US" dirty="0"/>
+              <a:t>, </a:t>
+            </a:r>
+            <a:r>
+              <a:rPr lang="en-US" i="1" dirty="0"/>
+              <a:t>plans</a:t>
+            </a:r>
+            <a:r>
+              <a:rPr lang="en-US" dirty="0"/>
+              <a:t>, and </a:t>
+            </a:r>
+            <a:r>
+              <a:rPr lang="en-US" i="1" dirty="0"/>
+              <a:t>acts</a:t>
+            </a:r>
+            <a:r>
+              <a:rPr lang="en-US" dirty="0"/>
+              <a:t> — like a senior security architect running a full review, except it does it in under 10 seconds.</a:t>
+            </a:r>
+          </a:p>
+          <a:p>
             <a:endParaRPr lang="en-US" dirty="0"/>
           </a:p>
         </p:txBody>
@@ -4058,655 +4119,7 @@
 </p:notes>
 </file>
 
-<file path=ppt/notesSlides/notesSlide2.xml><?xml version="1.0" encoding="utf-8"?>
-<p:notes xmlns:a="http://schemas.openxmlformats.org/drawingml/2006/main" xmlns:r="http://schemas.openxmlformats.org/officeDocument/2006/relationships" xmlns:p="http://schemas.openxmlformats.org/presentationml/2006/main">
-  <p:cSld>
-    <p:spTree>
-      <p:nvGrpSpPr>
-        <p:cNvPr id="1" name="">
-          <a:extLst>
-            <a:ext uri="{FF2B5EF4-FFF2-40B4-BE49-F238E27FC236}">
-              <a16:creationId xmlns:a16="http://schemas.microsoft.com/office/drawing/2014/main" id="{1196312A-7D2E-8BAC-E3A8-88E2615C2D0E}"/>
-            </a:ext>
-          </a:extLst>
-        </p:cNvPr>
-        <p:cNvGrpSpPr/>
-        <p:nvPr/>
-      </p:nvGrpSpPr>
-      <p:grpSpPr>
-        <a:xfrm>
-          <a:off x="0" y="0"/>
-          <a:ext cx="0" cy="0"/>
-          <a:chOff x="0" y="0"/>
-          <a:chExt cx="0" cy="0"/>
-        </a:xfrm>
-      </p:grpSpPr>
-      <p:sp>
-        <p:nvSpPr>
-          <p:cNvPr id="2" name="Slide Image Placeholder 1">
-            <a:extLst>
-              <a:ext uri="{FF2B5EF4-FFF2-40B4-BE49-F238E27FC236}">
-                <a16:creationId xmlns:a16="http://schemas.microsoft.com/office/drawing/2014/main" id="{D120B4BF-1C44-7B13-24E3-E4EB804E5A25}"/>
-              </a:ext>
-            </a:extLst>
-          </p:cNvPr>
-          <p:cNvSpPr>
-            <a:spLocks noGrp="1" noRot="1" noChangeAspect="1"/>
-          </p:cNvSpPr>
-          <p:nvPr>
-            <p:ph type="sldImg"/>
-          </p:nvPr>
-        </p:nvSpPr>
-        <p:spPr/>
-      </p:sp>
-      <p:sp>
-        <p:nvSpPr>
-          <p:cNvPr id="3" name="Notes Placeholder 2">
-            <a:extLst>
-              <a:ext uri="{FF2B5EF4-FFF2-40B4-BE49-F238E27FC236}">
-                <a16:creationId xmlns:a16="http://schemas.microsoft.com/office/drawing/2014/main" id="{CC219837-68D3-F143-367F-B87E900AD64F}"/>
-              </a:ext>
-            </a:extLst>
-          </p:cNvPr>
-          <p:cNvSpPr>
-            <a:spLocks noGrp="1"/>
-          </p:cNvSpPr>
-          <p:nvPr>
-            <p:ph type="body" idx="1"/>
-          </p:nvPr>
-        </p:nvSpPr>
-        <p:spPr/>
-        <p:txBody>
-          <a:bodyPr/>
-          <a:lstStyle/>
-          <a:p>
-            <a:endParaRPr lang="en-US" dirty="0"/>
-          </a:p>
-        </p:txBody>
-      </p:sp>
-      <p:sp>
-        <p:nvSpPr>
-          <p:cNvPr id="4" name="Slide Number Placeholder 3">
-            <a:extLst>
-              <a:ext uri="{FF2B5EF4-FFF2-40B4-BE49-F238E27FC236}">
-                <a16:creationId xmlns:a16="http://schemas.microsoft.com/office/drawing/2014/main" id="{4224A3EB-CF28-B68B-155B-F9144C2D83EE}"/>
-              </a:ext>
-            </a:extLst>
-          </p:cNvPr>
-          <p:cNvSpPr>
-            <a:spLocks noGrp="1"/>
-          </p:cNvSpPr>
-          <p:nvPr>
-            <p:ph type="sldNum" sz="quarter" idx="10"/>
-          </p:nvPr>
-        </p:nvSpPr>
-        <p:spPr/>
-        <p:txBody>
-          <a:bodyPr/>
-          <a:lstStyle/>
-          <a:p>
-            <a:fld id="{F7021451-1387-4CA6-816F-3879F97B5CBC}" type="slidenum">
-              <a:rPr lang="en-US"/>
-              <a:t>3</a:t>
-            </a:fld>
-            <a:endParaRPr lang="en-US"/>
-          </a:p>
-        </p:txBody>
-      </p:sp>
-    </p:spTree>
-    <p:extLst>
-      <p:ext uri="{BB962C8B-B14F-4D97-AF65-F5344CB8AC3E}">
-        <p14:creationId xmlns:p14="http://schemas.microsoft.com/office/powerpoint/2010/main" val="2731053437"/>
-      </p:ext>
-    </p:extLst>
-  </p:cSld>
-  <p:clrMapOvr>
-    <a:masterClrMapping/>
-  </p:clrMapOvr>
-</p:notes>
-</file>
-
-<file path=ppt/notesSlides/notesSlide3.xml><?xml version="1.0" encoding="utf-8"?>
-<p:notes xmlns:a="http://schemas.openxmlformats.org/drawingml/2006/main" xmlns:r="http://schemas.openxmlformats.org/officeDocument/2006/relationships" xmlns:p="http://schemas.openxmlformats.org/presentationml/2006/main">
-  <p:cSld>
-    <p:spTree>
-      <p:nvGrpSpPr>
-        <p:cNvPr id="1" name="">
-          <a:extLst>
-            <a:ext uri="{FF2B5EF4-FFF2-40B4-BE49-F238E27FC236}">
-              <a16:creationId xmlns:a16="http://schemas.microsoft.com/office/drawing/2014/main" id="{81807342-7F24-482D-72F4-E3593A2FAE2F}"/>
-            </a:ext>
-          </a:extLst>
-        </p:cNvPr>
-        <p:cNvGrpSpPr/>
-        <p:nvPr/>
-      </p:nvGrpSpPr>
-      <p:grpSpPr>
-        <a:xfrm>
-          <a:off x="0" y="0"/>
-          <a:ext cx="0" cy="0"/>
-          <a:chOff x="0" y="0"/>
-          <a:chExt cx="0" cy="0"/>
-        </a:xfrm>
-      </p:grpSpPr>
-      <p:sp>
-        <p:nvSpPr>
-          <p:cNvPr id="2" name="Slide Image Placeholder 1">
-            <a:extLst>
-              <a:ext uri="{FF2B5EF4-FFF2-40B4-BE49-F238E27FC236}">
-                <a16:creationId xmlns:a16="http://schemas.microsoft.com/office/drawing/2014/main" id="{C614C5E0-9063-5ABC-AFF8-4B3E7F908541}"/>
-              </a:ext>
-            </a:extLst>
-          </p:cNvPr>
-          <p:cNvSpPr>
-            <a:spLocks noGrp="1" noRot="1" noChangeAspect="1"/>
-          </p:cNvSpPr>
-          <p:nvPr>
-            <p:ph type="sldImg"/>
-          </p:nvPr>
-        </p:nvSpPr>
-        <p:spPr/>
-      </p:sp>
-      <p:sp>
-        <p:nvSpPr>
-          <p:cNvPr id="3" name="Notes Placeholder 2">
-            <a:extLst>
-              <a:ext uri="{FF2B5EF4-FFF2-40B4-BE49-F238E27FC236}">
-                <a16:creationId xmlns:a16="http://schemas.microsoft.com/office/drawing/2014/main" id="{B7E6A333-1EF8-F06D-1A9D-C948CF2BFFC9}"/>
-              </a:ext>
-            </a:extLst>
-          </p:cNvPr>
-          <p:cNvSpPr>
-            <a:spLocks noGrp="1"/>
-          </p:cNvSpPr>
-          <p:nvPr>
-            <p:ph type="body" idx="1"/>
-          </p:nvPr>
-        </p:nvSpPr>
-        <p:spPr/>
-        <p:txBody>
-          <a:bodyPr/>
-          <a:lstStyle/>
-          <a:p>
-            <a:endParaRPr lang="en-US" dirty="0"/>
-          </a:p>
-        </p:txBody>
-      </p:sp>
-      <p:sp>
-        <p:nvSpPr>
-          <p:cNvPr id="4" name="Slide Number Placeholder 3">
-            <a:extLst>
-              <a:ext uri="{FF2B5EF4-FFF2-40B4-BE49-F238E27FC236}">
-                <a16:creationId xmlns:a16="http://schemas.microsoft.com/office/drawing/2014/main" id="{F89F10DA-97CC-6AA2-1EBA-E730FAA9C259}"/>
-              </a:ext>
-            </a:extLst>
-          </p:cNvPr>
-          <p:cNvSpPr>
-            <a:spLocks noGrp="1"/>
-          </p:cNvSpPr>
-          <p:nvPr>
-            <p:ph type="sldNum" sz="quarter" idx="10"/>
-          </p:nvPr>
-        </p:nvSpPr>
-        <p:spPr/>
-        <p:txBody>
-          <a:bodyPr/>
-          <a:lstStyle/>
-          <a:p>
-            <a:fld id="{F7021451-1387-4CA6-816F-3879F97B5CBC}" type="slidenum">
-              <a:rPr lang="en-US"/>
-              <a:t>4</a:t>
-            </a:fld>
-            <a:endParaRPr lang="en-US"/>
-          </a:p>
-        </p:txBody>
-      </p:sp>
-    </p:spTree>
-    <p:extLst>
-      <p:ext uri="{BB962C8B-B14F-4D97-AF65-F5344CB8AC3E}">
-        <p14:creationId xmlns:p14="http://schemas.microsoft.com/office/powerpoint/2010/main" val="4131768253"/>
-      </p:ext>
-    </p:extLst>
-  </p:cSld>
-  <p:clrMapOvr>
-    <a:masterClrMapping/>
-  </p:clrMapOvr>
-</p:notes>
-</file>
-
-<file path=ppt/notesSlides/notesSlide4.xml><?xml version="1.0" encoding="utf-8"?>
-<p:notes xmlns:a="http://schemas.openxmlformats.org/drawingml/2006/main" xmlns:r="http://schemas.openxmlformats.org/officeDocument/2006/relationships" xmlns:p="http://schemas.openxmlformats.org/presentationml/2006/main">
-  <p:cSld>
-    <p:spTree>
-      <p:nvGrpSpPr>
-        <p:cNvPr id="1" name="">
-          <a:extLst>
-            <a:ext uri="{FF2B5EF4-FFF2-40B4-BE49-F238E27FC236}">
-              <a16:creationId xmlns:a16="http://schemas.microsoft.com/office/drawing/2014/main" id="{72F8DEC4-A083-FC3C-0DCB-6CDD2188F186}"/>
-            </a:ext>
-          </a:extLst>
-        </p:cNvPr>
-        <p:cNvGrpSpPr/>
-        <p:nvPr/>
-      </p:nvGrpSpPr>
-      <p:grpSpPr>
-        <a:xfrm>
-          <a:off x="0" y="0"/>
-          <a:ext cx="0" cy="0"/>
-          <a:chOff x="0" y="0"/>
-          <a:chExt cx="0" cy="0"/>
-        </a:xfrm>
-      </p:grpSpPr>
-      <p:sp>
-        <p:nvSpPr>
-          <p:cNvPr id="2" name="Slide Image Placeholder 1">
-            <a:extLst>
-              <a:ext uri="{FF2B5EF4-FFF2-40B4-BE49-F238E27FC236}">
-                <a16:creationId xmlns:a16="http://schemas.microsoft.com/office/drawing/2014/main" id="{826CDEBD-E36A-D450-CA4E-60106DF16844}"/>
-              </a:ext>
-            </a:extLst>
-          </p:cNvPr>
-          <p:cNvSpPr>
-            <a:spLocks noGrp="1" noRot="1" noChangeAspect="1"/>
-          </p:cNvSpPr>
-          <p:nvPr>
-            <p:ph type="sldImg"/>
-          </p:nvPr>
-        </p:nvSpPr>
-        <p:spPr/>
-      </p:sp>
-      <p:sp>
-        <p:nvSpPr>
-          <p:cNvPr id="3" name="Notes Placeholder 2">
-            <a:extLst>
-              <a:ext uri="{FF2B5EF4-FFF2-40B4-BE49-F238E27FC236}">
-                <a16:creationId xmlns:a16="http://schemas.microsoft.com/office/drawing/2014/main" id="{E4BDF9FD-BB55-92EC-558D-DE16262B8C96}"/>
-              </a:ext>
-            </a:extLst>
-          </p:cNvPr>
-          <p:cNvSpPr>
-            <a:spLocks noGrp="1"/>
-          </p:cNvSpPr>
-          <p:nvPr>
-            <p:ph type="body" idx="1"/>
-          </p:nvPr>
-        </p:nvSpPr>
-        <p:spPr/>
-        <p:txBody>
-          <a:bodyPr/>
-          <a:lstStyle/>
-          <a:p>
-            <a:endParaRPr lang="en-US" dirty="0"/>
-          </a:p>
-        </p:txBody>
-      </p:sp>
-      <p:sp>
-        <p:nvSpPr>
-          <p:cNvPr id="4" name="Slide Number Placeholder 3">
-            <a:extLst>
-              <a:ext uri="{FF2B5EF4-FFF2-40B4-BE49-F238E27FC236}">
-                <a16:creationId xmlns:a16="http://schemas.microsoft.com/office/drawing/2014/main" id="{BDC145D9-FCD0-FAA9-FEB0-E29027965A20}"/>
-              </a:ext>
-            </a:extLst>
-          </p:cNvPr>
-          <p:cNvSpPr>
-            <a:spLocks noGrp="1"/>
-          </p:cNvSpPr>
-          <p:nvPr>
-            <p:ph type="sldNum" sz="quarter" idx="10"/>
-          </p:nvPr>
-        </p:nvSpPr>
-        <p:spPr/>
-        <p:txBody>
-          <a:bodyPr/>
-          <a:lstStyle/>
-          <a:p>
-            <a:fld id="{F7021451-1387-4CA6-816F-3879F97B5CBC}" type="slidenum">
-              <a:rPr lang="en-US"/>
-              <a:t>5</a:t>
-            </a:fld>
-            <a:endParaRPr lang="en-US"/>
-          </a:p>
-        </p:txBody>
-      </p:sp>
-    </p:spTree>
-    <p:extLst>
-      <p:ext uri="{BB962C8B-B14F-4D97-AF65-F5344CB8AC3E}">
-        <p14:creationId xmlns:p14="http://schemas.microsoft.com/office/powerpoint/2010/main" val="2166814242"/>
-      </p:ext>
-    </p:extLst>
-  </p:cSld>
-  <p:clrMapOvr>
-    <a:masterClrMapping/>
-  </p:clrMapOvr>
-</p:notes>
-</file>
-
-<file path=ppt/notesSlides/notesSlide5.xml><?xml version="1.0" encoding="utf-8"?>
-<p:notes xmlns:a="http://schemas.openxmlformats.org/drawingml/2006/main" xmlns:r="http://schemas.openxmlformats.org/officeDocument/2006/relationships" xmlns:p="http://schemas.openxmlformats.org/presentationml/2006/main">
-  <p:cSld>
-    <p:spTree>
-      <p:nvGrpSpPr>
-        <p:cNvPr id="1" name="">
-          <a:extLst>
-            <a:ext uri="{FF2B5EF4-FFF2-40B4-BE49-F238E27FC236}">
-              <a16:creationId xmlns:a16="http://schemas.microsoft.com/office/drawing/2014/main" id="{33013180-4DC9-8255-48EB-6F5F41D3C11A}"/>
-            </a:ext>
-          </a:extLst>
-        </p:cNvPr>
-        <p:cNvGrpSpPr/>
-        <p:nvPr/>
-      </p:nvGrpSpPr>
-      <p:grpSpPr>
-        <a:xfrm>
-          <a:off x="0" y="0"/>
-          <a:ext cx="0" cy="0"/>
-          <a:chOff x="0" y="0"/>
-          <a:chExt cx="0" cy="0"/>
-        </a:xfrm>
-      </p:grpSpPr>
-      <p:sp>
-        <p:nvSpPr>
-          <p:cNvPr id="2" name="Slide Image Placeholder 1">
-            <a:extLst>
-              <a:ext uri="{FF2B5EF4-FFF2-40B4-BE49-F238E27FC236}">
-                <a16:creationId xmlns:a16="http://schemas.microsoft.com/office/drawing/2014/main" id="{CDDB9B8E-2C40-14AC-6F7E-DDB9F59F25E1}"/>
-              </a:ext>
-            </a:extLst>
-          </p:cNvPr>
-          <p:cNvSpPr>
-            <a:spLocks noGrp="1" noRot="1" noChangeAspect="1"/>
-          </p:cNvSpPr>
-          <p:nvPr>
-            <p:ph type="sldImg"/>
-          </p:nvPr>
-        </p:nvSpPr>
-        <p:spPr/>
-      </p:sp>
-      <p:sp>
-        <p:nvSpPr>
-          <p:cNvPr id="3" name="Notes Placeholder 2">
-            <a:extLst>
-              <a:ext uri="{FF2B5EF4-FFF2-40B4-BE49-F238E27FC236}">
-                <a16:creationId xmlns:a16="http://schemas.microsoft.com/office/drawing/2014/main" id="{C6C91647-30BC-390C-8FD1-E55771EE2865}"/>
-              </a:ext>
-            </a:extLst>
-          </p:cNvPr>
-          <p:cNvSpPr>
-            <a:spLocks noGrp="1"/>
-          </p:cNvSpPr>
-          <p:nvPr>
-            <p:ph type="body" idx="1"/>
-          </p:nvPr>
-        </p:nvSpPr>
-        <p:spPr/>
-        <p:txBody>
-          <a:bodyPr/>
-          <a:lstStyle/>
-          <a:p>
-            <a:endParaRPr lang="en-US" dirty="0"/>
-          </a:p>
-        </p:txBody>
-      </p:sp>
-      <p:sp>
-        <p:nvSpPr>
-          <p:cNvPr id="4" name="Slide Number Placeholder 3">
-            <a:extLst>
-              <a:ext uri="{FF2B5EF4-FFF2-40B4-BE49-F238E27FC236}">
-                <a16:creationId xmlns:a16="http://schemas.microsoft.com/office/drawing/2014/main" id="{7D19E681-28FD-8173-437F-EEAAF4E72BC3}"/>
-              </a:ext>
-            </a:extLst>
-          </p:cNvPr>
-          <p:cNvSpPr>
-            <a:spLocks noGrp="1"/>
-          </p:cNvSpPr>
-          <p:nvPr>
-            <p:ph type="sldNum" sz="quarter" idx="10"/>
-          </p:nvPr>
-        </p:nvSpPr>
-        <p:spPr/>
-        <p:txBody>
-          <a:bodyPr/>
-          <a:lstStyle/>
-          <a:p>
-            <a:fld id="{F7021451-1387-4CA6-816F-3879F97B5CBC}" type="slidenum">
-              <a:rPr lang="en-US"/>
-              <a:t>6</a:t>
-            </a:fld>
-            <a:endParaRPr lang="en-US"/>
-          </a:p>
-        </p:txBody>
-      </p:sp>
-    </p:spTree>
-    <p:extLst>
-      <p:ext uri="{BB962C8B-B14F-4D97-AF65-F5344CB8AC3E}">
-        <p14:creationId xmlns:p14="http://schemas.microsoft.com/office/powerpoint/2010/main" val="4166327224"/>
-      </p:ext>
-    </p:extLst>
-  </p:cSld>
-  <p:clrMapOvr>
-    <a:masterClrMapping/>
-  </p:clrMapOvr>
-</p:notes>
-</file>
-
-<file path=ppt/notesSlides/notesSlide6.xml><?xml version="1.0" encoding="utf-8"?>
-<p:notes xmlns:a="http://schemas.openxmlformats.org/drawingml/2006/main" xmlns:r="http://schemas.openxmlformats.org/officeDocument/2006/relationships" xmlns:p="http://schemas.openxmlformats.org/presentationml/2006/main">
-  <p:cSld>
-    <p:spTree>
-      <p:nvGrpSpPr>
-        <p:cNvPr id="1" name="">
-          <a:extLst>
-            <a:ext uri="{FF2B5EF4-FFF2-40B4-BE49-F238E27FC236}">
-              <a16:creationId xmlns:a16="http://schemas.microsoft.com/office/drawing/2014/main" id="{DD6C64F3-88BA-77BE-7C13-E8206E43A4F3}"/>
-            </a:ext>
-          </a:extLst>
-        </p:cNvPr>
-        <p:cNvGrpSpPr/>
-        <p:nvPr/>
-      </p:nvGrpSpPr>
-      <p:grpSpPr>
-        <a:xfrm>
-          <a:off x="0" y="0"/>
-          <a:ext cx="0" cy="0"/>
-          <a:chOff x="0" y="0"/>
-          <a:chExt cx="0" cy="0"/>
-        </a:xfrm>
-      </p:grpSpPr>
-      <p:sp>
-        <p:nvSpPr>
-          <p:cNvPr id="2" name="Slide Image Placeholder 1">
-            <a:extLst>
-              <a:ext uri="{FF2B5EF4-FFF2-40B4-BE49-F238E27FC236}">
-                <a16:creationId xmlns:a16="http://schemas.microsoft.com/office/drawing/2014/main" id="{17A29EAC-0A34-F327-DA2E-7ADA8AD5637E}"/>
-              </a:ext>
-            </a:extLst>
-          </p:cNvPr>
-          <p:cNvSpPr>
-            <a:spLocks noGrp="1" noRot="1" noChangeAspect="1"/>
-          </p:cNvSpPr>
-          <p:nvPr>
-            <p:ph type="sldImg"/>
-          </p:nvPr>
-        </p:nvSpPr>
-        <p:spPr/>
-      </p:sp>
-      <p:sp>
-        <p:nvSpPr>
-          <p:cNvPr id="3" name="Notes Placeholder 2">
-            <a:extLst>
-              <a:ext uri="{FF2B5EF4-FFF2-40B4-BE49-F238E27FC236}">
-                <a16:creationId xmlns:a16="http://schemas.microsoft.com/office/drawing/2014/main" id="{6BCADEF3-1180-37AD-E1A4-B782761739DC}"/>
-              </a:ext>
-            </a:extLst>
-          </p:cNvPr>
-          <p:cNvSpPr>
-            <a:spLocks noGrp="1"/>
-          </p:cNvSpPr>
-          <p:nvPr>
-            <p:ph type="body" idx="1"/>
-          </p:nvPr>
-        </p:nvSpPr>
-        <p:spPr/>
-        <p:txBody>
-          <a:bodyPr/>
-          <a:lstStyle/>
-          <a:p>
-            <a:endParaRPr lang="en-US" dirty="0"/>
-          </a:p>
-        </p:txBody>
-      </p:sp>
-      <p:sp>
-        <p:nvSpPr>
-          <p:cNvPr id="4" name="Slide Number Placeholder 3">
-            <a:extLst>
-              <a:ext uri="{FF2B5EF4-FFF2-40B4-BE49-F238E27FC236}">
-                <a16:creationId xmlns:a16="http://schemas.microsoft.com/office/drawing/2014/main" id="{33705FFA-E2E7-37C7-2237-832F6A66E5AA}"/>
-              </a:ext>
-            </a:extLst>
-          </p:cNvPr>
-          <p:cNvSpPr>
-            <a:spLocks noGrp="1"/>
-          </p:cNvSpPr>
-          <p:nvPr>
-            <p:ph type="sldNum" sz="quarter" idx="10"/>
-          </p:nvPr>
-        </p:nvSpPr>
-        <p:spPr/>
-        <p:txBody>
-          <a:bodyPr/>
-          <a:lstStyle/>
-          <a:p>
-            <a:fld id="{F7021451-1387-4CA6-816F-3879F97B5CBC}" type="slidenum">
-              <a:rPr lang="en-US"/>
-              <a:t>7</a:t>
-            </a:fld>
-            <a:endParaRPr lang="en-US"/>
-          </a:p>
-        </p:txBody>
-      </p:sp>
-    </p:spTree>
-    <p:extLst>
-      <p:ext uri="{BB962C8B-B14F-4D97-AF65-F5344CB8AC3E}">
-        <p14:creationId xmlns:p14="http://schemas.microsoft.com/office/powerpoint/2010/main" val="3662002899"/>
-      </p:ext>
-    </p:extLst>
-  </p:cSld>
-  <p:clrMapOvr>
-    <a:masterClrMapping/>
-  </p:clrMapOvr>
-</p:notes>
-</file>
-
-<file path=ppt/notesSlides/notesSlide7.xml><?xml version="1.0" encoding="utf-8"?>
-<p:notes xmlns:a="http://schemas.openxmlformats.org/drawingml/2006/main" xmlns:r="http://schemas.openxmlformats.org/officeDocument/2006/relationships" xmlns:p="http://schemas.openxmlformats.org/presentationml/2006/main">
-  <p:cSld>
-    <p:spTree>
-      <p:nvGrpSpPr>
-        <p:cNvPr id="1" name="">
-          <a:extLst>
-            <a:ext uri="{FF2B5EF4-FFF2-40B4-BE49-F238E27FC236}">
-              <a16:creationId xmlns:a16="http://schemas.microsoft.com/office/drawing/2014/main" id="{9AD8C321-7C37-72E8-BF0A-86E7E246AD17}"/>
-            </a:ext>
-          </a:extLst>
-        </p:cNvPr>
-        <p:cNvGrpSpPr/>
-        <p:nvPr/>
-      </p:nvGrpSpPr>
-      <p:grpSpPr>
-        <a:xfrm>
-          <a:off x="0" y="0"/>
-          <a:ext cx="0" cy="0"/>
-          <a:chOff x="0" y="0"/>
-          <a:chExt cx="0" cy="0"/>
-        </a:xfrm>
-      </p:grpSpPr>
-      <p:sp>
-        <p:nvSpPr>
-          <p:cNvPr id="2" name="Slide Image Placeholder 1">
-            <a:extLst>
-              <a:ext uri="{FF2B5EF4-FFF2-40B4-BE49-F238E27FC236}">
-                <a16:creationId xmlns:a16="http://schemas.microsoft.com/office/drawing/2014/main" id="{AD3AC92F-FE80-BFC6-3735-42DA4EC9F3B1}"/>
-              </a:ext>
-            </a:extLst>
-          </p:cNvPr>
-          <p:cNvSpPr>
-            <a:spLocks noGrp="1" noRot="1" noChangeAspect="1"/>
-          </p:cNvSpPr>
-          <p:nvPr>
-            <p:ph type="sldImg"/>
-          </p:nvPr>
-        </p:nvSpPr>
-        <p:spPr/>
-      </p:sp>
-      <p:sp>
-        <p:nvSpPr>
-          <p:cNvPr id="3" name="Notes Placeholder 2">
-            <a:extLst>
-              <a:ext uri="{FF2B5EF4-FFF2-40B4-BE49-F238E27FC236}">
-                <a16:creationId xmlns:a16="http://schemas.microsoft.com/office/drawing/2014/main" id="{065301CF-C452-035C-4109-83D70851A2C2}"/>
-              </a:ext>
-            </a:extLst>
-          </p:cNvPr>
-          <p:cNvSpPr>
-            <a:spLocks noGrp="1"/>
-          </p:cNvSpPr>
-          <p:nvPr>
-            <p:ph type="body" idx="1"/>
-          </p:nvPr>
-        </p:nvSpPr>
-        <p:spPr/>
-        <p:txBody>
-          <a:bodyPr/>
-          <a:lstStyle/>
-          <a:p>
-            <a:endParaRPr lang="en-US" dirty="0"/>
-          </a:p>
-        </p:txBody>
-      </p:sp>
-      <p:sp>
-        <p:nvSpPr>
-          <p:cNvPr id="4" name="Slide Number Placeholder 3">
-            <a:extLst>
-              <a:ext uri="{FF2B5EF4-FFF2-40B4-BE49-F238E27FC236}">
-                <a16:creationId xmlns:a16="http://schemas.microsoft.com/office/drawing/2014/main" id="{9B79D361-B571-4120-1547-3B4765797DD3}"/>
-              </a:ext>
-            </a:extLst>
-          </p:cNvPr>
-          <p:cNvSpPr>
-            <a:spLocks noGrp="1"/>
-          </p:cNvSpPr>
-          <p:nvPr>
-            <p:ph type="sldNum" sz="quarter" idx="10"/>
-          </p:nvPr>
-        </p:nvSpPr>
-        <p:spPr/>
-        <p:txBody>
-          <a:bodyPr/>
-          <a:lstStyle/>
-          <a:p>
-            <a:fld id="{F7021451-1387-4CA6-816F-3879F97B5CBC}" type="slidenum">
-              <a:rPr lang="en-US"/>
-              <a:t>8</a:t>
-            </a:fld>
-            <a:endParaRPr lang="en-US"/>
-          </a:p>
-        </p:txBody>
-      </p:sp>
-    </p:spTree>
-    <p:extLst>
-      <p:ext uri="{BB962C8B-B14F-4D97-AF65-F5344CB8AC3E}">
-        <p14:creationId xmlns:p14="http://schemas.microsoft.com/office/powerpoint/2010/main" val="3433915512"/>
-      </p:ext>
-    </p:extLst>
-  </p:cSld>
-  <p:clrMapOvr>
-    <a:masterClrMapping/>
-  </p:clrMapOvr>
-</p:notes>
-</file>
-
-<file path=ppt/notesSlides/notesSlide8.xml><?xml version="1.0" encoding="utf-8"?>
+<file path=ppt/notesSlides/notesSlide10.xml><?xml version="1.0" encoding="utf-8"?>
 <p:notes xmlns:a="http://schemas.openxmlformats.org/drawingml/2006/main" xmlns:r="http://schemas.openxmlformats.org/officeDocument/2006/relationships" xmlns:p="http://schemas.openxmlformats.org/presentationml/2006/main">
   <p:cSld>
     <p:spTree>
@@ -4795,6 +4208,1672 @@
           <a:p>
             <a:fld id="{F7021451-1387-4CA6-816F-3879F97B5CBC}" type="slidenum">
               <a:rPr lang="en-US"/>
+              <a:t>10</a:t>
+            </a:fld>
+            <a:endParaRPr lang="en-US"/>
+          </a:p>
+        </p:txBody>
+      </p:sp>
+    </p:spTree>
+    <p:extLst>
+      <p:ext uri="{BB962C8B-B14F-4D97-AF65-F5344CB8AC3E}">
+        <p14:creationId xmlns:p14="http://schemas.microsoft.com/office/powerpoint/2010/main" val="1320550848"/>
+      </p:ext>
+    </p:extLst>
+  </p:cSld>
+  <p:clrMapOvr>
+    <a:masterClrMapping/>
+  </p:clrMapOvr>
+</p:notes>
+</file>
+
+<file path=ppt/notesSlides/notesSlide2.xml><?xml version="1.0" encoding="utf-8"?>
+<p:notes xmlns:a="http://schemas.openxmlformats.org/drawingml/2006/main" xmlns:r="http://schemas.openxmlformats.org/officeDocument/2006/relationships" xmlns:p="http://schemas.openxmlformats.org/presentationml/2006/main">
+  <p:cSld>
+    <p:spTree>
+      <p:nvGrpSpPr>
+        <p:cNvPr id="1" name=""/>
+        <p:cNvGrpSpPr/>
+        <p:nvPr/>
+      </p:nvGrpSpPr>
+      <p:grpSpPr>
+        <a:xfrm>
+          <a:off x="0" y="0"/>
+          <a:ext cx="0" cy="0"/>
+          <a:chOff x="0" y="0"/>
+          <a:chExt cx="0" cy="0"/>
+        </a:xfrm>
+      </p:grpSpPr>
+      <p:sp>
+        <p:nvSpPr>
+          <p:cNvPr id="2" name="Slide Image Placeholder 1"/>
+          <p:cNvSpPr>
+            <a:spLocks noGrp="1" noRot="1" noChangeAspect="1"/>
+          </p:cNvSpPr>
+          <p:nvPr>
+            <p:ph type="sldImg"/>
+          </p:nvPr>
+        </p:nvSpPr>
+        <p:spPr>
+          <a:xfrm>
+            <a:off x="-228600" y="1524000"/>
+            <a:ext cx="7315200" cy="4114800"/>
+          </a:xfrm>
+          <a:prstGeom prst="rect">
+            <a:avLst/>
+          </a:prstGeom>
+          <a:noFill/>
+          <a:ln w="12700">
+            <a:solidFill>
+              <a:prstClr val="black"/>
+            </a:solidFill>
+          </a:ln>
+        </p:spPr>
+      </p:sp>
+      <p:sp>
+        <p:nvSpPr>
+          <p:cNvPr id="3" name="Notes Placeholder 2"/>
+          <p:cNvSpPr>
+            <a:spLocks noGrp="1"/>
+          </p:cNvSpPr>
+          <p:nvPr>
+            <p:ph type="body" idx="1"/>
+          </p:nvPr>
+        </p:nvSpPr>
+        <p:spPr>
+          <a:xfrm>
+            <a:off x="685800" y="5867400"/>
+            <a:ext cx="5486400" cy="4800600"/>
+          </a:xfrm>
+          <a:prstGeom prst="rect">
+            <a:avLst/>
+          </a:prstGeom>
+        </p:spPr>
+        <p:txBody>
+          <a:bodyPr/>
+          <a:lstStyle/>
+          <a:p>
+            <a:r>
+              <a:rPr lang="en-US" b="1" dirty="0"/>
+              <a:t>Slide 2 — [Transition] (0:20–0:30)</a:t>
+            </a:r>
+          </a:p>
+          <a:p>
+            <a:r>
+              <a:rPr lang="en-US" dirty="0"/>
+              <a:t>Before we get into the solution, let's talk about the problem that inspired it.</a:t>
+            </a:r>
+          </a:p>
+          <a:p>
+            <a:endParaRPr lang="en-US" dirty="0"/>
+          </a:p>
+        </p:txBody>
+      </p:sp>
+    </p:spTree>
+    <p:extLst>
+      <p:ext uri="{BB962C8B-B14F-4D97-AF65-F5344CB8AC3E}">
+        <p14:creationId xmlns:p14="http://schemas.microsoft.com/office/powerpoint/2010/main" val="2847074515"/>
+      </p:ext>
+    </p:extLst>
+  </p:cSld>
+  <p:clrMapOvr>
+    <a:masterClrMapping/>
+  </p:clrMapOvr>
+</p:notes>
+</file>
+
+<file path=ppt/notesSlides/notesSlide3.xml><?xml version="1.0" encoding="utf-8"?>
+<p:notes xmlns:a="http://schemas.openxmlformats.org/drawingml/2006/main" xmlns:r="http://schemas.openxmlformats.org/officeDocument/2006/relationships" xmlns:p="http://schemas.openxmlformats.org/presentationml/2006/main">
+  <p:cSld>
+    <p:spTree>
+      <p:nvGrpSpPr>
+        <p:cNvPr id="1" name="">
+          <a:extLst>
+            <a:ext uri="{FF2B5EF4-FFF2-40B4-BE49-F238E27FC236}">
+              <a16:creationId xmlns:a16="http://schemas.microsoft.com/office/drawing/2014/main" id="{1196312A-7D2E-8BAC-E3A8-88E2615C2D0E}"/>
+            </a:ext>
+          </a:extLst>
+        </p:cNvPr>
+        <p:cNvGrpSpPr/>
+        <p:nvPr/>
+      </p:nvGrpSpPr>
+      <p:grpSpPr>
+        <a:xfrm>
+          <a:off x="0" y="0"/>
+          <a:ext cx="0" cy="0"/>
+          <a:chOff x="0" y="0"/>
+          <a:chExt cx="0" cy="0"/>
+        </a:xfrm>
+      </p:grpSpPr>
+      <p:sp>
+        <p:nvSpPr>
+          <p:cNvPr id="2" name="Slide Image Placeholder 1">
+            <a:extLst>
+              <a:ext uri="{FF2B5EF4-FFF2-40B4-BE49-F238E27FC236}">
+                <a16:creationId xmlns:a16="http://schemas.microsoft.com/office/drawing/2014/main" id="{D120B4BF-1C44-7B13-24E3-E4EB804E5A25}"/>
+              </a:ext>
+            </a:extLst>
+          </p:cNvPr>
+          <p:cNvSpPr>
+            <a:spLocks noGrp="1" noRot="1" noChangeAspect="1"/>
+          </p:cNvSpPr>
+          <p:nvPr>
+            <p:ph type="sldImg"/>
+          </p:nvPr>
+        </p:nvSpPr>
+        <p:spPr/>
+      </p:sp>
+      <p:sp>
+        <p:nvSpPr>
+          <p:cNvPr id="3" name="Notes Placeholder 2">
+            <a:extLst>
+              <a:ext uri="{FF2B5EF4-FFF2-40B4-BE49-F238E27FC236}">
+                <a16:creationId xmlns:a16="http://schemas.microsoft.com/office/drawing/2014/main" id="{CC219837-68D3-F143-367F-B87E900AD64F}"/>
+              </a:ext>
+            </a:extLst>
+          </p:cNvPr>
+          <p:cNvSpPr>
+            <a:spLocks noGrp="1"/>
+          </p:cNvSpPr>
+          <p:nvPr>
+            <p:ph type="body" idx="1"/>
+          </p:nvPr>
+        </p:nvSpPr>
+        <p:spPr/>
+        <p:txBody>
+          <a:bodyPr/>
+          <a:lstStyle/>
+          <a:p>
+            <a:r>
+              <a:rPr lang="en-US" b="1" dirty="0"/>
+              <a:t>Slide 3 — Problem Statement (0:30–1:20)</a:t>
+            </a:r>
+          </a:p>
+          <a:p>
+            <a:r>
+              <a:rPr lang="en-US" dirty="0"/>
+              <a:t>Enterprises today expose hundreds of APIs. </a:t>
+            </a:r>
+            <a:r>
+              <a:rPr lang="en-US" dirty="0" err="1"/>
+              <a:t>OpenAPI</a:t>
+            </a:r>
+            <a:r>
+              <a:rPr lang="en-US" dirty="0"/>
+              <a:t> specifications are the contract that governs them — but in practice, these specs routinely ship </a:t>
+            </a:r>
+            <a:r>
+              <a:rPr lang="en-US" i="1" dirty="0"/>
+              <a:t>without</a:t>
+            </a:r>
+            <a:r>
+              <a:rPr lang="en-US" dirty="0"/>
+              <a:t> security schemes, proper error handling, or governance standards. The numbers are stark: The average cost of an API breach is more than </a:t>
+            </a:r>
+            <a:r>
+              <a:rPr lang="en-US" b="1" dirty="0"/>
+              <a:t>$4 million per incident </a:t>
+            </a:r>
+            <a:r>
+              <a:rPr lang="en-US" b="0" dirty="0"/>
+              <a:t>(as per </a:t>
+            </a:r>
+            <a:r>
+              <a:rPr lang="en-US" sz="1200" b="0" i="0" kern="1200" dirty="0">
+                <a:solidFill>
+                  <a:schemeClr val="tx1"/>
+                </a:solidFill>
+                <a:effectLst/>
+                <a:latin typeface="+mn-lt"/>
+                <a:ea typeface="+mn-ea"/>
+                <a:cs typeface="+mn-cs"/>
+              </a:rPr>
+              <a:t>IBM Cost of a Data Breach Report 2025</a:t>
+            </a:r>
+            <a:r>
+              <a:rPr lang="en-US" b="0" dirty="0"/>
+              <a:t>)</a:t>
+            </a:r>
+            <a:r>
+              <a:rPr lang="en-US" dirty="0"/>
+              <a:t>.</a:t>
+            </a:r>
+          </a:p>
+          <a:p>
+            <a:endParaRPr lang="en-US" b="1" dirty="0"/>
+          </a:p>
+          <a:p>
+            <a:r>
+              <a:rPr lang="en-US" b="1" dirty="0"/>
+              <a:t>57% of organizations</a:t>
+            </a:r>
+            <a:r>
+              <a:rPr lang="en-US" dirty="0"/>
+              <a:t> have experienced an API breach in the last two years.</a:t>
+            </a:r>
+          </a:p>
+          <a:p>
+            <a:endParaRPr lang="en-US" dirty="0"/>
+          </a:p>
+          <a:p>
+            <a:r>
+              <a:rPr lang="en-US" dirty="0"/>
+              <a:t>And yet, API reviews today are largely </a:t>
+            </a:r>
+            <a:r>
+              <a:rPr lang="en-US" b="1" dirty="0"/>
+              <a:t>manual</a:t>
+            </a:r>
+            <a:r>
+              <a:rPr lang="en-US" dirty="0"/>
+              <a:t> — slow, inconsistent, and impossible to scale.</a:t>
+            </a:r>
+          </a:p>
+          <a:p>
+            <a:r>
+              <a:rPr lang="en-US" dirty="0"/>
+              <a:t>Common failures we see: missing OAuth2 or JWT authentication, undocumented 401 and 403 error responses, inconsistent naming conventions, and zero alignment with OWASP or ISO standards.</a:t>
+            </a:r>
+          </a:p>
+          <a:p>
+            <a:endParaRPr lang="en-US" dirty="0"/>
+          </a:p>
+          <a:p>
+            <a:r>
+              <a:rPr lang="en-US" dirty="0"/>
+              <a:t>The result? Every ungoverned API that ships becomes a liability waiting to be discovered in production.</a:t>
+            </a:r>
+          </a:p>
+          <a:p>
+            <a:endParaRPr lang="en-US" dirty="0"/>
+          </a:p>
+        </p:txBody>
+      </p:sp>
+      <p:sp>
+        <p:nvSpPr>
+          <p:cNvPr id="4" name="Slide Number Placeholder 3">
+            <a:extLst>
+              <a:ext uri="{FF2B5EF4-FFF2-40B4-BE49-F238E27FC236}">
+                <a16:creationId xmlns:a16="http://schemas.microsoft.com/office/drawing/2014/main" id="{4224A3EB-CF28-B68B-155B-F9144C2D83EE}"/>
+              </a:ext>
+            </a:extLst>
+          </p:cNvPr>
+          <p:cNvSpPr>
+            <a:spLocks noGrp="1"/>
+          </p:cNvSpPr>
+          <p:nvPr>
+            <p:ph type="sldNum" sz="quarter" idx="10"/>
+          </p:nvPr>
+        </p:nvSpPr>
+        <p:spPr/>
+        <p:txBody>
+          <a:bodyPr/>
+          <a:lstStyle/>
+          <a:p>
+            <a:fld id="{F7021451-1387-4CA6-816F-3879F97B5CBC}" type="slidenum">
+              <a:rPr lang="en-US"/>
+              <a:t>3</a:t>
+            </a:fld>
+            <a:endParaRPr lang="en-US"/>
+          </a:p>
+        </p:txBody>
+      </p:sp>
+    </p:spTree>
+    <p:extLst>
+      <p:ext uri="{BB962C8B-B14F-4D97-AF65-F5344CB8AC3E}">
+        <p14:creationId xmlns:p14="http://schemas.microsoft.com/office/powerpoint/2010/main" val="2731053437"/>
+      </p:ext>
+    </p:extLst>
+  </p:cSld>
+  <p:clrMapOvr>
+    <a:masterClrMapping/>
+  </p:clrMapOvr>
+</p:notes>
+</file>
+
+<file path=ppt/notesSlides/notesSlide4.xml><?xml version="1.0" encoding="utf-8"?>
+<p:notes xmlns:a="http://schemas.openxmlformats.org/drawingml/2006/main" xmlns:r="http://schemas.openxmlformats.org/officeDocument/2006/relationships" xmlns:p="http://schemas.openxmlformats.org/presentationml/2006/main">
+  <p:cSld>
+    <p:spTree>
+      <p:nvGrpSpPr>
+        <p:cNvPr id="1" name="">
+          <a:extLst>
+            <a:ext uri="{FF2B5EF4-FFF2-40B4-BE49-F238E27FC236}">
+              <a16:creationId xmlns:a16="http://schemas.microsoft.com/office/drawing/2014/main" id="{81807342-7F24-482D-72F4-E3593A2FAE2F}"/>
+            </a:ext>
+          </a:extLst>
+        </p:cNvPr>
+        <p:cNvGrpSpPr/>
+        <p:nvPr/>
+      </p:nvGrpSpPr>
+      <p:grpSpPr>
+        <a:xfrm>
+          <a:off x="0" y="0"/>
+          <a:ext cx="0" cy="0"/>
+          <a:chOff x="0" y="0"/>
+          <a:chExt cx="0" cy="0"/>
+        </a:xfrm>
+      </p:grpSpPr>
+      <p:sp>
+        <p:nvSpPr>
+          <p:cNvPr id="2" name="Slide Image Placeholder 1">
+            <a:extLst>
+              <a:ext uri="{FF2B5EF4-FFF2-40B4-BE49-F238E27FC236}">
+                <a16:creationId xmlns:a16="http://schemas.microsoft.com/office/drawing/2014/main" id="{C614C5E0-9063-5ABC-AFF8-4B3E7F908541}"/>
+              </a:ext>
+            </a:extLst>
+          </p:cNvPr>
+          <p:cNvSpPr>
+            <a:spLocks noGrp="1" noRot="1" noChangeAspect="1"/>
+          </p:cNvSpPr>
+          <p:nvPr>
+            <p:ph type="sldImg"/>
+          </p:nvPr>
+        </p:nvSpPr>
+        <p:spPr/>
+      </p:sp>
+      <p:sp>
+        <p:nvSpPr>
+          <p:cNvPr id="3" name="Notes Placeholder 2">
+            <a:extLst>
+              <a:ext uri="{FF2B5EF4-FFF2-40B4-BE49-F238E27FC236}">
+                <a16:creationId xmlns:a16="http://schemas.microsoft.com/office/drawing/2014/main" id="{B7E6A333-1EF8-F06D-1A9D-C948CF2BFFC9}"/>
+              </a:ext>
+            </a:extLst>
+          </p:cNvPr>
+          <p:cNvSpPr>
+            <a:spLocks noGrp="1"/>
+          </p:cNvSpPr>
+          <p:nvPr>
+            <p:ph type="body" idx="1"/>
+          </p:nvPr>
+        </p:nvSpPr>
+        <p:spPr/>
+        <p:txBody>
+          <a:bodyPr/>
+          <a:lstStyle/>
+          <a:p>
+            <a:r>
+              <a:rPr lang="en-US" b="1" dirty="0"/>
+              <a:t>Slide 4 — MVP Implementation Scope (1:20–2:10)</a:t>
+            </a:r>
+          </a:p>
+          <a:p>
+            <a:r>
+              <a:rPr lang="en-US" dirty="0"/>
+              <a:t>This is exactly what </a:t>
+            </a:r>
+            <a:r>
+              <a:rPr lang="en-US" dirty="0" err="1"/>
+              <a:t>SpecSentinel</a:t>
+            </a:r>
+            <a:r>
+              <a:rPr lang="en-US" dirty="0"/>
+              <a:t> solves. But let me be specific about </a:t>
+            </a:r>
+            <a:r>
+              <a:rPr lang="en-US" i="1" dirty="0"/>
+              <a:t>how</a:t>
+            </a:r>
+            <a:r>
+              <a:rPr lang="en-US" dirty="0"/>
+              <a:t> — because the approach is fundamentally agentic, not just automated.</a:t>
+            </a:r>
+          </a:p>
+          <a:p>
+            <a:r>
+              <a:rPr lang="en-US" dirty="0"/>
+              <a:t>Traditional tools apply static rules. </a:t>
+            </a:r>
+            <a:r>
+              <a:rPr lang="en-US" dirty="0" err="1"/>
+              <a:t>SpecSentinel</a:t>
+            </a:r>
+            <a:r>
+              <a:rPr lang="en-US" dirty="0"/>
+              <a:t> deploys a </a:t>
+            </a:r>
+            <a:r>
+              <a:rPr lang="en-US" b="1" dirty="0"/>
+              <a:t>closed-loop agentic cycle</a:t>
+            </a:r>
+            <a:r>
+              <a:rPr lang="en-US" dirty="0"/>
+              <a:t> powered by </a:t>
+            </a:r>
+            <a:r>
+              <a:rPr lang="en-US" dirty="0" err="1"/>
+              <a:t>WatsonX</a:t>
+            </a:r>
+            <a:r>
+              <a:rPr lang="en-US" dirty="0"/>
+              <a:t> AI:</a:t>
+            </a:r>
+          </a:p>
+          <a:p>
+            <a:r>
+              <a:rPr lang="en-US" b="1" dirty="0"/>
+              <a:t>                                       Plan → Analyze → Categorize → Recommend → Score → Improve</a:t>
+            </a:r>
+            <a:endParaRPr lang="en-US" dirty="0"/>
+          </a:p>
+          <a:p>
+            <a:endParaRPr lang="en-US" dirty="0"/>
+          </a:p>
+          <a:p>
+            <a:r>
+              <a:rPr lang="en-US" dirty="0"/>
+              <a:t>At each stage, the AI agent doesn't just execute a fixed script — it </a:t>
+            </a:r>
+            <a:r>
+              <a:rPr lang="en-US" b="1" i="1" dirty="0"/>
+              <a:t>reasons</a:t>
+            </a:r>
+            <a:r>
+              <a:rPr lang="en-US" dirty="0"/>
+              <a:t> about the spec context, </a:t>
+            </a:r>
+            <a:r>
+              <a:rPr lang="en-US" b="1" i="1" dirty="0"/>
+              <a:t>decides</a:t>
+            </a:r>
+            <a:r>
+              <a:rPr lang="en-US" dirty="0"/>
+              <a:t> which governance rules are relevant, and </a:t>
+            </a:r>
+            <a:r>
+              <a:rPr lang="en-US" b="1" i="1" dirty="0"/>
+              <a:t>generates</a:t>
+            </a:r>
+            <a:r>
+              <a:rPr lang="en-US" dirty="0"/>
+              <a:t> tailored fix guidance. </a:t>
+            </a:r>
+          </a:p>
+          <a:p>
+            <a:r>
+              <a:rPr lang="en-US" dirty="0"/>
+              <a:t>It's the difference between a spell-checker and a co-author. No manual intervention. No human reviewer. Just a structured API Health Report produced through genuine agentic reasoning — in seconds.</a:t>
+            </a:r>
+          </a:p>
+          <a:p>
+            <a:endParaRPr lang="en-US" dirty="0"/>
+          </a:p>
+          <a:p>
+            <a:r>
+              <a:rPr lang="en-US" dirty="0"/>
+              <a:t>Concretely, </a:t>
+            </a:r>
+            <a:r>
+              <a:rPr lang="en-US" dirty="0" err="1"/>
+              <a:t>SpecSentinel</a:t>
+            </a:r>
+            <a:r>
+              <a:rPr lang="en-US" dirty="0"/>
+              <a:t> delivers 6 core capabilities:</a:t>
+            </a:r>
+          </a:p>
+          <a:p>
+            <a:r>
+              <a:rPr lang="en-US" b="1" dirty="0"/>
+              <a:t>Security analysis</a:t>
+            </a:r>
+            <a:r>
+              <a:rPr lang="en-US" dirty="0"/>
+              <a:t> — detects missing auth schemes, absent error codes, and sensitive data exposure.</a:t>
+            </a:r>
+          </a:p>
+          <a:p>
+            <a:r>
+              <a:rPr lang="en-US" b="1" dirty="0"/>
+              <a:t>API design checks</a:t>
+            </a:r>
+            <a:r>
+              <a:rPr lang="en-US" dirty="0"/>
+              <a:t> — validates REST conventions, versioning, naming, and pagination.</a:t>
+            </a:r>
+          </a:p>
+          <a:p>
+            <a:r>
+              <a:rPr lang="en-US" b="1" dirty="0"/>
+              <a:t>Threat classification</a:t>
+            </a:r>
+            <a:r>
+              <a:rPr lang="en-US" dirty="0"/>
+              <a:t> — every finding is rated Critical, High, Medium, or Low, and mapped to a risk category.</a:t>
+            </a:r>
+          </a:p>
+          <a:p>
+            <a:r>
+              <a:rPr lang="en-US" b="1" dirty="0"/>
+              <a:t>Fix recommendation</a:t>
+            </a:r>
+            <a:r>
+              <a:rPr lang="en-US" dirty="0"/>
+              <a:t> — Proper issue description with risk identification and remediation steps </a:t>
+            </a:r>
+          </a:p>
+          <a:p>
+            <a:r>
+              <a:rPr lang="en-US" b="1" dirty="0"/>
+              <a:t>Benchmark alignment</a:t>
+            </a:r>
+            <a:r>
+              <a:rPr lang="en-US" dirty="0"/>
+              <a:t> — maps findings to OWASP API Top 10, </a:t>
+            </a:r>
+            <a:r>
+              <a:rPr lang="en-US" dirty="0" err="1"/>
+              <a:t>OpenAPI</a:t>
+            </a:r>
+            <a:r>
+              <a:rPr lang="en-US" dirty="0"/>
+              <a:t> best practices, and ISO governance standards.</a:t>
+            </a:r>
+          </a:p>
+          <a:p>
+            <a:r>
+              <a:rPr lang="en-US" b="1" dirty="0"/>
+              <a:t>Health scoring</a:t>
+            </a:r>
+            <a:r>
+              <a:rPr lang="en-US" dirty="0"/>
+              <a:t> — a 0-to-100 score across five weighted dimensions, giving teams a single measurable KPI.</a:t>
+            </a:r>
+          </a:p>
+          <a:p>
+            <a:endParaRPr lang="en-US" dirty="0"/>
+          </a:p>
+          <a:p>
+            <a:r>
+              <a:rPr lang="en-US" dirty="0"/>
+              <a:t>The success criterion for our MVP was simple: ingest a real </a:t>
+            </a:r>
+            <a:r>
+              <a:rPr lang="en-US" dirty="0" err="1"/>
+              <a:t>OpenAPI</a:t>
+            </a:r>
+            <a:r>
+              <a:rPr lang="en-US" dirty="0"/>
+              <a:t> spec, classify threats, score it, and generate actionable, fix-ready YAML — and we've demonstrated that end-to-end.</a:t>
+            </a:r>
+          </a:p>
+          <a:p>
+            <a:br>
+              <a:rPr lang="en-US" dirty="0"/>
+            </a:br>
+            <a:endParaRPr lang="en-US" dirty="0"/>
+          </a:p>
+        </p:txBody>
+      </p:sp>
+      <p:sp>
+        <p:nvSpPr>
+          <p:cNvPr id="4" name="Slide Number Placeholder 3">
+            <a:extLst>
+              <a:ext uri="{FF2B5EF4-FFF2-40B4-BE49-F238E27FC236}">
+                <a16:creationId xmlns:a16="http://schemas.microsoft.com/office/drawing/2014/main" id="{F89F10DA-97CC-6AA2-1EBA-E730FAA9C259}"/>
+              </a:ext>
+            </a:extLst>
+          </p:cNvPr>
+          <p:cNvSpPr>
+            <a:spLocks noGrp="1"/>
+          </p:cNvSpPr>
+          <p:nvPr>
+            <p:ph type="sldNum" sz="quarter" idx="10"/>
+          </p:nvPr>
+        </p:nvSpPr>
+        <p:spPr/>
+        <p:txBody>
+          <a:bodyPr/>
+          <a:lstStyle/>
+          <a:p>
+            <a:fld id="{F7021451-1387-4CA6-816F-3879F97B5CBC}" type="slidenum">
+              <a:rPr lang="en-US"/>
+              <a:t>4</a:t>
+            </a:fld>
+            <a:endParaRPr lang="en-US"/>
+          </a:p>
+        </p:txBody>
+      </p:sp>
+    </p:spTree>
+    <p:extLst>
+      <p:ext uri="{BB962C8B-B14F-4D97-AF65-F5344CB8AC3E}">
+        <p14:creationId xmlns:p14="http://schemas.microsoft.com/office/powerpoint/2010/main" val="4131768253"/>
+      </p:ext>
+    </p:extLst>
+  </p:cSld>
+  <p:clrMapOvr>
+    <a:masterClrMapping/>
+  </p:clrMapOvr>
+</p:notes>
+</file>
+
+<file path=ppt/notesSlides/notesSlide5.xml><?xml version="1.0" encoding="utf-8"?>
+<p:notes xmlns:a="http://schemas.openxmlformats.org/drawingml/2006/main" xmlns:r="http://schemas.openxmlformats.org/officeDocument/2006/relationships" xmlns:p="http://schemas.openxmlformats.org/presentationml/2006/main">
+  <p:cSld>
+    <p:spTree>
+      <p:nvGrpSpPr>
+        <p:cNvPr id="1" name="">
+          <a:extLst>
+            <a:ext uri="{FF2B5EF4-FFF2-40B4-BE49-F238E27FC236}">
+              <a16:creationId xmlns:a16="http://schemas.microsoft.com/office/drawing/2014/main" id="{72F8DEC4-A083-FC3C-0DCB-6CDD2188F186}"/>
+            </a:ext>
+          </a:extLst>
+        </p:cNvPr>
+        <p:cNvGrpSpPr/>
+        <p:nvPr/>
+      </p:nvGrpSpPr>
+      <p:grpSpPr>
+        <a:xfrm>
+          <a:off x="0" y="0"/>
+          <a:ext cx="0" cy="0"/>
+          <a:chOff x="0" y="0"/>
+          <a:chExt cx="0" cy="0"/>
+        </a:xfrm>
+      </p:grpSpPr>
+      <p:sp>
+        <p:nvSpPr>
+          <p:cNvPr id="2" name="Slide Image Placeholder 1">
+            <a:extLst>
+              <a:ext uri="{FF2B5EF4-FFF2-40B4-BE49-F238E27FC236}">
+                <a16:creationId xmlns:a16="http://schemas.microsoft.com/office/drawing/2014/main" id="{826CDEBD-E36A-D450-CA4E-60106DF16844}"/>
+              </a:ext>
+            </a:extLst>
+          </p:cNvPr>
+          <p:cNvSpPr>
+            <a:spLocks noGrp="1" noRot="1" noChangeAspect="1"/>
+          </p:cNvSpPr>
+          <p:nvPr>
+            <p:ph type="sldImg"/>
+          </p:nvPr>
+        </p:nvSpPr>
+        <p:spPr/>
+      </p:sp>
+      <p:sp>
+        <p:nvSpPr>
+          <p:cNvPr id="3" name="Notes Placeholder 2">
+            <a:extLst>
+              <a:ext uri="{FF2B5EF4-FFF2-40B4-BE49-F238E27FC236}">
+                <a16:creationId xmlns:a16="http://schemas.microsoft.com/office/drawing/2014/main" id="{E4BDF9FD-BB55-92EC-558D-DE16262B8C96}"/>
+              </a:ext>
+            </a:extLst>
+          </p:cNvPr>
+          <p:cNvSpPr>
+            <a:spLocks noGrp="1"/>
+          </p:cNvSpPr>
+          <p:nvPr>
+            <p:ph type="body" idx="1"/>
+          </p:nvPr>
+        </p:nvSpPr>
+        <p:spPr/>
+        <p:txBody>
+          <a:bodyPr/>
+          <a:lstStyle/>
+          <a:p>
+            <a:r>
+              <a:rPr lang="en-US" b="1" dirty="0"/>
+              <a:t>Slide 5 — Solution Design &amp; Architecture (2:10–3:00)</a:t>
+            </a:r>
+          </a:p>
+          <a:p>
+            <a:r>
+              <a:rPr lang="en-US" dirty="0"/>
+              <a:t>Here's how it works under the hood.</a:t>
+            </a:r>
+          </a:p>
+          <a:p>
+            <a:r>
+              <a:rPr lang="en-US" dirty="0"/>
+              <a:t>At the </a:t>
+            </a:r>
+            <a:r>
+              <a:rPr lang="en-US" b="1" dirty="0"/>
+              <a:t>UI layer</a:t>
+            </a:r>
+            <a:r>
+              <a:rPr lang="en-US" dirty="0"/>
+              <a:t>, users can upload specs via a Flask web frontend or call the REST API directly with curl or Postman.</a:t>
+            </a:r>
+          </a:p>
+          <a:p>
+            <a:endParaRPr lang="en-US" dirty="0"/>
+          </a:p>
+          <a:p>
+            <a:r>
+              <a:rPr lang="en-US" dirty="0"/>
+              <a:t>Requests hit a </a:t>
+            </a:r>
+            <a:r>
+              <a:rPr lang="en-US" b="1" dirty="0" err="1"/>
+              <a:t>FastAPI</a:t>
+            </a:r>
+            <a:r>
+              <a:rPr lang="en-US" b="1" dirty="0"/>
+              <a:t> backend</a:t>
+            </a:r>
+            <a:r>
+              <a:rPr lang="en-US" dirty="0"/>
+              <a:t> that coordinates with the engine layer — a pipeline of four components: a </a:t>
+            </a:r>
+            <a:r>
+              <a:rPr lang="en-US" b="1" i="1" dirty="0"/>
+              <a:t>signal extractor</a:t>
+            </a:r>
+            <a:r>
+              <a:rPr lang="en-US" dirty="0"/>
+              <a:t> that parses 50+ signals from the spec, a </a:t>
+            </a:r>
+            <a:r>
+              <a:rPr lang="en-US" b="1" i="1" dirty="0"/>
+              <a:t>rule matcher</a:t>
+            </a:r>
+            <a:r>
+              <a:rPr lang="en-US" dirty="0"/>
+              <a:t> using vector search against </a:t>
+            </a:r>
+            <a:r>
+              <a:rPr lang="en-US" dirty="0" err="1"/>
+              <a:t>ChromaDB</a:t>
+            </a:r>
+            <a:r>
+              <a:rPr lang="en-US" dirty="0"/>
+              <a:t>, a </a:t>
+            </a:r>
+            <a:r>
+              <a:rPr lang="en-US" b="1" i="1" dirty="0"/>
+              <a:t>health scorer</a:t>
+            </a:r>
+            <a:r>
+              <a:rPr lang="en-US" dirty="0"/>
+              <a:t>, and a </a:t>
+            </a:r>
+            <a:r>
+              <a:rPr lang="en-US" b="1" i="1" dirty="0"/>
+              <a:t>report generator</a:t>
+            </a:r>
+            <a:r>
+              <a:rPr lang="en-US" dirty="0"/>
+              <a:t>.</a:t>
+            </a:r>
+          </a:p>
+          <a:p>
+            <a:endParaRPr lang="en-US" dirty="0"/>
+          </a:p>
+          <a:p>
+            <a:r>
+              <a:rPr lang="en-US" dirty="0"/>
+              <a:t>The </a:t>
+            </a:r>
+            <a:r>
+              <a:rPr lang="en-US" b="1" dirty="0"/>
+              <a:t>vector database</a:t>
+            </a:r>
+            <a:r>
+              <a:rPr lang="en-US" dirty="0"/>
+              <a:t> holds over 29 governance rules across security, design, error handling, documentation, and governance categories — sourced from OWASP, </a:t>
+            </a:r>
+            <a:r>
+              <a:rPr lang="en-US" dirty="0" err="1"/>
+              <a:t>OpenAPI</a:t>
+            </a:r>
+            <a:r>
+              <a:rPr lang="en-US" dirty="0"/>
+              <a:t> standards, and RFC 7807. A built-in web scraper auto-refreshes these rules on a weekly schedule (which can be configured to daily or even hourly).</a:t>
+            </a:r>
+          </a:p>
+          <a:p>
+            <a:endParaRPr lang="en-US" dirty="0"/>
+          </a:p>
+          <a:p>
+            <a:r>
+              <a:rPr lang="en-US" dirty="0"/>
+              <a:t>And at the top sits our </a:t>
+            </a:r>
+            <a:r>
+              <a:rPr lang="en-US" b="1" dirty="0"/>
+              <a:t>AI layer</a:t>
+            </a:r>
+            <a:r>
+              <a:rPr lang="en-US" dirty="0"/>
+              <a:t> — the brain of </a:t>
+            </a:r>
+            <a:r>
+              <a:rPr lang="en-US" dirty="0" err="1"/>
+              <a:t>SpecSentinel</a:t>
+            </a:r>
+            <a:r>
+              <a:rPr lang="en-US" dirty="0"/>
+              <a:t> — powered by IBM watsonx.ai.</a:t>
+            </a:r>
+          </a:p>
+          <a:p>
+            <a:r>
+              <a:rPr lang="en-US" dirty="0"/>
+              <a:t>This layer has two key components. </a:t>
+            </a:r>
+          </a:p>
+          <a:p>
+            <a:endParaRPr lang="en-US" dirty="0"/>
+          </a:p>
+          <a:p>
+            <a:r>
+              <a:rPr lang="en-US" dirty="0"/>
+              <a:t>First, a </a:t>
+            </a:r>
+            <a:r>
+              <a:rPr lang="en-US" b="1" dirty="0"/>
+              <a:t>Universal AI Agent</a:t>
+            </a:r>
+            <a:r>
+              <a:rPr lang="en-US" dirty="0"/>
+              <a:t> with multi-LLM support that auto-generates human-readable explanations and fix-ready code for every finding. It doesn't just flag a problem — it tells you </a:t>
+            </a:r>
+            <a:r>
+              <a:rPr lang="en-US" i="1" dirty="0"/>
+              <a:t>why</a:t>
+            </a:r>
+            <a:r>
+              <a:rPr lang="en-US" dirty="0"/>
+              <a:t> it's a risk and </a:t>
+            </a:r>
+            <a:r>
+              <a:rPr lang="en-US" i="1" dirty="0"/>
+              <a:t>exactly</a:t>
+            </a:r>
+            <a:r>
+              <a:rPr lang="en-US" dirty="0"/>
+              <a:t> how to fix it.</a:t>
+            </a:r>
+          </a:p>
+          <a:p>
+            <a:endParaRPr lang="en-US" dirty="0"/>
+          </a:p>
+          <a:p>
+            <a:r>
+              <a:rPr lang="en-US" dirty="0"/>
+              <a:t>Second, an </a:t>
+            </a:r>
+            <a:r>
+              <a:rPr lang="en-US" b="1" dirty="0"/>
+              <a:t>Orchestrator</a:t>
+            </a:r>
+            <a:r>
+              <a:rPr lang="en-US" dirty="0"/>
+              <a:t> that coordinates five specialized sub-agents running in parallel — each one a domain expert in its own right:</a:t>
+            </a:r>
+          </a:p>
+          <a:p>
+            <a:r>
+              <a:rPr lang="en-US" dirty="0"/>
+              <a:t>The </a:t>
+            </a:r>
+            <a:r>
+              <a:rPr lang="en-US" b="1" dirty="0"/>
+              <a:t>Security agent</a:t>
+            </a:r>
+            <a:r>
+              <a:rPr lang="en-US" dirty="0"/>
+              <a:t> brings OWASP API Top 10 expertise.</a:t>
+            </a:r>
+          </a:p>
+          <a:p>
+            <a:r>
+              <a:rPr lang="en-US" dirty="0"/>
+              <a:t>The </a:t>
+            </a:r>
+            <a:r>
+              <a:rPr lang="en-US" b="1" dirty="0"/>
+              <a:t>Design agent</a:t>
+            </a:r>
+            <a:r>
+              <a:rPr lang="en-US" dirty="0"/>
+              <a:t> enforces REST best practices.</a:t>
+            </a:r>
+          </a:p>
+          <a:p>
+            <a:r>
+              <a:rPr lang="en-US" dirty="0"/>
+              <a:t>The </a:t>
+            </a:r>
+            <a:r>
+              <a:rPr lang="en-US" b="1" dirty="0"/>
+              <a:t>Error Handling agent</a:t>
+            </a:r>
+            <a:r>
+              <a:rPr lang="en-US" dirty="0"/>
+              <a:t> checks RFC 7807 compliance.</a:t>
+            </a:r>
+          </a:p>
+          <a:p>
+            <a:r>
+              <a:rPr lang="en-US" dirty="0"/>
+              <a:t>The </a:t>
+            </a:r>
+            <a:r>
+              <a:rPr lang="en-US" b="1" dirty="0"/>
+              <a:t>Documents agent</a:t>
+            </a:r>
+            <a:r>
+              <a:rPr lang="en-US" dirty="0"/>
+              <a:t> evaluates documentation quality.</a:t>
+            </a:r>
+          </a:p>
+          <a:p>
+            <a:r>
+              <a:rPr lang="en-US" dirty="0"/>
+              <a:t>And the </a:t>
+            </a:r>
+            <a:r>
+              <a:rPr lang="en-US" b="1" dirty="0"/>
+              <a:t>Governance agent</a:t>
+            </a:r>
+            <a:r>
+              <a:rPr lang="en-US" dirty="0"/>
+              <a:t> ensures alignment with enterprise standards.</a:t>
+            </a:r>
+          </a:p>
+          <a:p>
+            <a:endParaRPr lang="en-US" dirty="0"/>
+          </a:p>
+          <a:p>
+            <a:r>
+              <a:rPr lang="en-US" dirty="0"/>
+              <a:t>The Orchestrator fans out the work across all five agents simultaneously, then aggregates their results into one coherent, prioritized health report. This is what makes </a:t>
+            </a:r>
+            <a:r>
+              <a:rPr lang="en-US" dirty="0" err="1"/>
+              <a:t>SpecSentinel</a:t>
+            </a:r>
+            <a:r>
+              <a:rPr lang="en-US" dirty="0"/>
+              <a:t> truly agentic — not a single model answering a single question, but a coordinated multi-agent system delivering comprehensive insights across every dimension of your API spec.</a:t>
+            </a:r>
+          </a:p>
+          <a:p>
+            <a:br>
+              <a:rPr lang="en-US" dirty="0"/>
+            </a:br>
+            <a:endParaRPr lang="en-US" dirty="0"/>
+          </a:p>
+        </p:txBody>
+      </p:sp>
+      <p:sp>
+        <p:nvSpPr>
+          <p:cNvPr id="4" name="Slide Number Placeholder 3">
+            <a:extLst>
+              <a:ext uri="{FF2B5EF4-FFF2-40B4-BE49-F238E27FC236}">
+                <a16:creationId xmlns:a16="http://schemas.microsoft.com/office/drawing/2014/main" id="{BDC145D9-FCD0-FAA9-FEB0-E29027965A20}"/>
+              </a:ext>
+            </a:extLst>
+          </p:cNvPr>
+          <p:cNvSpPr>
+            <a:spLocks noGrp="1"/>
+          </p:cNvSpPr>
+          <p:nvPr>
+            <p:ph type="sldNum" sz="quarter" idx="10"/>
+          </p:nvPr>
+        </p:nvSpPr>
+        <p:spPr/>
+        <p:txBody>
+          <a:bodyPr/>
+          <a:lstStyle/>
+          <a:p>
+            <a:fld id="{F7021451-1387-4CA6-816F-3879F97B5CBC}" type="slidenum">
+              <a:rPr lang="en-US"/>
+              <a:t>5</a:t>
+            </a:fld>
+            <a:endParaRPr lang="en-US"/>
+          </a:p>
+        </p:txBody>
+      </p:sp>
+    </p:spTree>
+    <p:extLst>
+      <p:ext uri="{BB962C8B-B14F-4D97-AF65-F5344CB8AC3E}">
+        <p14:creationId xmlns:p14="http://schemas.microsoft.com/office/powerpoint/2010/main" val="2166814242"/>
+      </p:ext>
+    </p:extLst>
+  </p:cSld>
+  <p:clrMapOvr>
+    <a:masterClrMapping/>
+  </p:clrMapOvr>
+</p:notes>
+</file>
+
+<file path=ppt/notesSlides/notesSlide6.xml><?xml version="1.0" encoding="utf-8"?>
+<p:notes xmlns:a="http://schemas.openxmlformats.org/drawingml/2006/main" xmlns:r="http://schemas.openxmlformats.org/officeDocument/2006/relationships" xmlns:p="http://schemas.openxmlformats.org/presentationml/2006/main">
+  <p:cSld>
+    <p:spTree>
+      <p:nvGrpSpPr>
+        <p:cNvPr id="1" name="">
+          <a:extLst>
+            <a:ext uri="{FF2B5EF4-FFF2-40B4-BE49-F238E27FC236}">
+              <a16:creationId xmlns:a16="http://schemas.microsoft.com/office/drawing/2014/main" id="{33013180-4DC9-8255-48EB-6F5F41D3C11A}"/>
+            </a:ext>
+          </a:extLst>
+        </p:cNvPr>
+        <p:cNvGrpSpPr/>
+        <p:nvPr/>
+      </p:nvGrpSpPr>
+      <p:grpSpPr>
+        <a:xfrm>
+          <a:off x="0" y="0"/>
+          <a:ext cx="0" cy="0"/>
+          <a:chOff x="0" y="0"/>
+          <a:chExt cx="0" cy="0"/>
+        </a:xfrm>
+      </p:grpSpPr>
+      <p:sp>
+        <p:nvSpPr>
+          <p:cNvPr id="2" name="Slide Image Placeholder 1">
+            <a:extLst>
+              <a:ext uri="{FF2B5EF4-FFF2-40B4-BE49-F238E27FC236}">
+                <a16:creationId xmlns:a16="http://schemas.microsoft.com/office/drawing/2014/main" id="{CDDB9B8E-2C40-14AC-6F7E-DDB9F59F25E1}"/>
+              </a:ext>
+            </a:extLst>
+          </p:cNvPr>
+          <p:cNvSpPr>
+            <a:spLocks noGrp="1" noRot="1" noChangeAspect="1"/>
+          </p:cNvSpPr>
+          <p:nvPr>
+            <p:ph type="sldImg"/>
+          </p:nvPr>
+        </p:nvSpPr>
+        <p:spPr/>
+      </p:sp>
+      <p:sp>
+        <p:nvSpPr>
+          <p:cNvPr id="3" name="Notes Placeholder 2">
+            <a:extLst>
+              <a:ext uri="{FF2B5EF4-FFF2-40B4-BE49-F238E27FC236}">
+                <a16:creationId xmlns:a16="http://schemas.microsoft.com/office/drawing/2014/main" id="{C6C91647-30BC-390C-8FD1-E55771EE2865}"/>
+              </a:ext>
+            </a:extLst>
+          </p:cNvPr>
+          <p:cNvSpPr>
+            <a:spLocks noGrp="1"/>
+          </p:cNvSpPr>
+          <p:nvPr>
+            <p:ph type="body" idx="1"/>
+          </p:nvPr>
+        </p:nvSpPr>
+        <p:spPr/>
+        <p:txBody>
+          <a:bodyPr/>
+          <a:lstStyle/>
+          <a:p>
+            <a:r>
+              <a:rPr lang="en-US" b="1" dirty="0"/>
+              <a:t>Slide 6 — Business Value &amp; Impact (3:00–3:40)</a:t>
+            </a:r>
+          </a:p>
+          <a:p>
+            <a:r>
+              <a:rPr lang="en-US" dirty="0"/>
+              <a:t>The business impact is direct and measurable.</a:t>
+            </a:r>
+          </a:p>
+          <a:p>
+            <a:endParaRPr lang="en-US" dirty="0"/>
+          </a:p>
+          <a:p>
+            <a:r>
+              <a:rPr lang="en-US" dirty="0" err="1"/>
+              <a:t>SpecSentinel</a:t>
+            </a:r>
+            <a:r>
+              <a:rPr lang="en-US" dirty="0"/>
+              <a:t> reduces </a:t>
+            </a:r>
+            <a:r>
+              <a:rPr lang="en-US" b="1" dirty="0"/>
+              <a:t>API review time by 95%</a:t>
+            </a:r>
+            <a:r>
+              <a:rPr lang="en-US" dirty="0"/>
+              <a:t> — from 4 to 8 hours down to 5 to 10 minutes. </a:t>
+            </a:r>
+          </a:p>
+          <a:p>
+            <a:endParaRPr lang="en-US" dirty="0"/>
+          </a:p>
+          <a:p>
+            <a:r>
+              <a:rPr lang="en-US" dirty="0"/>
+              <a:t>The </a:t>
+            </a:r>
+            <a:r>
+              <a:rPr lang="en-US" b="1" dirty="0"/>
+              <a:t>cost per review drops by 98%</a:t>
+            </a:r>
+            <a:r>
+              <a:rPr lang="en-US" dirty="0"/>
+              <a:t> — from hundreds of dollars to under ten. And it surfaces </a:t>
+            </a:r>
+            <a:r>
+              <a:rPr lang="en-US" b="1" dirty="0"/>
+              <a:t>2 to 3 times more security issues</a:t>
+            </a:r>
+            <a:r>
+              <a:rPr lang="en-US" dirty="0"/>
+              <a:t> per API than a typical manual review.</a:t>
+            </a:r>
+          </a:p>
+          <a:p>
+            <a:endParaRPr lang="en-US" dirty="0"/>
+          </a:p>
+          <a:p>
+            <a:r>
+              <a:rPr lang="en-US" dirty="0"/>
+              <a:t>Beyond the numbers, it's a shift-left governance model: issues flagged at spec authoring time are </a:t>
+            </a:r>
+            <a:r>
+              <a:rPr lang="en-US" b="1" dirty="0"/>
+              <a:t>10 times cheaper to fix</a:t>
+            </a:r>
+            <a:r>
+              <a:rPr lang="en-US" dirty="0"/>
+              <a:t> than issues caught post-production. Documentation completeness improves from 60% to 90%, and standards compliance rises from 70% to 95% per review cycle.</a:t>
+            </a:r>
+          </a:p>
+          <a:p>
+            <a:r>
+              <a:rPr lang="en-US" dirty="0"/>
+              <a:t>The architecture is also modular — each engine component can be used independently, and the AI layer is </a:t>
+            </a:r>
+            <a:r>
+              <a:rPr lang="en-US" i="1" dirty="0"/>
+              <a:t>optional</a:t>
+            </a:r>
+            <a:r>
+              <a:rPr lang="en-US" dirty="0"/>
+              <a:t>, so the system runs fully offline where needed.</a:t>
+            </a:r>
+          </a:p>
+          <a:p>
+            <a:endParaRPr lang="en-US" dirty="0"/>
+          </a:p>
+        </p:txBody>
+      </p:sp>
+      <p:sp>
+        <p:nvSpPr>
+          <p:cNvPr id="4" name="Slide Number Placeholder 3">
+            <a:extLst>
+              <a:ext uri="{FF2B5EF4-FFF2-40B4-BE49-F238E27FC236}">
+                <a16:creationId xmlns:a16="http://schemas.microsoft.com/office/drawing/2014/main" id="{7D19E681-28FD-8173-437F-EEAAF4E72BC3}"/>
+              </a:ext>
+            </a:extLst>
+          </p:cNvPr>
+          <p:cNvSpPr>
+            <a:spLocks noGrp="1"/>
+          </p:cNvSpPr>
+          <p:nvPr>
+            <p:ph type="sldNum" sz="quarter" idx="10"/>
+          </p:nvPr>
+        </p:nvSpPr>
+        <p:spPr/>
+        <p:txBody>
+          <a:bodyPr/>
+          <a:lstStyle/>
+          <a:p>
+            <a:fld id="{F7021451-1387-4CA6-816F-3879F97B5CBC}" type="slidenum">
+              <a:rPr lang="en-US"/>
+              <a:t>6</a:t>
+            </a:fld>
+            <a:endParaRPr lang="en-US"/>
+          </a:p>
+        </p:txBody>
+      </p:sp>
+    </p:spTree>
+    <p:extLst>
+      <p:ext uri="{BB962C8B-B14F-4D97-AF65-F5344CB8AC3E}">
+        <p14:creationId xmlns:p14="http://schemas.microsoft.com/office/powerpoint/2010/main" val="4166327224"/>
+      </p:ext>
+    </p:extLst>
+  </p:cSld>
+  <p:clrMapOvr>
+    <a:masterClrMapping/>
+  </p:clrMapOvr>
+</p:notes>
+</file>
+
+<file path=ppt/notesSlides/notesSlide7.xml><?xml version="1.0" encoding="utf-8"?>
+<p:notes xmlns:a="http://schemas.openxmlformats.org/drawingml/2006/main" xmlns:r="http://schemas.openxmlformats.org/officeDocument/2006/relationships" xmlns:p="http://schemas.openxmlformats.org/presentationml/2006/main">
+  <p:cSld>
+    <p:spTree>
+      <p:nvGrpSpPr>
+        <p:cNvPr id="1" name="">
+          <a:extLst>
+            <a:ext uri="{FF2B5EF4-FFF2-40B4-BE49-F238E27FC236}">
+              <a16:creationId xmlns:a16="http://schemas.microsoft.com/office/drawing/2014/main" id="{DD6C64F3-88BA-77BE-7C13-E8206E43A4F3}"/>
+            </a:ext>
+          </a:extLst>
+        </p:cNvPr>
+        <p:cNvGrpSpPr/>
+        <p:nvPr/>
+      </p:nvGrpSpPr>
+      <p:grpSpPr>
+        <a:xfrm>
+          <a:off x="0" y="0"/>
+          <a:ext cx="0" cy="0"/>
+          <a:chOff x="0" y="0"/>
+          <a:chExt cx="0" cy="0"/>
+        </a:xfrm>
+      </p:grpSpPr>
+      <p:sp>
+        <p:nvSpPr>
+          <p:cNvPr id="2" name="Slide Image Placeholder 1">
+            <a:extLst>
+              <a:ext uri="{FF2B5EF4-FFF2-40B4-BE49-F238E27FC236}">
+                <a16:creationId xmlns:a16="http://schemas.microsoft.com/office/drawing/2014/main" id="{17A29EAC-0A34-F327-DA2E-7ADA8AD5637E}"/>
+              </a:ext>
+            </a:extLst>
+          </p:cNvPr>
+          <p:cNvSpPr>
+            <a:spLocks noGrp="1" noRot="1" noChangeAspect="1"/>
+          </p:cNvSpPr>
+          <p:nvPr>
+            <p:ph type="sldImg"/>
+          </p:nvPr>
+        </p:nvSpPr>
+        <p:spPr/>
+      </p:sp>
+      <p:sp>
+        <p:nvSpPr>
+          <p:cNvPr id="3" name="Notes Placeholder 2">
+            <a:extLst>
+              <a:ext uri="{FF2B5EF4-FFF2-40B4-BE49-F238E27FC236}">
+                <a16:creationId xmlns:a16="http://schemas.microsoft.com/office/drawing/2014/main" id="{6BCADEF3-1180-37AD-E1A4-B782761739DC}"/>
+              </a:ext>
+            </a:extLst>
+          </p:cNvPr>
+          <p:cNvSpPr>
+            <a:spLocks noGrp="1"/>
+          </p:cNvSpPr>
+          <p:nvPr>
+            <p:ph type="body" idx="1"/>
+          </p:nvPr>
+        </p:nvSpPr>
+        <p:spPr/>
+        <p:txBody>
+          <a:bodyPr/>
+          <a:lstStyle/>
+          <a:p>
+            <a:r>
+              <a:rPr lang="en-US" b="1" dirty="0"/>
+              <a:t>Slide 7 — Future Roadmap (3:40–4:10)</a:t>
+            </a:r>
+          </a:p>
+          <a:p>
+            <a:r>
+              <a:rPr lang="en-US" dirty="0"/>
+              <a:t>Looking ahead, our roadmap has three phases.</a:t>
+            </a:r>
+          </a:p>
+          <a:p>
+            <a:r>
+              <a:rPr lang="en-US" b="1" dirty="0"/>
+              <a:t>Near-term (6–12 months):</a:t>
+            </a:r>
+            <a:r>
+              <a:rPr lang="en-US" dirty="0"/>
+              <a:t> </a:t>
+            </a:r>
+          </a:p>
+          <a:p>
+            <a:r>
+              <a:rPr lang="en-US" dirty="0"/>
+              <a:t>CI/CD integration with GitHub Actions and GitLab, quality gates that block merges below a health score threshold, and real-time IDE feedback via a VS Code plugin. Also an agentic API monitoring approach to scan highlight live APIs.</a:t>
+            </a:r>
+          </a:p>
+          <a:p>
+            <a:endParaRPr lang="en-US" dirty="0"/>
+          </a:p>
+          <a:p>
+            <a:r>
+              <a:rPr lang="en-US" b="1" dirty="0"/>
+              <a:t>Mid-term (12–24 months):</a:t>
+            </a:r>
+            <a:r>
+              <a:rPr lang="en-US" dirty="0"/>
+              <a:t> A policy-as-code governance dashboard, API gateway integration with </a:t>
+            </a:r>
+            <a:r>
+              <a:rPr lang="en-US" dirty="0" err="1"/>
+              <a:t>webMethods</a:t>
+            </a:r>
+            <a:r>
+              <a:rPr lang="en-US" dirty="0"/>
+              <a:t>, Kong, and Apigee, and an agentic rule engine that self-updates from OWASP and CVE feeds.</a:t>
+            </a:r>
+          </a:p>
+          <a:p>
+            <a:endParaRPr lang="en-US" dirty="0"/>
+          </a:p>
+          <a:p>
+            <a:r>
+              <a:rPr lang="en-US" b="1" dirty="0"/>
+              <a:t>Long-term (24+ months):</a:t>
+            </a:r>
+            <a:r>
+              <a:rPr lang="en-US" dirty="0"/>
+              <a:t> Distributed multi-agent infrastructure for large API estates, GPU-accelerated embedding generation, and a fine-tuned LLM on enterprise API corpora for deeper, domain-specific insights.</a:t>
+            </a:r>
+          </a:p>
+          <a:p>
+            <a:endParaRPr lang="en-US" dirty="0"/>
+          </a:p>
+        </p:txBody>
+      </p:sp>
+      <p:sp>
+        <p:nvSpPr>
+          <p:cNvPr id="4" name="Slide Number Placeholder 3">
+            <a:extLst>
+              <a:ext uri="{FF2B5EF4-FFF2-40B4-BE49-F238E27FC236}">
+                <a16:creationId xmlns:a16="http://schemas.microsoft.com/office/drawing/2014/main" id="{33705FFA-E2E7-37C7-2237-832F6A66E5AA}"/>
+              </a:ext>
+            </a:extLst>
+          </p:cNvPr>
+          <p:cNvSpPr>
+            <a:spLocks noGrp="1"/>
+          </p:cNvSpPr>
+          <p:nvPr>
+            <p:ph type="sldNum" sz="quarter" idx="10"/>
+          </p:nvPr>
+        </p:nvSpPr>
+        <p:spPr/>
+        <p:txBody>
+          <a:bodyPr/>
+          <a:lstStyle/>
+          <a:p>
+            <a:fld id="{F7021451-1387-4CA6-816F-3879F97B5CBC}" type="slidenum">
+              <a:rPr lang="en-US"/>
+              <a:t>7</a:t>
+            </a:fld>
+            <a:endParaRPr lang="en-US"/>
+          </a:p>
+        </p:txBody>
+      </p:sp>
+    </p:spTree>
+    <p:extLst>
+      <p:ext uri="{BB962C8B-B14F-4D97-AF65-F5344CB8AC3E}">
+        <p14:creationId xmlns:p14="http://schemas.microsoft.com/office/powerpoint/2010/main" val="3662002899"/>
+      </p:ext>
+    </p:extLst>
+  </p:cSld>
+  <p:clrMapOvr>
+    <a:masterClrMapping/>
+  </p:clrMapOvr>
+</p:notes>
+</file>
+
+<file path=ppt/notesSlides/notesSlide8.xml><?xml version="1.0" encoding="utf-8"?>
+<p:notes xmlns:a="http://schemas.openxmlformats.org/drawingml/2006/main" xmlns:r="http://schemas.openxmlformats.org/officeDocument/2006/relationships" xmlns:p="http://schemas.openxmlformats.org/presentationml/2006/main">
+  <p:cSld>
+    <p:spTree>
+      <p:nvGrpSpPr>
+        <p:cNvPr id="1" name="">
+          <a:extLst>
+            <a:ext uri="{FF2B5EF4-FFF2-40B4-BE49-F238E27FC236}">
+              <a16:creationId xmlns:a16="http://schemas.microsoft.com/office/drawing/2014/main" id="{9AD8C321-7C37-72E8-BF0A-86E7E246AD17}"/>
+            </a:ext>
+          </a:extLst>
+        </p:cNvPr>
+        <p:cNvGrpSpPr/>
+        <p:nvPr/>
+      </p:nvGrpSpPr>
+      <p:grpSpPr>
+        <a:xfrm>
+          <a:off x="0" y="0"/>
+          <a:ext cx="0" cy="0"/>
+          <a:chOff x="0" y="0"/>
+          <a:chExt cx="0" cy="0"/>
+        </a:xfrm>
+      </p:grpSpPr>
+      <p:sp>
+        <p:nvSpPr>
+          <p:cNvPr id="2" name="Slide Image Placeholder 1">
+            <a:extLst>
+              <a:ext uri="{FF2B5EF4-FFF2-40B4-BE49-F238E27FC236}">
+                <a16:creationId xmlns:a16="http://schemas.microsoft.com/office/drawing/2014/main" id="{AD3AC92F-FE80-BFC6-3735-42DA4EC9F3B1}"/>
+              </a:ext>
+            </a:extLst>
+          </p:cNvPr>
+          <p:cNvSpPr>
+            <a:spLocks noGrp="1" noRot="1" noChangeAspect="1"/>
+          </p:cNvSpPr>
+          <p:nvPr>
+            <p:ph type="sldImg"/>
+          </p:nvPr>
+        </p:nvSpPr>
+        <p:spPr/>
+      </p:sp>
+      <p:sp>
+        <p:nvSpPr>
+          <p:cNvPr id="3" name="Notes Placeholder 2">
+            <a:extLst>
+              <a:ext uri="{FF2B5EF4-FFF2-40B4-BE49-F238E27FC236}">
+                <a16:creationId xmlns:a16="http://schemas.microsoft.com/office/drawing/2014/main" id="{065301CF-C452-035C-4109-83D70851A2C2}"/>
+              </a:ext>
+            </a:extLst>
+          </p:cNvPr>
+          <p:cNvSpPr>
+            <a:spLocks noGrp="1"/>
+          </p:cNvSpPr>
+          <p:nvPr>
+            <p:ph type="body" idx="1"/>
+          </p:nvPr>
+        </p:nvSpPr>
+        <p:spPr/>
+        <p:txBody>
+          <a:bodyPr/>
+          <a:lstStyle/>
+          <a:p>
+            <a:r>
+              <a:rPr lang="en-US" dirty="0"/>
+              <a:t>Now is the curtain raiser for the product that we have been talking about so much. Lets jump in to the live demo…</a:t>
+            </a:r>
+          </a:p>
+        </p:txBody>
+      </p:sp>
+      <p:sp>
+        <p:nvSpPr>
+          <p:cNvPr id="4" name="Slide Number Placeholder 3">
+            <a:extLst>
+              <a:ext uri="{FF2B5EF4-FFF2-40B4-BE49-F238E27FC236}">
+                <a16:creationId xmlns:a16="http://schemas.microsoft.com/office/drawing/2014/main" id="{9B79D361-B571-4120-1547-3B4765797DD3}"/>
+              </a:ext>
+            </a:extLst>
+          </p:cNvPr>
+          <p:cNvSpPr>
+            <a:spLocks noGrp="1"/>
+          </p:cNvSpPr>
+          <p:nvPr>
+            <p:ph type="sldNum" sz="quarter" idx="10"/>
+          </p:nvPr>
+        </p:nvSpPr>
+        <p:spPr/>
+        <p:txBody>
+          <a:bodyPr/>
+          <a:lstStyle/>
+          <a:p>
+            <a:fld id="{F7021451-1387-4CA6-816F-3879F97B5CBC}" type="slidenum">
+              <a:rPr lang="en-US"/>
+              <a:t>8</a:t>
+            </a:fld>
+            <a:endParaRPr lang="en-US"/>
+          </a:p>
+        </p:txBody>
+      </p:sp>
+    </p:spTree>
+    <p:extLst>
+      <p:ext uri="{BB962C8B-B14F-4D97-AF65-F5344CB8AC3E}">
+        <p14:creationId xmlns:p14="http://schemas.microsoft.com/office/powerpoint/2010/main" val="3433915512"/>
+      </p:ext>
+    </p:extLst>
+  </p:cSld>
+  <p:clrMapOvr>
+    <a:masterClrMapping/>
+  </p:clrMapOvr>
+</p:notes>
+</file>
+
+<file path=ppt/notesSlides/notesSlide9.xml><?xml version="1.0" encoding="utf-8"?>
+<p:notes xmlns:a="http://schemas.openxmlformats.org/drawingml/2006/main" xmlns:r="http://schemas.openxmlformats.org/officeDocument/2006/relationships" xmlns:p="http://schemas.openxmlformats.org/presentationml/2006/main">
+  <p:cSld>
+    <p:spTree>
+      <p:nvGrpSpPr>
+        <p:cNvPr id="1" name="">
+          <a:extLst>
+            <a:ext uri="{FF2B5EF4-FFF2-40B4-BE49-F238E27FC236}">
+              <a16:creationId xmlns:a16="http://schemas.microsoft.com/office/drawing/2014/main" id="{D1EB4239-1AFA-0E0D-E108-DCF77A14EDF4}"/>
+            </a:ext>
+          </a:extLst>
+        </p:cNvPr>
+        <p:cNvGrpSpPr/>
+        <p:nvPr/>
+      </p:nvGrpSpPr>
+      <p:grpSpPr>
+        <a:xfrm>
+          <a:off x="0" y="0"/>
+          <a:ext cx="0" cy="0"/>
+          <a:chOff x="0" y="0"/>
+          <a:chExt cx="0" cy="0"/>
+        </a:xfrm>
+      </p:grpSpPr>
+      <p:sp>
+        <p:nvSpPr>
+          <p:cNvPr id="2" name="Slide Image Placeholder 1">
+            <a:extLst>
+              <a:ext uri="{FF2B5EF4-FFF2-40B4-BE49-F238E27FC236}">
+                <a16:creationId xmlns:a16="http://schemas.microsoft.com/office/drawing/2014/main" id="{98FEF5FE-2CC9-9F65-18D2-DA4EB6AD4997}"/>
+              </a:ext>
+            </a:extLst>
+          </p:cNvPr>
+          <p:cNvSpPr>
+            <a:spLocks noGrp="1" noRot="1" noChangeAspect="1"/>
+          </p:cNvSpPr>
+          <p:nvPr>
+            <p:ph type="sldImg"/>
+          </p:nvPr>
+        </p:nvSpPr>
+        <p:spPr/>
+      </p:sp>
+      <p:sp>
+        <p:nvSpPr>
+          <p:cNvPr id="3" name="Notes Placeholder 2">
+            <a:extLst>
+              <a:ext uri="{FF2B5EF4-FFF2-40B4-BE49-F238E27FC236}">
+                <a16:creationId xmlns:a16="http://schemas.microsoft.com/office/drawing/2014/main" id="{F7302A9B-ABAD-22F3-D59D-8F826485D9BD}"/>
+              </a:ext>
+            </a:extLst>
+          </p:cNvPr>
+          <p:cNvSpPr>
+            <a:spLocks noGrp="1"/>
+          </p:cNvSpPr>
+          <p:nvPr>
+            <p:ph type="body" idx="1"/>
+          </p:nvPr>
+        </p:nvSpPr>
+        <p:spPr/>
+        <p:txBody>
+          <a:bodyPr/>
+          <a:lstStyle/>
+          <a:p>
+            <a:r>
+              <a:rPr lang="en-US" b="1" dirty="0"/>
+              <a:t>Slides 9 — Closing (4:30–5:00)</a:t>
+            </a:r>
+          </a:p>
+          <a:p>
+            <a:r>
+              <a:rPr lang="en-US" dirty="0"/>
+              <a:t>To wrap up — </a:t>
+            </a:r>
+            <a:r>
+              <a:rPr lang="en-US" dirty="0" err="1"/>
+              <a:t>SpecSentinel</a:t>
+            </a:r>
+            <a:r>
+              <a:rPr lang="en-US" dirty="0"/>
+              <a:t> is not just a linter. It's an </a:t>
+            </a:r>
+            <a:r>
+              <a:rPr lang="en-US" b="1" dirty="0"/>
+              <a:t>agentic governance system</a:t>
+            </a:r>
+            <a:r>
+              <a:rPr lang="en-US" dirty="0"/>
+              <a:t> — one that perceives your API spec, reasons about risk, takes action through five parallel specialist agents, and continuously improves through a self-updating rule engine. Powered by IBM watsonx.ai, it replaces slow, inconsistent manual reviews with an autonomous loop that scales across hundreds of APIs, enforces OWASP and ISO standards at design time, and delivers measurable ROI from day one.</a:t>
+            </a:r>
+          </a:p>
+          <a:p>
+            <a:endParaRPr lang="en-US" dirty="0"/>
+          </a:p>
+          <a:p>
+            <a:r>
+              <a:rPr lang="en-US" dirty="0"/>
+              <a:t>And I'll leave you with this thought. The API economy isn't slowing down — enterprises are shipping more APIs, faster, across more teams than ever before. Look at what's on screen: what used to take 4 to 8 hours of manual effort, </a:t>
+            </a:r>
+            <a:r>
+              <a:rPr lang="en-US" dirty="0" err="1"/>
+              <a:t>SpecSentinel</a:t>
+            </a:r>
+            <a:r>
+              <a:rPr lang="en-US" dirty="0"/>
+              <a:t> does in 4-8 seconds. The answer isn't more reviewers. It's smarter agents.</a:t>
+            </a:r>
+          </a:p>
+          <a:p>
+            <a:r>
+              <a:rPr lang="en-US" dirty="0"/>
+              <a:t>The future of API governance is agentic — and that's exactly what </a:t>
+            </a:r>
+            <a:r>
+              <a:rPr lang="en-US" dirty="0" err="1"/>
+              <a:t>SpecSentinel</a:t>
+            </a:r>
+            <a:r>
+              <a:rPr lang="en-US" dirty="0"/>
+              <a:t> is building toward.</a:t>
+            </a:r>
+          </a:p>
+          <a:p>
+            <a:endParaRPr lang="en-US" dirty="0"/>
+          </a:p>
+          <a:p>
+            <a:r>
+              <a:rPr lang="en-US" dirty="0"/>
+              <a:t>With this, we, Team Sentinel, thank you guys for the patience and attention. We're happy to take any questions.</a:t>
+            </a:r>
+          </a:p>
+          <a:p>
+            <a:endParaRPr lang="en-US" dirty="0"/>
+          </a:p>
+        </p:txBody>
+      </p:sp>
+      <p:sp>
+        <p:nvSpPr>
+          <p:cNvPr id="4" name="Slide Number Placeholder 3">
+            <a:extLst>
+              <a:ext uri="{FF2B5EF4-FFF2-40B4-BE49-F238E27FC236}">
+                <a16:creationId xmlns:a16="http://schemas.microsoft.com/office/drawing/2014/main" id="{B8E413F0-1822-8F9B-AAA5-7137B14DA787}"/>
+              </a:ext>
+            </a:extLst>
+          </p:cNvPr>
+          <p:cNvSpPr>
+            <a:spLocks noGrp="1"/>
+          </p:cNvSpPr>
+          <p:nvPr>
+            <p:ph type="sldNum" sz="quarter" idx="10"/>
+          </p:nvPr>
+        </p:nvSpPr>
+        <p:spPr/>
+        <p:txBody>
+          <a:bodyPr/>
+          <a:lstStyle/>
+          <a:p>
+            <a:fld id="{F7021451-1387-4CA6-816F-3879F97B5CBC}" type="slidenum">
+              <a:rPr lang="en-US"/>
               <a:t>9</a:t>
             </a:fld>
             <a:endParaRPr lang="en-US"/>
@@ -4804,7 +5883,7 @@
     </p:spTree>
     <p:extLst>
       <p:ext uri="{BB962C8B-B14F-4D97-AF65-F5344CB8AC3E}">
-        <p14:creationId xmlns:p14="http://schemas.microsoft.com/office/powerpoint/2010/main" val="1320550848"/>
+        <p14:creationId xmlns:p14="http://schemas.microsoft.com/office/powerpoint/2010/main" val="552644946"/>
       </p:ext>
     </p:extLst>
   </p:cSld>
@@ -5263,33 +6342,6 @@
       </p:sp>
       <p:sp>
         <p:nvSpPr>
-          <p:cNvPr id="8" name="Shape 6"/>
-          <p:cNvSpPr/>
-          <p:nvPr/>
-        </p:nvSpPr>
-        <p:spPr>
-          <a:xfrm>
-            <a:off x="952805" y="3333902"/>
-            <a:ext cx="38405" cy="381305"/>
-          </a:xfrm>
-          <a:prstGeom prst="rect">
-            <a:avLst/>
-          </a:prstGeom>
-          <a:solidFill>
-            <a:srgbClr val="C6C6C6"/>
-          </a:solidFill>
-          <a:ln/>
-        </p:spPr>
-        <p:txBody>
-          <a:bodyPr/>
-          <a:lstStyle/>
-          <a:p>
-            <a:endParaRPr lang="en-IN"/>
-          </a:p>
-        </p:txBody>
-      </p:sp>
-      <p:sp>
-        <p:nvSpPr>
           <p:cNvPr id="11" name="Text 9"/>
           <p:cNvSpPr txBox="1"/>
           <p:nvPr/>
@@ -5507,7 +6559,7 @@
                 <a:ea typeface="IBM Plex Sans" pitchFamily="34" charset="-122"/>
                 <a:cs typeface="IBM Plex Sans" pitchFamily="34" charset="-120"/>
               </a:rPr>
-              <a:t>March 2026</a:t>
+              <a:t>April 2026</a:t>
             </a:r>
             <a:endParaRPr lang="en-US" sz="1300" dirty="0"/>
           </a:p>
@@ -5571,6 +6623,611 @@
         </p:spPr>
       </p:pic>
     </p:spTree>
+  </p:cSld>
+  <p:clrMapOvr>
+    <a:masterClrMapping/>
+  </p:clrMapOvr>
+</p:sld>
+</file>
+
+<file path=ppt/slides/slide10.xml><?xml version="1.0" encoding="utf-8"?>
+<p:sld xmlns:a="http://schemas.openxmlformats.org/drawingml/2006/main" xmlns:r="http://schemas.openxmlformats.org/officeDocument/2006/relationships" xmlns:p="http://schemas.openxmlformats.org/presentationml/2006/main">
+  <p:cSld>
+    <p:spTree>
+      <p:nvGrpSpPr>
+        <p:cNvPr id="1" name="">
+          <a:extLst>
+            <a:ext uri="{FF2B5EF4-FFF2-40B4-BE49-F238E27FC236}">
+              <a16:creationId xmlns:a16="http://schemas.microsoft.com/office/drawing/2014/main" id="{4D4CC65F-C195-E666-A9F2-9C358CE300ED}"/>
+            </a:ext>
+          </a:extLst>
+        </p:cNvPr>
+        <p:cNvGrpSpPr/>
+        <p:nvPr/>
+      </p:nvGrpSpPr>
+      <p:grpSpPr>
+        <a:xfrm>
+          <a:off x="0" y="0"/>
+          <a:ext cx="0" cy="0"/>
+          <a:chOff x="0" y="0"/>
+          <a:chExt cx="0" cy="0"/>
+        </a:xfrm>
+      </p:grpSpPr>
+      <p:sp>
+        <p:nvSpPr>
+          <p:cNvPr id="2" name="Shape 0">
+            <a:extLst>
+              <a:ext uri="{FF2B5EF4-FFF2-40B4-BE49-F238E27FC236}">
+                <a16:creationId xmlns:a16="http://schemas.microsoft.com/office/drawing/2014/main" id="{C3E14045-FBC3-60B4-1EF4-ACD825A08550}"/>
+              </a:ext>
+            </a:extLst>
+          </p:cNvPr>
+          <p:cNvSpPr/>
+          <p:nvPr/>
+        </p:nvSpPr>
+        <p:spPr>
+          <a:xfrm>
+            <a:off x="0" y="0"/>
+            <a:ext cx="12191695" cy="6858000"/>
+          </a:xfrm>
+          <a:prstGeom prst="rect">
+            <a:avLst/>
+          </a:prstGeom>
+          <a:solidFill>
+            <a:srgbClr val="333333"/>
+          </a:solidFill>
+          <a:ln/>
+        </p:spPr>
+        <p:txBody>
+          <a:bodyPr/>
+          <a:lstStyle/>
+          <a:p>
+            <a:endParaRPr lang="en-IN"/>
+          </a:p>
+        </p:txBody>
+      </p:sp>
+      <p:sp>
+        <p:nvSpPr>
+          <p:cNvPr id="3" name="Shape 1">
+            <a:extLst>
+              <a:ext uri="{FF2B5EF4-FFF2-40B4-BE49-F238E27FC236}">
+                <a16:creationId xmlns:a16="http://schemas.microsoft.com/office/drawing/2014/main" id="{FE81C1F9-53A2-7CB8-2160-575D5ABC1029}"/>
+              </a:ext>
+            </a:extLst>
+          </p:cNvPr>
+          <p:cNvSpPr/>
+          <p:nvPr/>
+        </p:nvSpPr>
+        <p:spPr>
+          <a:xfrm>
+            <a:off x="0" y="0"/>
+            <a:ext cx="12191695" cy="6858000"/>
+          </a:xfrm>
+          <a:prstGeom prst="rect">
+            <a:avLst/>
+          </a:prstGeom>
+          <a:solidFill>
+            <a:srgbClr val="FFFFFF"/>
+          </a:solidFill>
+          <a:ln/>
+        </p:spPr>
+        <p:txBody>
+          <a:bodyPr/>
+          <a:lstStyle/>
+          <a:p>
+            <a:endParaRPr lang="en-IN" dirty="0"/>
+          </a:p>
+        </p:txBody>
+      </p:sp>
+      <p:sp>
+        <p:nvSpPr>
+          <p:cNvPr id="4" name="Shape 2">
+            <a:extLst>
+              <a:ext uri="{FF2B5EF4-FFF2-40B4-BE49-F238E27FC236}">
+                <a16:creationId xmlns:a16="http://schemas.microsoft.com/office/drawing/2014/main" id="{7269F592-8FB8-886F-5254-C229A4B72F19}"/>
+              </a:ext>
+            </a:extLst>
+          </p:cNvPr>
+          <p:cNvSpPr/>
+          <p:nvPr/>
+        </p:nvSpPr>
+        <p:spPr>
+          <a:xfrm>
+            <a:off x="0" y="0"/>
+            <a:ext cx="12191695" cy="114300"/>
+          </a:xfrm>
+          <a:prstGeom prst="rect">
+            <a:avLst/>
+          </a:prstGeom>
+          <a:solidFill>
+            <a:srgbClr val="0F62FE"/>
+          </a:solidFill>
+          <a:ln/>
+        </p:spPr>
+        <p:txBody>
+          <a:bodyPr/>
+          <a:lstStyle/>
+          <a:p>
+            <a:endParaRPr lang="en-IN"/>
+          </a:p>
+        </p:txBody>
+      </p:sp>
+      <p:sp>
+        <p:nvSpPr>
+          <p:cNvPr id="5" name="Shape 3">
+            <a:extLst>
+              <a:ext uri="{FF2B5EF4-FFF2-40B4-BE49-F238E27FC236}">
+                <a16:creationId xmlns:a16="http://schemas.microsoft.com/office/drawing/2014/main" id="{B8FBD0B1-2ADB-5480-94A6-21F03071DFB2}"/>
+              </a:ext>
+            </a:extLst>
+          </p:cNvPr>
+          <p:cNvSpPr/>
+          <p:nvPr/>
+        </p:nvSpPr>
+        <p:spPr>
+          <a:xfrm>
+            <a:off x="0" y="1172261"/>
+            <a:ext cx="12191695" cy="9144"/>
+          </a:xfrm>
+          <a:prstGeom prst="rect">
+            <a:avLst/>
+          </a:prstGeom>
+          <a:solidFill>
+            <a:srgbClr val="E0E0E0"/>
+          </a:solidFill>
+          <a:ln/>
+        </p:spPr>
+        <p:txBody>
+          <a:bodyPr/>
+          <a:lstStyle/>
+          <a:p>
+            <a:endParaRPr lang="en-IN"/>
+          </a:p>
+        </p:txBody>
+      </p:sp>
+      <p:sp>
+        <p:nvSpPr>
+          <p:cNvPr id="6" name="Text 4">
+            <a:extLst>
+              <a:ext uri="{FF2B5EF4-FFF2-40B4-BE49-F238E27FC236}">
+                <a16:creationId xmlns:a16="http://schemas.microsoft.com/office/drawing/2014/main" id="{7BF046DB-9C13-D287-3AAC-0BA4A9CAB077}"/>
+              </a:ext>
+            </a:extLst>
+          </p:cNvPr>
+          <p:cNvSpPr txBox="1"/>
+          <p:nvPr/>
+        </p:nvSpPr>
+        <p:spPr>
+          <a:xfrm>
+            <a:off x="571500" y="466344"/>
+            <a:ext cx="9888116" cy="523951"/>
+          </a:xfrm>
+          <a:prstGeom prst="rect">
+            <a:avLst/>
+          </a:prstGeom>
+          <a:noFill/>
+          <a:ln/>
+        </p:spPr>
+        <p:txBody>
+          <a:bodyPr wrap="square" lIns="0" tIns="0" rIns="0" bIns="0" rtlCol="0" anchor="ctr"/>
+          <a:lstStyle/>
+          <a:p>
+            <a:r>
+              <a:rPr lang="en-US" sz="3200" dirty="0">
+                <a:solidFill>
+                  <a:srgbClr val="161616"/>
+                </a:solidFill>
+                <a:latin typeface="IBM Plex Sans" pitchFamily="34" charset="0"/>
+                <a:ea typeface="IBM Plex Sans" pitchFamily="34" charset="-122"/>
+                <a:cs typeface="IBM Plex Sans" pitchFamily="34" charset="-120"/>
+              </a:rPr>
+              <a:t>Team Details</a:t>
+            </a:r>
+            <a:endParaRPr lang="en-US" sz="3200" dirty="0"/>
+          </a:p>
+        </p:txBody>
+      </p:sp>
+      <p:sp>
+        <p:nvSpPr>
+          <p:cNvPr id="8" name="Shape 6">
+            <a:extLst>
+              <a:ext uri="{FF2B5EF4-FFF2-40B4-BE49-F238E27FC236}">
+                <a16:creationId xmlns:a16="http://schemas.microsoft.com/office/drawing/2014/main" id="{BB8DAD51-CF03-B8FE-17CA-D79CF4A67BB9}"/>
+              </a:ext>
+            </a:extLst>
+          </p:cNvPr>
+          <p:cNvSpPr/>
+          <p:nvPr/>
+        </p:nvSpPr>
+        <p:spPr>
+          <a:xfrm>
+            <a:off x="0" y="6372454"/>
+            <a:ext cx="12191695" cy="485546"/>
+          </a:xfrm>
+          <a:prstGeom prst="rect">
+            <a:avLst/>
+          </a:prstGeom>
+          <a:solidFill>
+            <a:srgbClr val="FFFFFF"/>
+          </a:solidFill>
+          <a:ln/>
+        </p:spPr>
+        <p:txBody>
+          <a:bodyPr/>
+          <a:lstStyle/>
+          <a:p>
+            <a:endParaRPr lang="en-IN"/>
+          </a:p>
+        </p:txBody>
+      </p:sp>
+      <p:sp>
+        <p:nvSpPr>
+          <p:cNvPr id="9" name="Shape 7">
+            <a:extLst>
+              <a:ext uri="{FF2B5EF4-FFF2-40B4-BE49-F238E27FC236}">
+                <a16:creationId xmlns:a16="http://schemas.microsoft.com/office/drawing/2014/main" id="{C2EF816C-0932-B86A-A982-69E445639CF2}"/>
+              </a:ext>
+            </a:extLst>
+          </p:cNvPr>
+          <p:cNvSpPr/>
+          <p:nvPr/>
+        </p:nvSpPr>
+        <p:spPr>
+          <a:xfrm>
+            <a:off x="0" y="6372454"/>
+            <a:ext cx="12191695" cy="9144"/>
+          </a:xfrm>
+          <a:prstGeom prst="rect">
+            <a:avLst/>
+          </a:prstGeom>
+          <a:solidFill>
+            <a:srgbClr val="E0E0E0"/>
+          </a:solidFill>
+          <a:ln/>
+        </p:spPr>
+        <p:txBody>
+          <a:bodyPr/>
+          <a:lstStyle/>
+          <a:p>
+            <a:endParaRPr lang="en-IN"/>
+          </a:p>
+        </p:txBody>
+      </p:sp>
+      <p:sp>
+        <p:nvSpPr>
+          <p:cNvPr id="10" name="Text 8">
+            <a:extLst>
+              <a:ext uri="{FF2B5EF4-FFF2-40B4-BE49-F238E27FC236}">
+                <a16:creationId xmlns:a16="http://schemas.microsoft.com/office/drawing/2014/main" id="{468A90CE-4EEA-C404-78C7-D9D6AC148F0E}"/>
+              </a:ext>
+            </a:extLst>
+          </p:cNvPr>
+          <p:cNvSpPr txBox="1"/>
+          <p:nvPr/>
+        </p:nvSpPr>
+        <p:spPr>
+          <a:xfrm>
+            <a:off x="571500" y="6543446"/>
+            <a:ext cx="1828800" cy="143561"/>
+          </a:xfrm>
+          <a:prstGeom prst="rect">
+            <a:avLst/>
+          </a:prstGeom>
+          <a:noFill/>
+          <a:ln/>
+        </p:spPr>
+        <p:txBody>
+          <a:bodyPr wrap="square" lIns="0" tIns="0" rIns="0" bIns="0" rtlCol="0" anchor="ctr"/>
+          <a:lstStyle/>
+          <a:p>
+            <a:pPr marL="0" indent="0" algn="l">
+              <a:buNone/>
+            </a:pPr>
+            <a:r>
+              <a:rPr lang="en-US" sz="900" dirty="0">
+                <a:solidFill>
+                  <a:srgbClr val="6F6F6F"/>
+                </a:solidFill>
+                <a:latin typeface="IBM Plex Sans" pitchFamily="34" charset="0"/>
+                <a:ea typeface="IBM Plex Sans" pitchFamily="34" charset="-122"/>
+                <a:cs typeface="IBM Plex Sans" pitchFamily="34" charset="-120"/>
+              </a:rPr>
+              <a:t>COE Automation Hackathon 2026</a:t>
+            </a:r>
+            <a:endParaRPr lang="en-US" sz="900" dirty="0"/>
+          </a:p>
+        </p:txBody>
+      </p:sp>
+      <p:sp>
+        <p:nvSpPr>
+          <p:cNvPr id="11" name="Text 9">
+            <a:extLst>
+              <a:ext uri="{FF2B5EF4-FFF2-40B4-BE49-F238E27FC236}">
+                <a16:creationId xmlns:a16="http://schemas.microsoft.com/office/drawing/2014/main" id="{F994FABE-8640-82B0-CE46-E532034FA345}"/>
+              </a:ext>
+            </a:extLst>
+          </p:cNvPr>
+          <p:cNvSpPr txBox="1"/>
+          <p:nvPr/>
+        </p:nvSpPr>
+        <p:spPr>
+          <a:xfrm>
+            <a:off x="10006279" y="6543446"/>
+            <a:ext cx="1705356" cy="143561"/>
+          </a:xfrm>
+          <a:prstGeom prst="rect">
+            <a:avLst/>
+          </a:prstGeom>
+          <a:noFill/>
+          <a:ln/>
+        </p:spPr>
+        <p:txBody>
+          <a:bodyPr wrap="square" lIns="0" tIns="0" rIns="0" bIns="0" rtlCol="0" anchor="ctr"/>
+          <a:lstStyle/>
+          <a:p>
+            <a:pPr marL="0" indent="0" algn="l">
+              <a:buNone/>
+            </a:pPr>
+            <a:r>
+              <a:rPr lang="en-US" sz="900" dirty="0">
+                <a:solidFill>
+                  <a:srgbClr val="6F6F6F"/>
+                </a:solidFill>
+                <a:latin typeface="IBM Plex Sans" pitchFamily="34" charset="0"/>
+                <a:ea typeface="IBM Plex Sans" pitchFamily="34" charset="-122"/>
+                <a:cs typeface="IBM Plex Sans" pitchFamily="34" charset="-120"/>
+              </a:rPr>
+              <a:t>Confidential - Internal Use Only</a:t>
+            </a:r>
+            <a:endParaRPr lang="en-US" sz="900" dirty="0"/>
+          </a:p>
+        </p:txBody>
+      </p:sp>
+      <p:sp>
+        <p:nvSpPr>
+          <p:cNvPr id="49" name="TextBox 48">
+            <a:extLst>
+              <a:ext uri="{FF2B5EF4-FFF2-40B4-BE49-F238E27FC236}">
+                <a16:creationId xmlns:a16="http://schemas.microsoft.com/office/drawing/2014/main" id="{38F8D29C-E8CE-D609-52CA-20EEFB92CFA8}"/>
+              </a:ext>
+            </a:extLst>
+          </p:cNvPr>
+          <p:cNvSpPr txBox="1"/>
+          <p:nvPr/>
+        </p:nvSpPr>
+        <p:spPr>
+          <a:xfrm>
+            <a:off x="869937" y="1247467"/>
+            <a:ext cx="9724031" cy="3683358"/>
+          </a:xfrm>
+          <a:prstGeom prst="rect">
+            <a:avLst/>
+          </a:prstGeom>
+        </p:spPr>
+        <p:txBody>
+          <a:bodyPr vert="horz" lIns="91440" tIns="45720" rIns="91440" bIns="45720" rtlCol="0" anchor="ctr">
+            <a:normAutofit/>
+          </a:bodyPr>
+          <a:lstStyle/>
+          <a:p>
+            <a:pPr marL="285750" indent="-285750">
+              <a:lnSpc>
+                <a:spcPct val="90000"/>
+              </a:lnSpc>
+              <a:spcAft>
+                <a:spcPts val="600"/>
+              </a:spcAft>
+              <a:buFont typeface="Arial" panose="020B0604020202020204" pitchFamily="34" charset="0"/>
+              <a:buChar char="•"/>
+            </a:pPr>
+            <a:endParaRPr lang="en-US" dirty="0"/>
+          </a:p>
+        </p:txBody>
+      </p:sp>
+      <p:graphicFrame>
+        <p:nvGraphicFramePr>
+          <p:cNvPr id="12" name="Table 11">
+            <a:extLst>
+              <a:ext uri="{FF2B5EF4-FFF2-40B4-BE49-F238E27FC236}">
+                <a16:creationId xmlns:a16="http://schemas.microsoft.com/office/drawing/2014/main" id="{B5633F09-C434-07A7-2EFE-0319F663A572}"/>
+              </a:ext>
+            </a:extLst>
+          </p:cNvPr>
+          <p:cNvGraphicFramePr>
+            <a:graphicFrameLocks noGrp="1"/>
+          </p:cNvGraphicFramePr>
+          <p:nvPr>
+            <p:extLst>
+              <p:ext uri="{D42A27DB-BD31-4B8C-83A1-F6EECF244321}">
+                <p14:modId xmlns:p14="http://schemas.microsoft.com/office/powerpoint/2010/main" val="2234985609"/>
+              </p:ext>
+            </p:extLst>
+          </p:nvPr>
+        </p:nvGraphicFramePr>
+        <p:xfrm>
+          <a:off x="571499" y="1696705"/>
+          <a:ext cx="9494784" cy="1925320"/>
+        </p:xfrm>
+        <a:graphic>
+          <a:graphicData uri="http://schemas.openxmlformats.org/drawingml/2006/table">
+            <a:tbl>
+              <a:tblPr>
+                <a:tableStyleId>{5C22544A-7EE6-4342-B048-85BDC9FD1C3A}</a:tableStyleId>
+              </a:tblPr>
+              <a:tblGrid>
+                <a:gridCol w="4747392">
+                  <a:extLst>
+                    <a:ext uri="{9D8B030D-6E8A-4147-A177-3AD203B41FA5}">
+                      <a16:colId xmlns:a16="http://schemas.microsoft.com/office/drawing/2014/main" val="1805199088"/>
+                    </a:ext>
+                  </a:extLst>
+                </a:gridCol>
+                <a:gridCol w="4747392">
+                  <a:extLst>
+                    <a:ext uri="{9D8B030D-6E8A-4147-A177-3AD203B41FA5}">
+                      <a16:colId xmlns:a16="http://schemas.microsoft.com/office/drawing/2014/main" val="2098396641"/>
+                    </a:ext>
+                  </a:extLst>
+                </a:gridCol>
+              </a:tblGrid>
+              <a:tr h="370840">
+                <a:tc>
+                  <a:txBody>
+                    <a:bodyPr/>
+                    <a:lstStyle/>
+                    <a:p>
+                      <a:r>
+                        <a:rPr lang="en-GB" sz="1800" dirty="0"/>
+                        <a:t>Team Name </a:t>
+                      </a:r>
+                      <a:endParaRPr lang="en-US" dirty="0"/>
+                    </a:p>
+                  </a:txBody>
+                  <a:tcPr/>
+                </a:tc>
+                <a:tc>
+                  <a:txBody>
+                    <a:bodyPr/>
+                    <a:lstStyle/>
+                    <a:p>
+                      <a:pPr marL="0" marR="0" lvl="0" indent="0" algn="l" defTabSz="914400" rtl="0" eaLnBrk="1" fontAlgn="auto" latinLnBrk="0" hangingPunct="1">
+                        <a:lnSpc>
+                          <a:spcPct val="100000"/>
+                        </a:lnSpc>
+                        <a:spcBef>
+                          <a:spcPts val="0"/>
+                        </a:spcBef>
+                        <a:spcAft>
+                          <a:spcPts val="0"/>
+                        </a:spcAft>
+                        <a:buClrTx/>
+                        <a:buSzTx/>
+                        <a:buFontTx/>
+                        <a:buNone/>
+                        <a:tabLst/>
+                        <a:defRPr/>
+                      </a:pPr>
+                      <a:r>
+                        <a:rPr lang="en-GB" sz="1800" b="1" i="1" dirty="0" err="1"/>
+                        <a:t>SpecSentinel</a:t>
+                      </a:r>
+                      <a:endParaRPr lang="en-GB" sz="1800" b="1" i="1" dirty="0"/>
+                    </a:p>
+                  </a:txBody>
+                  <a:tcPr/>
+                </a:tc>
+                <a:extLst>
+                  <a:ext uri="{0D108BD9-81ED-4DB2-BD59-A6C34878D82A}">
+                    <a16:rowId xmlns:a16="http://schemas.microsoft.com/office/drawing/2014/main" val="1694675377"/>
+                  </a:ext>
+                </a:extLst>
+              </a:tr>
+              <a:tr h="370840">
+                <a:tc>
+                  <a:txBody>
+                    <a:bodyPr/>
+                    <a:lstStyle/>
+                    <a:p>
+                      <a:r>
+                        <a:rPr lang="en-GB" sz="1800" dirty="0"/>
+                        <a:t>Team Members &amp; Roles</a:t>
+                      </a:r>
+                      <a:endParaRPr lang="en-US" dirty="0"/>
+                    </a:p>
+                  </a:txBody>
+                  <a:tcPr/>
+                </a:tc>
+                <a:tc>
+                  <a:txBody>
+                    <a:bodyPr/>
+                    <a:lstStyle/>
+                    <a:p>
+                      <a:r>
+                        <a:rPr lang="en-US" b="0" dirty="0"/>
+                        <a:t>Debapriyo Dasgupta (Lead engineer) </a:t>
+                      </a:r>
+                    </a:p>
+                    <a:p>
+                      <a:r>
+                        <a:rPr lang="en-US" b="0" dirty="0"/>
+                        <a:t>Niveed Kumar Reddy Bollapally (Contributor)</a:t>
+                      </a:r>
+                    </a:p>
+                    <a:p>
+                      <a:r>
+                        <a:rPr lang="en-US" b="0" dirty="0"/>
+                        <a:t>Bob (Huge contributor)</a:t>
+                      </a:r>
+                    </a:p>
+                  </a:txBody>
+                  <a:tcPr/>
+                </a:tc>
+                <a:extLst>
+                  <a:ext uri="{0D108BD9-81ED-4DB2-BD59-A6C34878D82A}">
+                    <a16:rowId xmlns:a16="http://schemas.microsoft.com/office/drawing/2014/main" val="3661439844"/>
+                  </a:ext>
+                </a:extLst>
+              </a:tr>
+              <a:tr h="370840">
+                <a:tc>
+                  <a:txBody>
+                    <a:bodyPr/>
+                    <a:lstStyle/>
+                    <a:p>
+                      <a:pPr marL="0" marR="0" lvl="0" indent="0" algn="l" defTabSz="914400" rtl="0" eaLnBrk="1" fontAlgn="auto" latinLnBrk="0" hangingPunct="1">
+                        <a:lnSpc>
+                          <a:spcPct val="100000"/>
+                        </a:lnSpc>
+                        <a:spcBef>
+                          <a:spcPts val="0"/>
+                        </a:spcBef>
+                        <a:spcAft>
+                          <a:spcPts val="0"/>
+                        </a:spcAft>
+                        <a:buClrTx/>
+                        <a:buSzTx/>
+                        <a:buFontTx/>
+                        <a:buNone/>
+                        <a:tabLst/>
+                        <a:defRPr/>
+                      </a:pPr>
+                      <a:r>
+                        <a:rPr lang="en-GB" sz="1800" dirty="0"/>
+                        <a:t>Track / Theme Selected</a:t>
+                      </a:r>
+                    </a:p>
+                  </a:txBody>
+                  <a:tcPr/>
+                </a:tc>
+                <a:tc>
+                  <a:txBody>
+                    <a:bodyPr/>
+                    <a:lstStyle/>
+                    <a:p>
+                      <a:r>
+                        <a:rPr lang="en-US" dirty="0"/>
+                        <a:t>Automation powered by AI fundamental model and Agentic AI</a:t>
+                      </a:r>
+                    </a:p>
+                  </a:txBody>
+                  <a:tcPr/>
+                </a:tc>
+                <a:extLst>
+                  <a:ext uri="{0D108BD9-81ED-4DB2-BD59-A6C34878D82A}">
+                    <a16:rowId xmlns:a16="http://schemas.microsoft.com/office/drawing/2014/main" val="97389624"/>
+                  </a:ext>
+                </a:extLst>
+              </a:tr>
+            </a:tbl>
+          </a:graphicData>
+        </a:graphic>
+      </p:graphicFrame>
+    </p:spTree>
+    <p:extLst>
+      <p:ext uri="{BB962C8B-B14F-4D97-AF65-F5344CB8AC3E}">
+        <p14:creationId xmlns:p14="http://schemas.microsoft.com/office/powerpoint/2010/main" val="1967266968"/>
+      </p:ext>
+    </p:extLst>
   </p:cSld>
   <p:clrMapOvr>
     <a:masterClrMapping/>
@@ -6656,7 +8313,7 @@
           <p:nvPr>
             <p:extLst>
               <p:ext uri="{D42A27DB-BD31-4B8C-83A1-F6EECF244321}">
-                <p14:modId xmlns:p14="http://schemas.microsoft.com/office/powerpoint/2010/main" val="4105977905"/>
+                <p14:modId xmlns:p14="http://schemas.microsoft.com/office/powerpoint/2010/main" val="2228168168"/>
               </p:ext>
             </p:extLst>
           </p:nvPr>
@@ -6667,7 +8324,7 @@
         </p:xfrm>
         <a:graphic>
           <a:graphicData uri="http://schemas.openxmlformats.org/drawingml/2006/diagram">
-            <dgm:relIds xmlns:dgm="http://schemas.openxmlformats.org/drawingml/2006/diagram" xmlns:r="http://schemas.openxmlformats.org/officeDocument/2006/relationships" r:dm="rId2" r:lo="rId3" r:qs="rId4" r:cs="rId5"/>
+            <dgm:relIds xmlns:dgm="http://schemas.openxmlformats.org/drawingml/2006/diagram" xmlns:r="http://schemas.openxmlformats.org/officeDocument/2006/relationships" r:dm="rId3" r:lo="rId4" r:qs="rId5" r:cs="rId6"/>
           </a:graphicData>
         </a:graphic>
       </p:graphicFrame>
@@ -7667,7 +9324,7 @@
                     <a:srgbClr val="A32D2D"/>
                   </a:solidFill>
                 </a:rPr>
-                <a:t>$3.8M</a:t>
+                <a:t>~ $4M</a:t>
               </a:r>
               <a:endParaRPr lang="en-US" sz="2200" dirty="0"/>
             </a:p>
@@ -10062,7 +11719,7 @@
         </p:nvGrpSpPr>
         <p:grpSpPr>
           <a:xfrm>
-            <a:off x="5331005" y="2637967"/>
+            <a:off x="5280515" y="2637967"/>
             <a:ext cx="3361209" cy="1024128"/>
             <a:chOff x="4628388" y="2450592"/>
             <a:chExt cx="2651760" cy="1024128"/>
@@ -10584,540 +12241,6 @@
       </p:grpSp>
       <p:grpSp>
         <p:nvGrpSpPr>
-          <p:cNvPr id="121" name="Group 120">
-            <a:extLst>
-              <a:ext uri="{FF2B5EF4-FFF2-40B4-BE49-F238E27FC236}">
-                <a16:creationId xmlns:a16="http://schemas.microsoft.com/office/drawing/2014/main" id="{B4D043F2-29ED-450A-2D6E-233C8D426616}"/>
-              </a:ext>
-            </a:extLst>
-          </p:cNvPr>
-          <p:cNvGrpSpPr/>
-          <p:nvPr/>
-        </p:nvGrpSpPr>
-        <p:grpSpPr>
-          <a:xfrm>
-            <a:off x="8837346" y="2626060"/>
-            <a:ext cx="3063650" cy="1024128"/>
-            <a:chOff x="7517892" y="2450592"/>
-            <a:chExt cx="2651760" cy="1024128"/>
-          </a:xfrm>
-        </p:grpSpPr>
-        <p:sp>
-          <p:nvSpPr>
-            <p:cNvPr id="50" name="Shape 44">
-              <a:extLst>
-                <a:ext uri="{FF2B5EF4-FFF2-40B4-BE49-F238E27FC236}">
-                  <a16:creationId xmlns:a16="http://schemas.microsoft.com/office/drawing/2014/main" id="{1322155E-0B98-E724-507F-8E1D4D9E2AC6}"/>
-                </a:ext>
-              </a:extLst>
-            </p:cNvPr>
-            <p:cNvSpPr/>
-            <p:nvPr/>
-          </p:nvSpPr>
-          <p:spPr>
-            <a:xfrm>
-              <a:off x="7517892" y="2450592"/>
-              <a:ext cx="2651760" cy="1024128"/>
-            </a:xfrm>
-            <a:prstGeom prst="rect">
-              <a:avLst/>
-            </a:prstGeom>
-            <a:solidFill>
-              <a:srgbClr val="EEEDFE"/>
-            </a:solidFill>
-            <a:ln w="9525">
-              <a:solidFill>
-                <a:srgbClr val="7F77DD"/>
-              </a:solidFill>
-              <a:prstDash val="solid"/>
-            </a:ln>
-          </p:spPr>
-          <p:txBody>
-            <a:bodyPr/>
-            <a:lstStyle/>
-            <a:p>
-              <a:endParaRPr lang="en-US"/>
-            </a:p>
-          </p:txBody>
-        </p:sp>
-        <p:sp>
-          <p:nvSpPr>
-            <p:cNvPr id="51" name="Shape 45">
-              <a:extLst>
-                <a:ext uri="{FF2B5EF4-FFF2-40B4-BE49-F238E27FC236}">
-                  <a16:creationId xmlns:a16="http://schemas.microsoft.com/office/drawing/2014/main" id="{9E8F0A42-0A1D-667E-B227-DAAE3D5A2AC5}"/>
-                </a:ext>
-              </a:extLst>
-            </p:cNvPr>
-            <p:cNvSpPr/>
-            <p:nvPr/>
-          </p:nvSpPr>
-          <p:spPr>
-            <a:xfrm>
-              <a:off x="7517892" y="2450592"/>
-              <a:ext cx="73152" cy="1024128"/>
-            </a:xfrm>
-            <a:prstGeom prst="rect">
-              <a:avLst/>
-            </a:prstGeom>
-            <a:solidFill>
-              <a:srgbClr val="7F77DD"/>
-            </a:solidFill>
-            <a:ln w="12700">
-              <a:solidFill>
-                <a:srgbClr val="7F77DD"/>
-              </a:solidFill>
-              <a:prstDash val="solid"/>
-            </a:ln>
-          </p:spPr>
-          <p:txBody>
-            <a:bodyPr/>
-            <a:lstStyle/>
-            <a:p>
-              <a:endParaRPr lang="en-US"/>
-            </a:p>
-          </p:txBody>
-        </p:sp>
-        <p:sp>
-          <p:nvSpPr>
-            <p:cNvPr id="52" name="Shape 46">
-              <a:extLst>
-                <a:ext uri="{FF2B5EF4-FFF2-40B4-BE49-F238E27FC236}">
-                  <a16:creationId xmlns:a16="http://schemas.microsoft.com/office/drawing/2014/main" id="{E6DF90F2-ED80-3B59-AB29-FFCD27FF2032}"/>
-                </a:ext>
-              </a:extLst>
-            </p:cNvPr>
-            <p:cNvSpPr/>
-            <p:nvPr/>
-          </p:nvSpPr>
-          <p:spPr>
-            <a:xfrm>
-              <a:off x="7682484" y="2615184"/>
-              <a:ext cx="420624" cy="420624"/>
-            </a:xfrm>
-            <a:prstGeom prst="ellipse">
-              <a:avLst/>
-            </a:prstGeom>
-            <a:solidFill>
-              <a:srgbClr val="7F77DD"/>
-            </a:solidFill>
-            <a:ln w="12700">
-              <a:solidFill>
-                <a:srgbClr val="7F77DD"/>
-              </a:solidFill>
-              <a:prstDash val="solid"/>
-            </a:ln>
-          </p:spPr>
-          <p:txBody>
-            <a:bodyPr/>
-            <a:lstStyle/>
-            <a:p>
-              <a:endParaRPr lang="en-US"/>
-            </a:p>
-          </p:txBody>
-        </p:sp>
-        <p:sp>
-          <p:nvSpPr>
-            <p:cNvPr id="53" name="Text 47">
-              <a:extLst>
-                <a:ext uri="{FF2B5EF4-FFF2-40B4-BE49-F238E27FC236}">
-                  <a16:creationId xmlns:a16="http://schemas.microsoft.com/office/drawing/2014/main" id="{8C098690-FCFC-2151-B762-C016D66931D8}"/>
-                </a:ext>
-              </a:extLst>
-            </p:cNvPr>
-            <p:cNvSpPr/>
-            <p:nvPr/>
-          </p:nvSpPr>
-          <p:spPr>
-            <a:xfrm>
-              <a:off x="7682484" y="2615184"/>
-              <a:ext cx="420624" cy="420624"/>
-            </a:xfrm>
-            <a:prstGeom prst="rect">
-              <a:avLst/>
-            </a:prstGeom>
-            <a:noFill/>
-            <a:ln/>
-          </p:spPr>
-          <p:txBody>
-            <a:bodyPr wrap="square" lIns="0" tIns="0" rIns="0" bIns="0" rtlCol="0" anchor="ctr"/>
-            <a:lstStyle>
-              <a:lvl1pPr marL="0" algn="l" defTabSz="914400" rtl="0" eaLnBrk="1" latinLnBrk="0" hangingPunct="1">
-                <a:defRPr sz="1800" kern="1200">
-                  <a:solidFill>
-                    <a:schemeClr val="tx1"/>
-                  </a:solidFill>
-                  <a:latin typeface="+mn-lt"/>
-                  <a:ea typeface="+mn-ea"/>
-                  <a:cs typeface="+mn-cs"/>
-                </a:defRPr>
-              </a:lvl1pPr>
-              <a:lvl2pPr marL="457200" algn="l" defTabSz="914400" rtl="0" eaLnBrk="1" latinLnBrk="0" hangingPunct="1">
-                <a:defRPr sz="1800" kern="1200">
-                  <a:solidFill>
-                    <a:schemeClr val="tx1"/>
-                  </a:solidFill>
-                  <a:latin typeface="+mn-lt"/>
-                  <a:ea typeface="+mn-ea"/>
-                  <a:cs typeface="+mn-cs"/>
-                </a:defRPr>
-              </a:lvl2pPr>
-              <a:lvl3pPr marL="914400" algn="l" defTabSz="914400" rtl="0" eaLnBrk="1" latinLnBrk="0" hangingPunct="1">
-                <a:defRPr sz="1800" kern="1200">
-                  <a:solidFill>
-                    <a:schemeClr val="tx1"/>
-                  </a:solidFill>
-                  <a:latin typeface="+mn-lt"/>
-                  <a:ea typeface="+mn-ea"/>
-                  <a:cs typeface="+mn-cs"/>
-                </a:defRPr>
-              </a:lvl3pPr>
-              <a:lvl4pPr marL="1371600" algn="l" defTabSz="914400" rtl="0" eaLnBrk="1" latinLnBrk="0" hangingPunct="1">
-                <a:defRPr sz="1800" kern="1200">
-                  <a:solidFill>
-                    <a:schemeClr val="tx1"/>
-                  </a:solidFill>
-                  <a:latin typeface="+mn-lt"/>
-                  <a:ea typeface="+mn-ea"/>
-                  <a:cs typeface="+mn-cs"/>
-                </a:defRPr>
-              </a:lvl4pPr>
-              <a:lvl5pPr marL="1828800" algn="l" defTabSz="914400" rtl="0" eaLnBrk="1" latinLnBrk="0" hangingPunct="1">
-                <a:defRPr sz="1800" kern="1200">
-                  <a:solidFill>
-                    <a:schemeClr val="tx1"/>
-                  </a:solidFill>
-                  <a:latin typeface="+mn-lt"/>
-                  <a:ea typeface="+mn-ea"/>
-                  <a:cs typeface="+mn-cs"/>
-                </a:defRPr>
-              </a:lvl5pPr>
-              <a:lvl6pPr marL="2286000" algn="l" defTabSz="914400" rtl="0" eaLnBrk="1" latinLnBrk="0" hangingPunct="1">
-                <a:defRPr sz="1800" kern="1200">
-                  <a:solidFill>
-                    <a:schemeClr val="tx1"/>
-                  </a:solidFill>
-                  <a:latin typeface="+mn-lt"/>
-                  <a:ea typeface="+mn-ea"/>
-                  <a:cs typeface="+mn-cs"/>
-                </a:defRPr>
-              </a:lvl6pPr>
-              <a:lvl7pPr marL="2743200" algn="l" defTabSz="914400" rtl="0" eaLnBrk="1" latinLnBrk="0" hangingPunct="1">
-                <a:defRPr sz="1800" kern="1200">
-                  <a:solidFill>
-                    <a:schemeClr val="tx1"/>
-                  </a:solidFill>
-                  <a:latin typeface="+mn-lt"/>
-                  <a:ea typeface="+mn-ea"/>
-                  <a:cs typeface="+mn-cs"/>
-                </a:defRPr>
-              </a:lvl7pPr>
-              <a:lvl8pPr marL="3200400" algn="l" defTabSz="914400" rtl="0" eaLnBrk="1" latinLnBrk="0" hangingPunct="1">
-                <a:defRPr sz="1800" kern="1200">
-                  <a:solidFill>
-                    <a:schemeClr val="tx1"/>
-                  </a:solidFill>
-                  <a:latin typeface="+mn-lt"/>
-                  <a:ea typeface="+mn-ea"/>
-                  <a:cs typeface="+mn-cs"/>
-                </a:defRPr>
-              </a:lvl8pPr>
-              <a:lvl9pPr marL="3657600" algn="l" defTabSz="914400" rtl="0" eaLnBrk="1" latinLnBrk="0" hangingPunct="1">
-                <a:defRPr sz="1800" kern="1200">
-                  <a:solidFill>
-                    <a:schemeClr val="tx1"/>
-                  </a:solidFill>
-                  <a:latin typeface="+mn-lt"/>
-                  <a:ea typeface="+mn-ea"/>
-                  <a:cs typeface="+mn-cs"/>
-                </a:defRPr>
-              </a:lvl9pPr>
-            </a:lstStyle>
-            <a:p>
-              <a:pPr marL="0" indent="0" algn="ctr">
-                <a:buNone/>
-              </a:pPr>
-              <a:r>
-                <a:rPr lang="en-US" sz="1400" dirty="0">
-                  <a:solidFill>
-                    <a:srgbClr val="FFFFFF"/>
-                  </a:solidFill>
-                </a:rPr>
-                <a:t>◉</a:t>
-              </a:r>
-              <a:endParaRPr lang="en-US" sz="1400" dirty="0"/>
-            </a:p>
-          </p:txBody>
-        </p:sp>
-        <p:sp>
-          <p:nvSpPr>
-            <p:cNvPr id="54" name="Text 48">
-              <a:extLst>
-                <a:ext uri="{FF2B5EF4-FFF2-40B4-BE49-F238E27FC236}">
-                  <a16:creationId xmlns:a16="http://schemas.microsoft.com/office/drawing/2014/main" id="{FB1456C1-E993-FF7D-50BD-97679F4D7615}"/>
-                </a:ext>
-              </a:extLst>
-            </p:cNvPr>
-            <p:cNvSpPr/>
-            <p:nvPr/>
-          </p:nvSpPr>
-          <p:spPr>
-            <a:xfrm>
-              <a:off x="8176260" y="2542032"/>
-              <a:ext cx="1901952" cy="256032"/>
-            </a:xfrm>
-            <a:prstGeom prst="rect">
-              <a:avLst/>
-            </a:prstGeom>
-            <a:noFill/>
-            <a:ln/>
-          </p:spPr>
-          <p:txBody>
-            <a:bodyPr wrap="square" lIns="0" tIns="0" rIns="0" bIns="0" rtlCol="0" anchor="ctr"/>
-            <a:lstStyle>
-              <a:lvl1pPr marL="0" algn="l" defTabSz="914400" rtl="0" eaLnBrk="1" latinLnBrk="0" hangingPunct="1">
-                <a:defRPr sz="1800" kern="1200">
-                  <a:solidFill>
-                    <a:schemeClr val="tx1"/>
-                  </a:solidFill>
-                  <a:latin typeface="+mn-lt"/>
-                  <a:ea typeface="+mn-ea"/>
-                  <a:cs typeface="+mn-cs"/>
-                </a:defRPr>
-              </a:lvl1pPr>
-              <a:lvl2pPr marL="457200" algn="l" defTabSz="914400" rtl="0" eaLnBrk="1" latinLnBrk="0" hangingPunct="1">
-                <a:defRPr sz="1800" kern="1200">
-                  <a:solidFill>
-                    <a:schemeClr val="tx1"/>
-                  </a:solidFill>
-                  <a:latin typeface="+mn-lt"/>
-                  <a:ea typeface="+mn-ea"/>
-                  <a:cs typeface="+mn-cs"/>
-                </a:defRPr>
-              </a:lvl2pPr>
-              <a:lvl3pPr marL="914400" algn="l" defTabSz="914400" rtl="0" eaLnBrk="1" latinLnBrk="0" hangingPunct="1">
-                <a:defRPr sz="1800" kern="1200">
-                  <a:solidFill>
-                    <a:schemeClr val="tx1"/>
-                  </a:solidFill>
-                  <a:latin typeface="+mn-lt"/>
-                  <a:ea typeface="+mn-ea"/>
-                  <a:cs typeface="+mn-cs"/>
-                </a:defRPr>
-              </a:lvl3pPr>
-              <a:lvl4pPr marL="1371600" algn="l" defTabSz="914400" rtl="0" eaLnBrk="1" latinLnBrk="0" hangingPunct="1">
-                <a:defRPr sz="1800" kern="1200">
-                  <a:solidFill>
-                    <a:schemeClr val="tx1"/>
-                  </a:solidFill>
-                  <a:latin typeface="+mn-lt"/>
-                  <a:ea typeface="+mn-ea"/>
-                  <a:cs typeface="+mn-cs"/>
-                </a:defRPr>
-              </a:lvl4pPr>
-              <a:lvl5pPr marL="1828800" algn="l" defTabSz="914400" rtl="0" eaLnBrk="1" latinLnBrk="0" hangingPunct="1">
-                <a:defRPr sz="1800" kern="1200">
-                  <a:solidFill>
-                    <a:schemeClr val="tx1"/>
-                  </a:solidFill>
-                  <a:latin typeface="+mn-lt"/>
-                  <a:ea typeface="+mn-ea"/>
-                  <a:cs typeface="+mn-cs"/>
-                </a:defRPr>
-              </a:lvl5pPr>
-              <a:lvl6pPr marL="2286000" algn="l" defTabSz="914400" rtl="0" eaLnBrk="1" latinLnBrk="0" hangingPunct="1">
-                <a:defRPr sz="1800" kern="1200">
-                  <a:solidFill>
-                    <a:schemeClr val="tx1"/>
-                  </a:solidFill>
-                  <a:latin typeface="+mn-lt"/>
-                  <a:ea typeface="+mn-ea"/>
-                  <a:cs typeface="+mn-cs"/>
-                </a:defRPr>
-              </a:lvl6pPr>
-              <a:lvl7pPr marL="2743200" algn="l" defTabSz="914400" rtl="0" eaLnBrk="1" latinLnBrk="0" hangingPunct="1">
-                <a:defRPr sz="1800" kern="1200">
-                  <a:solidFill>
-                    <a:schemeClr val="tx1"/>
-                  </a:solidFill>
-                  <a:latin typeface="+mn-lt"/>
-                  <a:ea typeface="+mn-ea"/>
-                  <a:cs typeface="+mn-cs"/>
-                </a:defRPr>
-              </a:lvl7pPr>
-              <a:lvl8pPr marL="3200400" algn="l" defTabSz="914400" rtl="0" eaLnBrk="1" latinLnBrk="0" hangingPunct="1">
-                <a:defRPr sz="1800" kern="1200">
-                  <a:solidFill>
-                    <a:schemeClr val="tx1"/>
-                  </a:solidFill>
-                  <a:latin typeface="+mn-lt"/>
-                  <a:ea typeface="+mn-ea"/>
-                  <a:cs typeface="+mn-cs"/>
-                </a:defRPr>
-              </a:lvl8pPr>
-              <a:lvl9pPr marL="3657600" algn="l" defTabSz="914400" rtl="0" eaLnBrk="1" latinLnBrk="0" hangingPunct="1">
-                <a:defRPr sz="1800" kern="1200">
-                  <a:solidFill>
-                    <a:schemeClr val="tx1"/>
-                  </a:solidFill>
-                  <a:latin typeface="+mn-lt"/>
-                  <a:ea typeface="+mn-ea"/>
-                  <a:cs typeface="+mn-cs"/>
-                </a:defRPr>
-              </a:lvl9pPr>
-            </a:lstStyle>
-            <a:p>
-              <a:pPr marL="0" indent="0">
-                <a:buNone/>
-              </a:pPr>
-              <a:r>
-                <a:rPr lang="en-US" sz="1100" b="1" dirty="0">
-                  <a:solidFill>
-                    <a:srgbClr val="3C3489"/>
-                  </a:solidFill>
-                </a:rPr>
-                <a:t>Health score engine</a:t>
-              </a:r>
-              <a:endParaRPr lang="en-US" sz="1100" dirty="0"/>
-            </a:p>
-          </p:txBody>
-        </p:sp>
-        <p:sp>
-          <p:nvSpPr>
-            <p:cNvPr id="55" name="Text 49">
-              <a:extLst>
-                <a:ext uri="{FF2B5EF4-FFF2-40B4-BE49-F238E27FC236}">
-                  <a16:creationId xmlns:a16="http://schemas.microsoft.com/office/drawing/2014/main" id="{984CEB3B-DE90-8821-4052-93DAFE64CC3B}"/>
-                </a:ext>
-              </a:extLst>
-            </p:cNvPr>
-            <p:cNvSpPr/>
-            <p:nvPr/>
-          </p:nvSpPr>
-          <p:spPr>
-            <a:xfrm>
-              <a:off x="8176260" y="2798064"/>
-              <a:ext cx="1901952" cy="603504"/>
-            </a:xfrm>
-            <a:prstGeom prst="rect">
-              <a:avLst/>
-            </a:prstGeom>
-            <a:noFill/>
-            <a:ln/>
-          </p:spPr>
-          <p:txBody>
-            <a:bodyPr wrap="square" lIns="0" tIns="0" rIns="0" bIns="0" rtlCol="0" anchor="t"/>
-            <a:lstStyle>
-              <a:lvl1pPr marL="0" algn="l" defTabSz="914400" rtl="0" eaLnBrk="1" latinLnBrk="0" hangingPunct="1">
-                <a:defRPr sz="1800" kern="1200">
-                  <a:solidFill>
-                    <a:schemeClr val="tx1"/>
-                  </a:solidFill>
-                  <a:latin typeface="+mn-lt"/>
-                  <a:ea typeface="+mn-ea"/>
-                  <a:cs typeface="+mn-cs"/>
-                </a:defRPr>
-              </a:lvl1pPr>
-              <a:lvl2pPr marL="457200" algn="l" defTabSz="914400" rtl="0" eaLnBrk="1" latinLnBrk="0" hangingPunct="1">
-                <a:defRPr sz="1800" kern="1200">
-                  <a:solidFill>
-                    <a:schemeClr val="tx1"/>
-                  </a:solidFill>
-                  <a:latin typeface="+mn-lt"/>
-                  <a:ea typeface="+mn-ea"/>
-                  <a:cs typeface="+mn-cs"/>
-                </a:defRPr>
-              </a:lvl2pPr>
-              <a:lvl3pPr marL="914400" algn="l" defTabSz="914400" rtl="0" eaLnBrk="1" latinLnBrk="0" hangingPunct="1">
-                <a:defRPr sz="1800" kern="1200">
-                  <a:solidFill>
-                    <a:schemeClr val="tx1"/>
-                  </a:solidFill>
-                  <a:latin typeface="+mn-lt"/>
-                  <a:ea typeface="+mn-ea"/>
-                  <a:cs typeface="+mn-cs"/>
-                </a:defRPr>
-              </a:lvl3pPr>
-              <a:lvl4pPr marL="1371600" algn="l" defTabSz="914400" rtl="0" eaLnBrk="1" latinLnBrk="0" hangingPunct="1">
-                <a:defRPr sz="1800" kern="1200">
-                  <a:solidFill>
-                    <a:schemeClr val="tx1"/>
-                  </a:solidFill>
-                  <a:latin typeface="+mn-lt"/>
-                  <a:ea typeface="+mn-ea"/>
-                  <a:cs typeface="+mn-cs"/>
-                </a:defRPr>
-              </a:lvl4pPr>
-              <a:lvl5pPr marL="1828800" algn="l" defTabSz="914400" rtl="0" eaLnBrk="1" latinLnBrk="0" hangingPunct="1">
-                <a:defRPr sz="1800" kern="1200">
-                  <a:solidFill>
-                    <a:schemeClr val="tx1"/>
-                  </a:solidFill>
-                  <a:latin typeface="+mn-lt"/>
-                  <a:ea typeface="+mn-ea"/>
-                  <a:cs typeface="+mn-cs"/>
-                </a:defRPr>
-              </a:lvl5pPr>
-              <a:lvl6pPr marL="2286000" algn="l" defTabSz="914400" rtl="0" eaLnBrk="1" latinLnBrk="0" hangingPunct="1">
-                <a:defRPr sz="1800" kern="1200">
-                  <a:solidFill>
-                    <a:schemeClr val="tx1"/>
-                  </a:solidFill>
-                  <a:latin typeface="+mn-lt"/>
-                  <a:ea typeface="+mn-ea"/>
-                  <a:cs typeface="+mn-cs"/>
-                </a:defRPr>
-              </a:lvl6pPr>
-              <a:lvl7pPr marL="2743200" algn="l" defTabSz="914400" rtl="0" eaLnBrk="1" latinLnBrk="0" hangingPunct="1">
-                <a:defRPr sz="1800" kern="1200">
-                  <a:solidFill>
-                    <a:schemeClr val="tx1"/>
-                  </a:solidFill>
-                  <a:latin typeface="+mn-lt"/>
-                  <a:ea typeface="+mn-ea"/>
-                  <a:cs typeface="+mn-cs"/>
-                </a:defRPr>
-              </a:lvl7pPr>
-              <a:lvl8pPr marL="3200400" algn="l" defTabSz="914400" rtl="0" eaLnBrk="1" latinLnBrk="0" hangingPunct="1">
-                <a:defRPr sz="1800" kern="1200">
-                  <a:solidFill>
-                    <a:schemeClr val="tx1"/>
-                  </a:solidFill>
-                  <a:latin typeface="+mn-lt"/>
-                  <a:ea typeface="+mn-ea"/>
-                  <a:cs typeface="+mn-cs"/>
-                </a:defRPr>
-              </a:lvl8pPr>
-              <a:lvl9pPr marL="3657600" algn="l" defTabSz="914400" rtl="0" eaLnBrk="1" latinLnBrk="0" hangingPunct="1">
-                <a:defRPr sz="1800" kern="1200">
-                  <a:solidFill>
-                    <a:schemeClr val="tx1"/>
-                  </a:solidFill>
-                  <a:latin typeface="+mn-lt"/>
-                  <a:ea typeface="+mn-ea"/>
-                  <a:cs typeface="+mn-cs"/>
-                </a:defRPr>
-              </a:lvl9pPr>
-            </a:lstStyle>
-            <a:p>
-              <a:pPr marL="0" indent="0">
-                <a:buNone/>
-              </a:pPr>
-              <a:r>
-                <a:rPr lang="en-US" sz="1050" dirty="0">
-                  <a:solidFill>
-                    <a:srgbClr val="444441"/>
-                  </a:solidFill>
-                </a:rPr>
-                <a:t>Computes 0–100 score across 5 weighted categories. Maps result to Poor / Moderate / Good / Excellent bands.</a:t>
-              </a:r>
-              <a:endParaRPr lang="en-US" sz="1050" dirty="0"/>
-            </a:p>
-          </p:txBody>
-        </p:sp>
-      </p:grpSp>
-      <p:grpSp>
-        <p:nvGrpSpPr>
           <p:cNvPr id="109" name="Group 108">
             <a:extLst>
               <a:ext uri="{FF2B5EF4-FFF2-40B4-BE49-F238E27FC236}">
@@ -11130,8 +12253,8 @@
         </p:nvGrpSpPr>
         <p:grpSpPr>
           <a:xfrm>
-            <a:off x="2067701" y="3841291"/>
-            <a:ext cx="3036437" cy="1109006"/>
+            <a:off x="8785540" y="2618051"/>
+            <a:ext cx="3059015" cy="1071387"/>
             <a:chOff x="1729740" y="3639312"/>
             <a:chExt cx="2733058" cy="1024128"/>
           </a:xfrm>
@@ -11685,8 +12808,8 @@
         </p:nvGrpSpPr>
         <p:grpSpPr>
           <a:xfrm>
-            <a:off x="8837346" y="3816665"/>
-            <a:ext cx="2958294" cy="1131269"/>
+            <a:off x="5297550" y="3816665"/>
+            <a:ext cx="3332953" cy="1131269"/>
             <a:chOff x="7517892" y="3639312"/>
             <a:chExt cx="2734032" cy="1030893"/>
           </a:xfrm>
@@ -14974,8 +16097,8 @@
         </p:nvGrpSpPr>
         <p:grpSpPr>
           <a:xfrm>
-            <a:off x="5331006" y="3818942"/>
-            <a:ext cx="3361208" cy="1123844"/>
+            <a:off x="2066097" y="3818942"/>
+            <a:ext cx="3038041" cy="1123844"/>
             <a:chOff x="3430257" y="3665268"/>
             <a:chExt cx="2664000" cy="1118177"/>
           </a:xfrm>
@@ -16238,6 +17361,540 @@
           </a:fontRef>
         </p:style>
       </p:cxnSp>
+      <p:grpSp>
+        <p:nvGrpSpPr>
+          <p:cNvPr id="2" name="Group 1">
+            <a:extLst>
+              <a:ext uri="{FF2B5EF4-FFF2-40B4-BE49-F238E27FC236}">
+                <a16:creationId xmlns:a16="http://schemas.microsoft.com/office/drawing/2014/main" id="{B4D043F2-29ED-450A-2D6E-233C8D426616}"/>
+              </a:ext>
+            </a:extLst>
+          </p:cNvPr>
+          <p:cNvGrpSpPr/>
+          <p:nvPr/>
+        </p:nvGrpSpPr>
+        <p:grpSpPr>
+          <a:xfrm>
+            <a:off x="8766944" y="3826740"/>
+            <a:ext cx="3124523" cy="1116046"/>
+            <a:chOff x="7517892" y="2450592"/>
+            <a:chExt cx="2651760" cy="1024128"/>
+          </a:xfrm>
+        </p:grpSpPr>
+        <p:sp>
+          <p:nvSpPr>
+            <p:cNvPr id="3" name="Shape 44">
+              <a:extLst>
+                <a:ext uri="{FF2B5EF4-FFF2-40B4-BE49-F238E27FC236}">
+                  <a16:creationId xmlns:a16="http://schemas.microsoft.com/office/drawing/2014/main" id="{1322155E-0B98-E724-507F-8E1D4D9E2AC6}"/>
+                </a:ext>
+              </a:extLst>
+            </p:cNvPr>
+            <p:cNvSpPr/>
+            <p:nvPr/>
+          </p:nvSpPr>
+          <p:spPr>
+            <a:xfrm>
+              <a:off x="7517892" y="2450592"/>
+              <a:ext cx="2651760" cy="1024128"/>
+            </a:xfrm>
+            <a:prstGeom prst="rect">
+              <a:avLst/>
+            </a:prstGeom>
+            <a:solidFill>
+              <a:srgbClr val="EEEDFE"/>
+            </a:solidFill>
+            <a:ln w="9525">
+              <a:solidFill>
+                <a:srgbClr val="7F77DD"/>
+              </a:solidFill>
+              <a:prstDash val="solid"/>
+            </a:ln>
+          </p:spPr>
+          <p:txBody>
+            <a:bodyPr/>
+            <a:lstStyle/>
+            <a:p>
+              <a:endParaRPr lang="en-US"/>
+            </a:p>
+          </p:txBody>
+        </p:sp>
+        <p:sp>
+          <p:nvSpPr>
+            <p:cNvPr id="7" name="Shape 45">
+              <a:extLst>
+                <a:ext uri="{FF2B5EF4-FFF2-40B4-BE49-F238E27FC236}">
+                  <a16:creationId xmlns:a16="http://schemas.microsoft.com/office/drawing/2014/main" id="{9E8F0A42-0A1D-667E-B227-DAAE3D5A2AC5}"/>
+                </a:ext>
+              </a:extLst>
+            </p:cNvPr>
+            <p:cNvSpPr/>
+            <p:nvPr/>
+          </p:nvSpPr>
+          <p:spPr>
+            <a:xfrm>
+              <a:off x="7517892" y="2450592"/>
+              <a:ext cx="73152" cy="1024128"/>
+            </a:xfrm>
+            <a:prstGeom prst="rect">
+              <a:avLst/>
+            </a:prstGeom>
+            <a:solidFill>
+              <a:srgbClr val="7F77DD"/>
+            </a:solidFill>
+            <a:ln w="12700">
+              <a:solidFill>
+                <a:srgbClr val="7F77DD"/>
+              </a:solidFill>
+              <a:prstDash val="solid"/>
+            </a:ln>
+          </p:spPr>
+          <p:txBody>
+            <a:bodyPr/>
+            <a:lstStyle/>
+            <a:p>
+              <a:endParaRPr lang="en-US"/>
+            </a:p>
+          </p:txBody>
+        </p:sp>
+        <p:sp>
+          <p:nvSpPr>
+            <p:cNvPr id="18" name="Shape 46">
+              <a:extLst>
+                <a:ext uri="{FF2B5EF4-FFF2-40B4-BE49-F238E27FC236}">
+                  <a16:creationId xmlns:a16="http://schemas.microsoft.com/office/drawing/2014/main" id="{E6DF90F2-ED80-3B59-AB29-FFCD27FF2032}"/>
+                </a:ext>
+              </a:extLst>
+            </p:cNvPr>
+            <p:cNvSpPr/>
+            <p:nvPr/>
+          </p:nvSpPr>
+          <p:spPr>
+            <a:xfrm>
+              <a:off x="7682484" y="2615184"/>
+              <a:ext cx="420624" cy="420624"/>
+            </a:xfrm>
+            <a:prstGeom prst="ellipse">
+              <a:avLst/>
+            </a:prstGeom>
+            <a:solidFill>
+              <a:srgbClr val="7F77DD"/>
+            </a:solidFill>
+            <a:ln w="12700">
+              <a:solidFill>
+                <a:srgbClr val="7F77DD"/>
+              </a:solidFill>
+              <a:prstDash val="solid"/>
+            </a:ln>
+          </p:spPr>
+          <p:txBody>
+            <a:bodyPr/>
+            <a:lstStyle/>
+            <a:p>
+              <a:endParaRPr lang="en-US"/>
+            </a:p>
+          </p:txBody>
+        </p:sp>
+        <p:sp>
+          <p:nvSpPr>
+            <p:cNvPr id="21" name="Text 47">
+              <a:extLst>
+                <a:ext uri="{FF2B5EF4-FFF2-40B4-BE49-F238E27FC236}">
+                  <a16:creationId xmlns:a16="http://schemas.microsoft.com/office/drawing/2014/main" id="{8C098690-FCFC-2151-B762-C016D66931D8}"/>
+                </a:ext>
+              </a:extLst>
+            </p:cNvPr>
+            <p:cNvSpPr/>
+            <p:nvPr/>
+          </p:nvSpPr>
+          <p:spPr>
+            <a:xfrm>
+              <a:off x="7682484" y="2615184"/>
+              <a:ext cx="420624" cy="420624"/>
+            </a:xfrm>
+            <a:prstGeom prst="rect">
+              <a:avLst/>
+            </a:prstGeom>
+            <a:noFill/>
+            <a:ln/>
+          </p:spPr>
+          <p:txBody>
+            <a:bodyPr wrap="square" lIns="0" tIns="0" rIns="0" bIns="0" rtlCol="0" anchor="ctr"/>
+            <a:lstStyle>
+              <a:lvl1pPr marL="0" algn="l" defTabSz="914400" rtl="0" eaLnBrk="1" latinLnBrk="0" hangingPunct="1">
+                <a:defRPr sz="1800" kern="1200">
+                  <a:solidFill>
+                    <a:schemeClr val="tx1"/>
+                  </a:solidFill>
+                  <a:latin typeface="+mn-lt"/>
+                  <a:ea typeface="+mn-ea"/>
+                  <a:cs typeface="+mn-cs"/>
+                </a:defRPr>
+              </a:lvl1pPr>
+              <a:lvl2pPr marL="457200" algn="l" defTabSz="914400" rtl="0" eaLnBrk="1" latinLnBrk="0" hangingPunct="1">
+                <a:defRPr sz="1800" kern="1200">
+                  <a:solidFill>
+                    <a:schemeClr val="tx1"/>
+                  </a:solidFill>
+                  <a:latin typeface="+mn-lt"/>
+                  <a:ea typeface="+mn-ea"/>
+                  <a:cs typeface="+mn-cs"/>
+                </a:defRPr>
+              </a:lvl2pPr>
+              <a:lvl3pPr marL="914400" algn="l" defTabSz="914400" rtl="0" eaLnBrk="1" latinLnBrk="0" hangingPunct="1">
+                <a:defRPr sz="1800" kern="1200">
+                  <a:solidFill>
+                    <a:schemeClr val="tx1"/>
+                  </a:solidFill>
+                  <a:latin typeface="+mn-lt"/>
+                  <a:ea typeface="+mn-ea"/>
+                  <a:cs typeface="+mn-cs"/>
+                </a:defRPr>
+              </a:lvl3pPr>
+              <a:lvl4pPr marL="1371600" algn="l" defTabSz="914400" rtl="0" eaLnBrk="1" latinLnBrk="0" hangingPunct="1">
+                <a:defRPr sz="1800" kern="1200">
+                  <a:solidFill>
+                    <a:schemeClr val="tx1"/>
+                  </a:solidFill>
+                  <a:latin typeface="+mn-lt"/>
+                  <a:ea typeface="+mn-ea"/>
+                  <a:cs typeface="+mn-cs"/>
+                </a:defRPr>
+              </a:lvl4pPr>
+              <a:lvl5pPr marL="1828800" algn="l" defTabSz="914400" rtl="0" eaLnBrk="1" latinLnBrk="0" hangingPunct="1">
+                <a:defRPr sz="1800" kern="1200">
+                  <a:solidFill>
+                    <a:schemeClr val="tx1"/>
+                  </a:solidFill>
+                  <a:latin typeface="+mn-lt"/>
+                  <a:ea typeface="+mn-ea"/>
+                  <a:cs typeface="+mn-cs"/>
+                </a:defRPr>
+              </a:lvl5pPr>
+              <a:lvl6pPr marL="2286000" algn="l" defTabSz="914400" rtl="0" eaLnBrk="1" latinLnBrk="0" hangingPunct="1">
+                <a:defRPr sz="1800" kern="1200">
+                  <a:solidFill>
+                    <a:schemeClr val="tx1"/>
+                  </a:solidFill>
+                  <a:latin typeface="+mn-lt"/>
+                  <a:ea typeface="+mn-ea"/>
+                  <a:cs typeface="+mn-cs"/>
+                </a:defRPr>
+              </a:lvl6pPr>
+              <a:lvl7pPr marL="2743200" algn="l" defTabSz="914400" rtl="0" eaLnBrk="1" latinLnBrk="0" hangingPunct="1">
+                <a:defRPr sz="1800" kern="1200">
+                  <a:solidFill>
+                    <a:schemeClr val="tx1"/>
+                  </a:solidFill>
+                  <a:latin typeface="+mn-lt"/>
+                  <a:ea typeface="+mn-ea"/>
+                  <a:cs typeface="+mn-cs"/>
+                </a:defRPr>
+              </a:lvl7pPr>
+              <a:lvl8pPr marL="3200400" algn="l" defTabSz="914400" rtl="0" eaLnBrk="1" latinLnBrk="0" hangingPunct="1">
+                <a:defRPr sz="1800" kern="1200">
+                  <a:solidFill>
+                    <a:schemeClr val="tx1"/>
+                  </a:solidFill>
+                  <a:latin typeface="+mn-lt"/>
+                  <a:ea typeface="+mn-ea"/>
+                  <a:cs typeface="+mn-cs"/>
+                </a:defRPr>
+              </a:lvl8pPr>
+              <a:lvl9pPr marL="3657600" algn="l" defTabSz="914400" rtl="0" eaLnBrk="1" latinLnBrk="0" hangingPunct="1">
+                <a:defRPr sz="1800" kern="1200">
+                  <a:solidFill>
+                    <a:schemeClr val="tx1"/>
+                  </a:solidFill>
+                  <a:latin typeface="+mn-lt"/>
+                  <a:ea typeface="+mn-ea"/>
+                  <a:cs typeface="+mn-cs"/>
+                </a:defRPr>
+              </a:lvl9pPr>
+            </a:lstStyle>
+            <a:p>
+              <a:pPr marL="0" indent="0" algn="ctr">
+                <a:buNone/>
+              </a:pPr>
+              <a:r>
+                <a:rPr lang="en-US" sz="1400" dirty="0">
+                  <a:solidFill>
+                    <a:srgbClr val="FFFFFF"/>
+                  </a:solidFill>
+                </a:rPr>
+                <a:t>◉</a:t>
+              </a:r>
+              <a:endParaRPr lang="en-US" sz="1400" dirty="0"/>
+            </a:p>
+          </p:txBody>
+        </p:sp>
+        <p:sp>
+          <p:nvSpPr>
+            <p:cNvPr id="24" name="Text 48">
+              <a:extLst>
+                <a:ext uri="{FF2B5EF4-FFF2-40B4-BE49-F238E27FC236}">
+                  <a16:creationId xmlns:a16="http://schemas.microsoft.com/office/drawing/2014/main" id="{FB1456C1-E993-FF7D-50BD-97679F4D7615}"/>
+                </a:ext>
+              </a:extLst>
+            </p:cNvPr>
+            <p:cNvSpPr/>
+            <p:nvPr/>
+          </p:nvSpPr>
+          <p:spPr>
+            <a:xfrm>
+              <a:off x="8176260" y="2542032"/>
+              <a:ext cx="1901952" cy="256032"/>
+            </a:xfrm>
+            <a:prstGeom prst="rect">
+              <a:avLst/>
+            </a:prstGeom>
+            <a:noFill/>
+            <a:ln/>
+          </p:spPr>
+          <p:txBody>
+            <a:bodyPr wrap="square" lIns="0" tIns="0" rIns="0" bIns="0" rtlCol="0" anchor="ctr"/>
+            <a:lstStyle>
+              <a:lvl1pPr marL="0" algn="l" defTabSz="914400" rtl="0" eaLnBrk="1" latinLnBrk="0" hangingPunct="1">
+                <a:defRPr sz="1800" kern="1200">
+                  <a:solidFill>
+                    <a:schemeClr val="tx1"/>
+                  </a:solidFill>
+                  <a:latin typeface="+mn-lt"/>
+                  <a:ea typeface="+mn-ea"/>
+                  <a:cs typeface="+mn-cs"/>
+                </a:defRPr>
+              </a:lvl1pPr>
+              <a:lvl2pPr marL="457200" algn="l" defTabSz="914400" rtl="0" eaLnBrk="1" latinLnBrk="0" hangingPunct="1">
+                <a:defRPr sz="1800" kern="1200">
+                  <a:solidFill>
+                    <a:schemeClr val="tx1"/>
+                  </a:solidFill>
+                  <a:latin typeface="+mn-lt"/>
+                  <a:ea typeface="+mn-ea"/>
+                  <a:cs typeface="+mn-cs"/>
+                </a:defRPr>
+              </a:lvl2pPr>
+              <a:lvl3pPr marL="914400" algn="l" defTabSz="914400" rtl="0" eaLnBrk="1" latinLnBrk="0" hangingPunct="1">
+                <a:defRPr sz="1800" kern="1200">
+                  <a:solidFill>
+                    <a:schemeClr val="tx1"/>
+                  </a:solidFill>
+                  <a:latin typeface="+mn-lt"/>
+                  <a:ea typeface="+mn-ea"/>
+                  <a:cs typeface="+mn-cs"/>
+                </a:defRPr>
+              </a:lvl3pPr>
+              <a:lvl4pPr marL="1371600" algn="l" defTabSz="914400" rtl="0" eaLnBrk="1" latinLnBrk="0" hangingPunct="1">
+                <a:defRPr sz="1800" kern="1200">
+                  <a:solidFill>
+                    <a:schemeClr val="tx1"/>
+                  </a:solidFill>
+                  <a:latin typeface="+mn-lt"/>
+                  <a:ea typeface="+mn-ea"/>
+                  <a:cs typeface="+mn-cs"/>
+                </a:defRPr>
+              </a:lvl4pPr>
+              <a:lvl5pPr marL="1828800" algn="l" defTabSz="914400" rtl="0" eaLnBrk="1" latinLnBrk="0" hangingPunct="1">
+                <a:defRPr sz="1800" kern="1200">
+                  <a:solidFill>
+                    <a:schemeClr val="tx1"/>
+                  </a:solidFill>
+                  <a:latin typeface="+mn-lt"/>
+                  <a:ea typeface="+mn-ea"/>
+                  <a:cs typeface="+mn-cs"/>
+                </a:defRPr>
+              </a:lvl5pPr>
+              <a:lvl6pPr marL="2286000" algn="l" defTabSz="914400" rtl="0" eaLnBrk="1" latinLnBrk="0" hangingPunct="1">
+                <a:defRPr sz="1800" kern="1200">
+                  <a:solidFill>
+                    <a:schemeClr val="tx1"/>
+                  </a:solidFill>
+                  <a:latin typeface="+mn-lt"/>
+                  <a:ea typeface="+mn-ea"/>
+                  <a:cs typeface="+mn-cs"/>
+                </a:defRPr>
+              </a:lvl6pPr>
+              <a:lvl7pPr marL="2743200" algn="l" defTabSz="914400" rtl="0" eaLnBrk="1" latinLnBrk="0" hangingPunct="1">
+                <a:defRPr sz="1800" kern="1200">
+                  <a:solidFill>
+                    <a:schemeClr val="tx1"/>
+                  </a:solidFill>
+                  <a:latin typeface="+mn-lt"/>
+                  <a:ea typeface="+mn-ea"/>
+                  <a:cs typeface="+mn-cs"/>
+                </a:defRPr>
+              </a:lvl7pPr>
+              <a:lvl8pPr marL="3200400" algn="l" defTabSz="914400" rtl="0" eaLnBrk="1" latinLnBrk="0" hangingPunct="1">
+                <a:defRPr sz="1800" kern="1200">
+                  <a:solidFill>
+                    <a:schemeClr val="tx1"/>
+                  </a:solidFill>
+                  <a:latin typeface="+mn-lt"/>
+                  <a:ea typeface="+mn-ea"/>
+                  <a:cs typeface="+mn-cs"/>
+                </a:defRPr>
+              </a:lvl8pPr>
+              <a:lvl9pPr marL="3657600" algn="l" defTabSz="914400" rtl="0" eaLnBrk="1" latinLnBrk="0" hangingPunct="1">
+                <a:defRPr sz="1800" kern="1200">
+                  <a:solidFill>
+                    <a:schemeClr val="tx1"/>
+                  </a:solidFill>
+                  <a:latin typeface="+mn-lt"/>
+                  <a:ea typeface="+mn-ea"/>
+                  <a:cs typeface="+mn-cs"/>
+                </a:defRPr>
+              </a:lvl9pPr>
+            </a:lstStyle>
+            <a:p>
+              <a:pPr marL="0" indent="0">
+                <a:buNone/>
+              </a:pPr>
+              <a:r>
+                <a:rPr lang="en-US" sz="1100" b="1" dirty="0">
+                  <a:solidFill>
+                    <a:srgbClr val="3C3489"/>
+                  </a:solidFill>
+                </a:rPr>
+                <a:t>Health score engine</a:t>
+              </a:r>
+              <a:endParaRPr lang="en-US" sz="1100" dirty="0"/>
+            </a:p>
+          </p:txBody>
+        </p:sp>
+        <p:sp>
+          <p:nvSpPr>
+            <p:cNvPr id="27" name="Text 49">
+              <a:extLst>
+                <a:ext uri="{FF2B5EF4-FFF2-40B4-BE49-F238E27FC236}">
+                  <a16:creationId xmlns:a16="http://schemas.microsoft.com/office/drawing/2014/main" id="{984CEB3B-DE90-8821-4052-93DAFE64CC3B}"/>
+                </a:ext>
+              </a:extLst>
+            </p:cNvPr>
+            <p:cNvSpPr/>
+            <p:nvPr/>
+          </p:nvSpPr>
+          <p:spPr>
+            <a:xfrm>
+              <a:off x="8176260" y="2798064"/>
+              <a:ext cx="1901952" cy="603504"/>
+            </a:xfrm>
+            <a:prstGeom prst="rect">
+              <a:avLst/>
+            </a:prstGeom>
+            <a:noFill/>
+            <a:ln/>
+          </p:spPr>
+          <p:txBody>
+            <a:bodyPr wrap="square" lIns="0" tIns="0" rIns="0" bIns="0" rtlCol="0" anchor="t"/>
+            <a:lstStyle>
+              <a:lvl1pPr marL="0" algn="l" defTabSz="914400" rtl="0" eaLnBrk="1" latinLnBrk="0" hangingPunct="1">
+                <a:defRPr sz="1800" kern="1200">
+                  <a:solidFill>
+                    <a:schemeClr val="tx1"/>
+                  </a:solidFill>
+                  <a:latin typeface="+mn-lt"/>
+                  <a:ea typeface="+mn-ea"/>
+                  <a:cs typeface="+mn-cs"/>
+                </a:defRPr>
+              </a:lvl1pPr>
+              <a:lvl2pPr marL="457200" algn="l" defTabSz="914400" rtl="0" eaLnBrk="1" latinLnBrk="0" hangingPunct="1">
+                <a:defRPr sz="1800" kern="1200">
+                  <a:solidFill>
+                    <a:schemeClr val="tx1"/>
+                  </a:solidFill>
+                  <a:latin typeface="+mn-lt"/>
+                  <a:ea typeface="+mn-ea"/>
+                  <a:cs typeface="+mn-cs"/>
+                </a:defRPr>
+              </a:lvl2pPr>
+              <a:lvl3pPr marL="914400" algn="l" defTabSz="914400" rtl="0" eaLnBrk="1" latinLnBrk="0" hangingPunct="1">
+                <a:defRPr sz="1800" kern="1200">
+                  <a:solidFill>
+                    <a:schemeClr val="tx1"/>
+                  </a:solidFill>
+                  <a:latin typeface="+mn-lt"/>
+                  <a:ea typeface="+mn-ea"/>
+                  <a:cs typeface="+mn-cs"/>
+                </a:defRPr>
+              </a:lvl3pPr>
+              <a:lvl4pPr marL="1371600" algn="l" defTabSz="914400" rtl="0" eaLnBrk="1" latinLnBrk="0" hangingPunct="1">
+                <a:defRPr sz="1800" kern="1200">
+                  <a:solidFill>
+                    <a:schemeClr val="tx1"/>
+                  </a:solidFill>
+                  <a:latin typeface="+mn-lt"/>
+                  <a:ea typeface="+mn-ea"/>
+                  <a:cs typeface="+mn-cs"/>
+                </a:defRPr>
+              </a:lvl4pPr>
+              <a:lvl5pPr marL="1828800" algn="l" defTabSz="914400" rtl="0" eaLnBrk="1" latinLnBrk="0" hangingPunct="1">
+                <a:defRPr sz="1800" kern="1200">
+                  <a:solidFill>
+                    <a:schemeClr val="tx1"/>
+                  </a:solidFill>
+                  <a:latin typeface="+mn-lt"/>
+                  <a:ea typeface="+mn-ea"/>
+                  <a:cs typeface="+mn-cs"/>
+                </a:defRPr>
+              </a:lvl5pPr>
+              <a:lvl6pPr marL="2286000" algn="l" defTabSz="914400" rtl="0" eaLnBrk="1" latinLnBrk="0" hangingPunct="1">
+                <a:defRPr sz="1800" kern="1200">
+                  <a:solidFill>
+                    <a:schemeClr val="tx1"/>
+                  </a:solidFill>
+                  <a:latin typeface="+mn-lt"/>
+                  <a:ea typeface="+mn-ea"/>
+                  <a:cs typeface="+mn-cs"/>
+                </a:defRPr>
+              </a:lvl6pPr>
+              <a:lvl7pPr marL="2743200" algn="l" defTabSz="914400" rtl="0" eaLnBrk="1" latinLnBrk="0" hangingPunct="1">
+                <a:defRPr sz="1800" kern="1200">
+                  <a:solidFill>
+                    <a:schemeClr val="tx1"/>
+                  </a:solidFill>
+                  <a:latin typeface="+mn-lt"/>
+                  <a:ea typeface="+mn-ea"/>
+                  <a:cs typeface="+mn-cs"/>
+                </a:defRPr>
+              </a:lvl7pPr>
+              <a:lvl8pPr marL="3200400" algn="l" defTabSz="914400" rtl="0" eaLnBrk="1" latinLnBrk="0" hangingPunct="1">
+                <a:defRPr sz="1800" kern="1200">
+                  <a:solidFill>
+                    <a:schemeClr val="tx1"/>
+                  </a:solidFill>
+                  <a:latin typeface="+mn-lt"/>
+                  <a:ea typeface="+mn-ea"/>
+                  <a:cs typeface="+mn-cs"/>
+                </a:defRPr>
+              </a:lvl8pPr>
+              <a:lvl9pPr marL="3657600" algn="l" defTabSz="914400" rtl="0" eaLnBrk="1" latinLnBrk="0" hangingPunct="1">
+                <a:defRPr sz="1800" kern="1200">
+                  <a:solidFill>
+                    <a:schemeClr val="tx1"/>
+                  </a:solidFill>
+                  <a:latin typeface="+mn-lt"/>
+                  <a:ea typeface="+mn-ea"/>
+                  <a:cs typeface="+mn-cs"/>
+                </a:defRPr>
+              </a:lvl9pPr>
+            </a:lstStyle>
+            <a:p>
+              <a:pPr marL="0" indent="0">
+                <a:buNone/>
+              </a:pPr>
+              <a:r>
+                <a:rPr lang="en-US" sz="1050" dirty="0">
+                  <a:solidFill>
+                    <a:srgbClr val="444441"/>
+                  </a:solidFill>
+                </a:rPr>
+                <a:t>Computes 0–100 score across 5 weighted categories. Maps result to Poor / Moderate / Good / Excellent bands.</a:t>
+              </a:r>
+              <a:endParaRPr lang="en-US" sz="1050" dirty="0"/>
+            </a:p>
+          </p:txBody>
+        </p:sp>
+      </p:grpSp>
     </p:spTree>
     <p:extLst>
       <p:ext uri="{BB962C8B-B14F-4D97-AF65-F5344CB8AC3E}">
@@ -28792,8 +30449,8 @@
         </p:nvSpPr>
         <p:spPr>
           <a:xfrm>
-            <a:off x="571500" y="466344"/>
-            <a:ext cx="9888116" cy="523951"/>
+            <a:off x="4156173" y="2503487"/>
+            <a:ext cx="4183754" cy="1434604"/>
           </a:xfrm>
           <a:prstGeom prst="rect">
             <a:avLst/>
@@ -28806,17 +30463,14 @@
           <a:lstStyle/>
           <a:p>
             <a:r>
-              <a:rPr lang="en-US" sz="3200" dirty="0">
+              <a:rPr lang="en-US" sz="5100" dirty="0">
                 <a:solidFill>
                   <a:srgbClr val="161616"/>
                 </a:solidFill>
                 <a:latin typeface="IBM Plex Sans" pitchFamily="34" charset="0"/>
-                <a:ea typeface="IBM Plex Sans" pitchFamily="34" charset="-122"/>
-                <a:cs typeface="IBM Plex Sans" pitchFamily="34" charset="-120"/>
               </a:rPr>
-              <a:t>Demo and Code base</a:t>
+              <a:t>Demo</a:t>
             </a:r>
-            <a:endParaRPr lang="en-US" sz="3200" dirty="0"/>
           </a:p>
         </p:txBody>
       </p:sp>
@@ -29017,203 +30671,6 @@
           </a:p>
         </p:txBody>
       </p:sp>
-      <p:sp>
-        <p:nvSpPr>
-          <p:cNvPr id="7" name="Text 4">
-            <a:extLst>
-              <a:ext uri="{FF2B5EF4-FFF2-40B4-BE49-F238E27FC236}">
-                <a16:creationId xmlns:a16="http://schemas.microsoft.com/office/drawing/2014/main" id="{0C45EC98-F5C6-6142-0BFD-16C9F528C3BA}"/>
-              </a:ext>
-            </a:extLst>
-          </p:cNvPr>
-          <p:cNvSpPr txBox="1"/>
-          <p:nvPr/>
-        </p:nvSpPr>
-        <p:spPr>
-          <a:xfrm>
-            <a:off x="571500" y="1737000"/>
-            <a:ext cx="9888116" cy="523951"/>
-          </a:xfrm>
-          <a:prstGeom prst="rect">
-            <a:avLst/>
-          </a:prstGeom>
-          <a:noFill/>
-          <a:ln/>
-        </p:spPr>
-        <p:txBody>
-          <a:bodyPr wrap="square" lIns="0" tIns="0" rIns="0" bIns="0" rtlCol="0" anchor="ctr"/>
-          <a:lstStyle/>
-          <a:p>
-            <a:r>
-              <a:rPr lang="en-US" sz="2000" dirty="0">
-                <a:solidFill>
-                  <a:srgbClr val="161616"/>
-                </a:solidFill>
-                <a:latin typeface="IBM Plex Sans" pitchFamily="34" charset="0"/>
-                <a:ea typeface="IBM Plex Sans" pitchFamily="34" charset="-122"/>
-                <a:cs typeface="IBM Plex Sans" pitchFamily="34" charset="-120"/>
-              </a:rPr>
-              <a:t>Provide the accessible links to the recorded Demo and the Solution code base.</a:t>
-            </a:r>
-            <a:endParaRPr lang="en-US" sz="2000" dirty="0"/>
-          </a:p>
-        </p:txBody>
-      </p:sp>
-      <p:graphicFrame>
-        <p:nvGraphicFramePr>
-          <p:cNvPr id="12" name="Table 11">
-            <a:extLst>
-              <a:ext uri="{FF2B5EF4-FFF2-40B4-BE49-F238E27FC236}">
-                <a16:creationId xmlns:a16="http://schemas.microsoft.com/office/drawing/2014/main" id="{C9D1E0CD-5085-E893-870D-BDC128EB3A25}"/>
-              </a:ext>
-            </a:extLst>
-          </p:cNvPr>
-          <p:cNvGraphicFramePr>
-            <a:graphicFrameLocks noGrp="1"/>
-          </p:cNvGraphicFramePr>
-          <p:nvPr>
-            <p:extLst>
-              <p:ext uri="{D42A27DB-BD31-4B8C-83A1-F6EECF244321}">
-                <p14:modId xmlns:p14="http://schemas.microsoft.com/office/powerpoint/2010/main" val="3689732827"/>
-              </p:ext>
-            </p:extLst>
-          </p:nvPr>
-        </p:nvGraphicFramePr>
-        <p:xfrm>
-          <a:off x="940238" y="2532886"/>
-          <a:ext cx="8605783" cy="1651000"/>
-        </p:xfrm>
-        <a:graphic>
-          <a:graphicData uri="http://schemas.openxmlformats.org/drawingml/2006/table">
-            <a:tbl>
-              <a:tblPr bandRow="1">
-                <a:tableStyleId>{5C22544A-7EE6-4342-B048-85BDC9FD1C3A}</a:tableStyleId>
-              </a:tblPr>
-              <a:tblGrid>
-                <a:gridCol w="1297216">
-                  <a:extLst>
-                    <a:ext uri="{9D8B030D-6E8A-4147-A177-3AD203B41FA5}">
-                      <a16:colId xmlns:a16="http://schemas.microsoft.com/office/drawing/2014/main" val="2579732285"/>
-                    </a:ext>
-                  </a:extLst>
-                </a:gridCol>
-                <a:gridCol w="7308567">
-                  <a:extLst>
-                    <a:ext uri="{9D8B030D-6E8A-4147-A177-3AD203B41FA5}">
-                      <a16:colId xmlns:a16="http://schemas.microsoft.com/office/drawing/2014/main" val="4059799133"/>
-                    </a:ext>
-                  </a:extLst>
-                </a:gridCol>
-              </a:tblGrid>
-              <a:tr h="370840">
-                <a:tc>
-                  <a:txBody>
-                    <a:bodyPr/>
-                    <a:lstStyle/>
-                    <a:p>
-                      <a:r>
-                        <a:rPr lang="en-US" dirty="0"/>
-                        <a:t>Demo</a:t>
-                      </a:r>
-                    </a:p>
-                  </a:txBody>
-                  <a:tcPr/>
-                </a:tc>
-                <a:tc>
-                  <a:txBody>
-                    <a:bodyPr/>
-                    <a:lstStyle/>
-                    <a:p>
-                      <a:r>
-                        <a:rPr lang="en-US" dirty="0">
-                          <a:hlinkClick r:id="rId3"/>
-                        </a:rPr>
-                        <a:t>https://ibm.box.com/s/2nifq7arom2umnqa7eok26hg93ug8zhz</a:t>
-                      </a:r>
-                      <a:endParaRPr lang="en-US" dirty="0"/>
-                    </a:p>
-                    <a:p>
-                      <a:endParaRPr lang="en-US" dirty="0"/>
-                    </a:p>
-                  </a:txBody>
-                  <a:tcPr/>
-                </a:tc>
-                <a:extLst>
-                  <a:ext uri="{0D108BD9-81ED-4DB2-BD59-A6C34878D82A}">
-                    <a16:rowId xmlns:a16="http://schemas.microsoft.com/office/drawing/2014/main" val="508571599"/>
-                  </a:ext>
-                </a:extLst>
-              </a:tr>
-              <a:tr h="370840">
-                <a:tc>
-                  <a:txBody>
-                    <a:bodyPr/>
-                    <a:lstStyle/>
-                    <a:p>
-                      <a:r>
-                        <a:rPr lang="en-US" dirty="0"/>
-                        <a:t>Code</a:t>
-                      </a:r>
-                    </a:p>
-                  </a:txBody>
-                  <a:tcPr/>
-                </a:tc>
-                <a:tc>
-                  <a:txBody>
-                    <a:bodyPr/>
-                    <a:lstStyle/>
-                    <a:p>
-                      <a:r>
-                        <a:rPr lang="en-US" dirty="0">
-                          <a:hlinkClick r:id="rId4"/>
-                        </a:rPr>
-                        <a:t>https://ibm.box.com/s/2ni5xiv5256heqf6tpg3s2lyy8ezg7su</a:t>
-                      </a:r>
-                      <a:endParaRPr lang="en-US" dirty="0"/>
-                    </a:p>
-                    <a:p>
-                      <a:endParaRPr lang="en-US" dirty="0"/>
-                    </a:p>
-                  </a:txBody>
-                  <a:tcPr/>
-                </a:tc>
-                <a:extLst>
-                  <a:ext uri="{0D108BD9-81ED-4DB2-BD59-A6C34878D82A}">
-                    <a16:rowId xmlns:a16="http://schemas.microsoft.com/office/drawing/2014/main" val="3168524255"/>
-                  </a:ext>
-                </a:extLst>
-              </a:tr>
-              <a:tr h="370840">
-                <a:tc>
-                  <a:txBody>
-                    <a:bodyPr/>
-                    <a:lstStyle/>
-                    <a:p>
-                      <a:endParaRPr lang="en-US"/>
-                    </a:p>
-                  </a:txBody>
-                  <a:tcPr/>
-                </a:tc>
-                <a:tc>
-                  <a:txBody>
-                    <a:bodyPr/>
-                    <a:lstStyle/>
-                    <a:p>
-                      <a:endParaRPr lang="en-US" dirty="0"/>
-                    </a:p>
-                  </a:txBody>
-                  <a:tcPr/>
-                </a:tc>
-                <a:extLst>
-                  <a:ext uri="{0D108BD9-81ED-4DB2-BD59-A6C34878D82A}">
-                    <a16:rowId xmlns:a16="http://schemas.microsoft.com/office/drawing/2014/main" val="2995062876"/>
-                  </a:ext>
-                </a:extLst>
-              </a:tr>
-            </a:tbl>
-          </a:graphicData>
-        </a:graphic>
-      </p:graphicFrame>
     </p:spTree>
     <p:extLst>
       <p:ext uri="{BB962C8B-B14F-4D97-AF65-F5344CB8AC3E}">
@@ -29235,7 +30692,7 @@
         <p:cNvPr id="1" name="">
           <a:extLst>
             <a:ext uri="{FF2B5EF4-FFF2-40B4-BE49-F238E27FC236}">
-              <a16:creationId xmlns:a16="http://schemas.microsoft.com/office/drawing/2014/main" id="{4D4CC65F-C195-E666-A9F2-9C358CE300ED}"/>
+              <a16:creationId xmlns:a16="http://schemas.microsoft.com/office/drawing/2014/main" id="{DD96497A-CA33-37AA-B5DB-A86E33737E16}"/>
             </a:ext>
           </a:extLst>
         </p:cNvPr>
@@ -29255,7 +30712,7 @@
           <p:cNvPr id="2" name="Shape 0">
             <a:extLst>
               <a:ext uri="{FF2B5EF4-FFF2-40B4-BE49-F238E27FC236}">
-                <a16:creationId xmlns:a16="http://schemas.microsoft.com/office/drawing/2014/main" id="{C3E14045-FBC3-60B4-1EF4-ACD825A08550}"/>
+                <a16:creationId xmlns:a16="http://schemas.microsoft.com/office/drawing/2014/main" id="{63BBCB06-11D0-CEA8-5467-907FEC142E02}"/>
               </a:ext>
             </a:extLst>
           </p:cNvPr>
@@ -29288,7 +30745,7 @@
           <p:cNvPr id="3" name="Shape 1">
             <a:extLst>
               <a:ext uri="{FF2B5EF4-FFF2-40B4-BE49-F238E27FC236}">
-                <a16:creationId xmlns:a16="http://schemas.microsoft.com/office/drawing/2014/main" id="{FE81C1F9-53A2-7CB8-2160-575D5ABC1029}"/>
+                <a16:creationId xmlns:a16="http://schemas.microsoft.com/office/drawing/2014/main" id="{A3F5B715-2558-9EBC-67C4-29B465E2908A}"/>
               </a:ext>
             </a:extLst>
           </p:cNvPr>
@@ -29321,7 +30778,7 @@
           <p:cNvPr id="4" name="Shape 2">
             <a:extLst>
               <a:ext uri="{FF2B5EF4-FFF2-40B4-BE49-F238E27FC236}">
-                <a16:creationId xmlns:a16="http://schemas.microsoft.com/office/drawing/2014/main" id="{7269F592-8FB8-886F-5254-C229A4B72F19}"/>
+                <a16:creationId xmlns:a16="http://schemas.microsoft.com/office/drawing/2014/main" id="{40996ADE-B4C0-4760-0C9E-FF941EA1D9F8}"/>
               </a:ext>
             </a:extLst>
           </p:cNvPr>
@@ -29354,7 +30811,7 @@
           <p:cNvPr id="5" name="Shape 3">
             <a:extLst>
               <a:ext uri="{FF2B5EF4-FFF2-40B4-BE49-F238E27FC236}">
-                <a16:creationId xmlns:a16="http://schemas.microsoft.com/office/drawing/2014/main" id="{B8FBD0B1-2ADB-5480-94A6-21F03071DFB2}"/>
+                <a16:creationId xmlns:a16="http://schemas.microsoft.com/office/drawing/2014/main" id="{B5C444FC-6E6C-5101-202B-CBBF2227BB2E}"/>
               </a:ext>
             </a:extLst>
           </p:cNvPr>
@@ -29384,52 +30841,10 @@
       </p:sp>
       <p:sp>
         <p:nvSpPr>
-          <p:cNvPr id="6" name="Text 4">
-            <a:extLst>
-              <a:ext uri="{FF2B5EF4-FFF2-40B4-BE49-F238E27FC236}">
-                <a16:creationId xmlns:a16="http://schemas.microsoft.com/office/drawing/2014/main" id="{7BF046DB-9C13-D287-3AAC-0BA4A9CAB077}"/>
-              </a:ext>
-            </a:extLst>
-          </p:cNvPr>
-          <p:cNvSpPr txBox="1"/>
-          <p:nvPr/>
-        </p:nvSpPr>
-        <p:spPr>
-          <a:xfrm>
-            <a:off x="571500" y="466344"/>
-            <a:ext cx="9888116" cy="523951"/>
-          </a:xfrm>
-          <a:prstGeom prst="rect">
-            <a:avLst/>
-          </a:prstGeom>
-          <a:noFill/>
-          <a:ln/>
-        </p:spPr>
-        <p:txBody>
-          <a:bodyPr wrap="square" lIns="0" tIns="0" rIns="0" bIns="0" rtlCol="0" anchor="ctr"/>
-          <a:lstStyle/>
-          <a:p>
-            <a:r>
-              <a:rPr lang="en-US" sz="3200" dirty="0">
-                <a:solidFill>
-                  <a:srgbClr val="161616"/>
-                </a:solidFill>
-                <a:latin typeface="IBM Plex Sans" pitchFamily="34" charset="0"/>
-                <a:ea typeface="IBM Plex Sans" pitchFamily="34" charset="-122"/>
-                <a:cs typeface="IBM Plex Sans" pitchFamily="34" charset="-120"/>
-              </a:rPr>
-              <a:t>Team Details</a:t>
-            </a:r>
-            <a:endParaRPr lang="en-US" sz="3200" dirty="0"/>
-          </a:p>
-        </p:txBody>
-      </p:sp>
-      <p:sp>
-        <p:nvSpPr>
           <p:cNvPr id="8" name="Shape 6">
             <a:extLst>
               <a:ext uri="{FF2B5EF4-FFF2-40B4-BE49-F238E27FC236}">
-                <a16:creationId xmlns:a16="http://schemas.microsoft.com/office/drawing/2014/main" id="{BB8DAD51-CF03-B8FE-17CA-D79CF4A67BB9}"/>
+                <a16:creationId xmlns:a16="http://schemas.microsoft.com/office/drawing/2014/main" id="{5EEF1ADB-1B70-2B08-9AF3-39404CA8FB4D}"/>
               </a:ext>
             </a:extLst>
           </p:cNvPr>
@@ -29462,7 +30877,7 @@
           <p:cNvPr id="9" name="Shape 7">
             <a:extLst>
               <a:ext uri="{FF2B5EF4-FFF2-40B4-BE49-F238E27FC236}">
-                <a16:creationId xmlns:a16="http://schemas.microsoft.com/office/drawing/2014/main" id="{C2EF816C-0932-B86A-A982-69E445639CF2}"/>
+                <a16:creationId xmlns:a16="http://schemas.microsoft.com/office/drawing/2014/main" id="{5C606256-AE77-1218-232B-6BE68DE2480F}"/>
               </a:ext>
             </a:extLst>
           </p:cNvPr>
@@ -29495,7 +30910,7 @@
           <p:cNvPr id="10" name="Text 8">
             <a:extLst>
               <a:ext uri="{FF2B5EF4-FFF2-40B4-BE49-F238E27FC236}">
-                <a16:creationId xmlns:a16="http://schemas.microsoft.com/office/drawing/2014/main" id="{468A90CE-4EEA-C404-78C7-D9D6AC148F0E}"/>
+                <a16:creationId xmlns:a16="http://schemas.microsoft.com/office/drawing/2014/main" id="{4CD3D68C-5843-716A-6E92-FC5A07912A98}"/>
               </a:ext>
             </a:extLst>
           </p:cNvPr>
@@ -29540,7 +30955,7 @@
           <p:cNvPr id="11" name="Text 9">
             <a:extLst>
               <a:ext uri="{FF2B5EF4-FFF2-40B4-BE49-F238E27FC236}">
-                <a16:creationId xmlns:a16="http://schemas.microsoft.com/office/drawing/2014/main" id="{F994FABE-8640-82B0-CE46-E532034FA345}"/>
+                <a16:creationId xmlns:a16="http://schemas.microsoft.com/office/drawing/2014/main" id="{5DF4F5EE-067C-F8B6-4293-10DE3B042551}"/>
               </a:ext>
             </a:extLst>
           </p:cNvPr>
@@ -29585,7 +31000,7 @@
           <p:cNvPr id="49" name="TextBox 48">
             <a:extLst>
               <a:ext uri="{FF2B5EF4-FFF2-40B4-BE49-F238E27FC236}">
-                <a16:creationId xmlns:a16="http://schemas.microsoft.com/office/drawing/2014/main" id="{38F8D29C-E8CE-D609-52CA-20EEFB92CFA8}"/>
+                <a16:creationId xmlns:a16="http://schemas.microsoft.com/office/drawing/2014/main" id="{0D2E6DAD-9983-E9AF-4324-627471B93CCF}"/>
               </a:ext>
             </a:extLst>
           </p:cNvPr>
@@ -29621,214 +31036,840 @@
           </a:p>
         </p:txBody>
       </p:sp>
-      <p:graphicFrame>
-        <p:nvGraphicFramePr>
-          <p:cNvPr id="12" name="Table 11">
+      <p:sp>
+        <p:nvSpPr>
+          <p:cNvPr id="7" name="Text 1">
             <a:extLst>
               <a:ext uri="{FF2B5EF4-FFF2-40B4-BE49-F238E27FC236}">
-                <a16:creationId xmlns:a16="http://schemas.microsoft.com/office/drawing/2014/main" id="{B5633F09-C434-07A7-2EFE-0319F663A572}"/>
+                <a16:creationId xmlns:a16="http://schemas.microsoft.com/office/drawing/2014/main" id="{B20A48EC-5262-DE9B-62D6-9B09ACD23021}"/>
               </a:ext>
             </a:extLst>
           </p:cNvPr>
-          <p:cNvGraphicFramePr>
-            <a:graphicFrameLocks noGrp="1"/>
-          </p:cNvGraphicFramePr>
-          <p:nvPr>
-            <p:extLst>
-              <p:ext uri="{D42A27DB-BD31-4B8C-83A1-F6EECF244321}">
-                <p14:modId xmlns:p14="http://schemas.microsoft.com/office/powerpoint/2010/main" val="487437250"/>
-              </p:ext>
-            </p:extLst>
-          </p:nvPr>
-        </p:nvGraphicFramePr>
-        <p:xfrm>
-          <a:off x="571499" y="1696705"/>
-          <a:ext cx="9494784" cy="1651000"/>
-        </p:xfrm>
-        <a:graphic>
-          <a:graphicData uri="http://schemas.openxmlformats.org/drawingml/2006/table">
-            <a:tbl>
-              <a:tblPr>
-                <a:tableStyleId>{5C22544A-7EE6-4342-B048-85BDC9FD1C3A}</a:tableStyleId>
-              </a:tblPr>
-              <a:tblGrid>
-                <a:gridCol w="4747392">
-                  <a:extLst>
-                    <a:ext uri="{9D8B030D-6E8A-4147-A177-3AD203B41FA5}">
-                      <a16:colId xmlns:a16="http://schemas.microsoft.com/office/drawing/2014/main" val="1805199088"/>
-                    </a:ext>
-                  </a:extLst>
-                </a:gridCol>
-                <a:gridCol w="4747392">
-                  <a:extLst>
-                    <a:ext uri="{9D8B030D-6E8A-4147-A177-3AD203B41FA5}">
-                      <a16:colId xmlns:a16="http://schemas.microsoft.com/office/drawing/2014/main" val="2098396641"/>
-                    </a:ext>
-                  </a:extLst>
-                </a:gridCol>
-              </a:tblGrid>
-              <a:tr h="370840">
-                <a:tc>
-                  <a:txBody>
-                    <a:bodyPr/>
-                    <a:lstStyle/>
-                    <a:p>
-                      <a:r>
-                        <a:rPr lang="en-GB" sz="1800" dirty="0"/>
-                        <a:t>Team Name </a:t>
-                      </a:r>
-                      <a:endParaRPr lang="en-US" dirty="0"/>
-                    </a:p>
-                  </a:txBody>
-                  <a:tcPr/>
-                </a:tc>
-                <a:tc>
-                  <a:txBody>
-                    <a:bodyPr/>
-                    <a:lstStyle/>
-                    <a:p>
-                      <a:pPr marL="0" marR="0" lvl="0" indent="0" algn="l" defTabSz="914400" rtl="0" eaLnBrk="1" fontAlgn="auto" latinLnBrk="0" hangingPunct="1">
-                        <a:lnSpc>
-                          <a:spcPct val="100000"/>
-                        </a:lnSpc>
-                        <a:spcBef>
-                          <a:spcPts val="0"/>
-                        </a:spcBef>
-                        <a:spcAft>
-                          <a:spcPts val="0"/>
-                        </a:spcAft>
-                        <a:buClrTx/>
-                        <a:buSzTx/>
-                        <a:buFontTx/>
-                        <a:buNone/>
-                        <a:tabLst/>
-                        <a:defRPr/>
-                      </a:pPr>
-                      <a:r>
-                        <a:rPr lang="en-GB" sz="1800" b="1" i="1" dirty="0" err="1"/>
-                        <a:t>SpecSentinel</a:t>
-                      </a:r>
-                      <a:endParaRPr lang="en-GB" sz="1800" b="1" i="1" dirty="0"/>
-                    </a:p>
-                  </a:txBody>
-                  <a:tcPr/>
-                </a:tc>
-                <a:extLst>
-                  <a:ext uri="{0D108BD9-81ED-4DB2-BD59-A6C34878D82A}">
-                    <a16:rowId xmlns:a16="http://schemas.microsoft.com/office/drawing/2014/main" val="1694675377"/>
-                  </a:ext>
-                </a:extLst>
-              </a:tr>
-              <a:tr h="370840">
-                <a:tc>
-                  <a:txBody>
-                    <a:bodyPr/>
-                    <a:lstStyle/>
-                    <a:p>
-                      <a:r>
-                        <a:rPr lang="en-GB" sz="1800" dirty="0"/>
-                        <a:t>Team Members &amp; Roles</a:t>
-                      </a:r>
-                      <a:endParaRPr lang="en-US" dirty="0"/>
-                    </a:p>
-                  </a:txBody>
-                  <a:tcPr/>
-                </a:tc>
-                <a:tc>
-                  <a:txBody>
-                    <a:bodyPr/>
-                    <a:lstStyle/>
-                    <a:p>
-                      <a:r>
-                        <a:rPr lang="en-US" b="0" dirty="0"/>
-                        <a:t>Debapriyo Dasgupta (Lead engineer) </a:t>
-                      </a:r>
-                    </a:p>
-                    <a:p>
-                      <a:r>
-                        <a:rPr lang="en-US" b="0" dirty="0" err="1"/>
-                        <a:t>Niveed</a:t>
-                      </a:r>
-                      <a:r>
-                        <a:rPr lang="en-US" b="0" dirty="0"/>
-                        <a:t> Kumar Reddy </a:t>
-                      </a:r>
-                      <a:r>
-                        <a:rPr lang="en-US" b="0" dirty="0" err="1"/>
-                        <a:t>Bollapally</a:t>
-                      </a:r>
-                      <a:r>
-                        <a:rPr lang="en-US" b="0" dirty="0"/>
-                        <a:t> (Contributor)</a:t>
-                      </a:r>
-                    </a:p>
-                  </a:txBody>
-                  <a:tcPr/>
-                </a:tc>
-                <a:extLst>
-                  <a:ext uri="{0D108BD9-81ED-4DB2-BD59-A6C34878D82A}">
-                    <a16:rowId xmlns:a16="http://schemas.microsoft.com/office/drawing/2014/main" val="3661439844"/>
-                  </a:ext>
-                </a:extLst>
-              </a:tr>
-              <a:tr h="370840">
-                <a:tc>
-                  <a:txBody>
-                    <a:bodyPr/>
-                    <a:lstStyle/>
-                    <a:p>
-                      <a:pPr marL="0" marR="0" lvl="0" indent="0" algn="l" defTabSz="914400" rtl="0" eaLnBrk="1" fontAlgn="auto" latinLnBrk="0" hangingPunct="1">
-                        <a:lnSpc>
-                          <a:spcPct val="100000"/>
-                        </a:lnSpc>
-                        <a:spcBef>
-                          <a:spcPts val="0"/>
-                        </a:spcBef>
-                        <a:spcAft>
-                          <a:spcPts val="0"/>
-                        </a:spcAft>
-                        <a:buClrTx/>
-                        <a:buSzTx/>
-                        <a:buFontTx/>
-                        <a:buNone/>
-                        <a:tabLst/>
-                        <a:defRPr/>
-                      </a:pPr>
-                      <a:r>
-                        <a:rPr lang="en-GB" sz="1800" dirty="0"/>
-                        <a:t>Track / Theme Selected</a:t>
-                      </a:r>
-                    </a:p>
-                  </a:txBody>
-                  <a:tcPr/>
-                </a:tc>
-                <a:tc>
-                  <a:txBody>
-                    <a:bodyPr/>
-                    <a:lstStyle/>
-                    <a:p>
-                      <a:r>
-                        <a:rPr lang="en-US" dirty="0"/>
-                        <a:t>Automation powered by AI fundamental model and Agentic AI</a:t>
-                      </a:r>
-                    </a:p>
-                  </a:txBody>
-                  <a:tcPr/>
-                </a:tc>
-                <a:extLst>
-                  <a:ext uri="{0D108BD9-81ED-4DB2-BD59-A6C34878D82A}">
-                    <a16:rowId xmlns:a16="http://schemas.microsoft.com/office/drawing/2014/main" val="97389624"/>
-                  </a:ext>
-                </a:extLst>
-              </a:tr>
-            </a:tbl>
-          </a:graphicData>
-        </a:graphic>
-      </p:graphicFrame>
+          <p:cNvSpPr/>
+          <p:nvPr/>
+        </p:nvSpPr>
+        <p:spPr>
+          <a:xfrm>
+            <a:off x="487680" y="268224"/>
+            <a:ext cx="11216640" cy="853440"/>
+          </a:xfrm>
+          <a:prstGeom prst="rect">
+            <a:avLst/>
+          </a:prstGeom>
+          <a:noFill/>
+          <a:ln/>
+        </p:spPr>
+        <p:txBody>
+          <a:bodyPr wrap="square" lIns="0" tIns="0" rIns="0" bIns="0" rtlCol="0" anchor="ctr"/>
+          <a:lstStyle/>
+          <a:p>
+            <a:r>
+              <a:rPr lang="en-US" sz="4800" dirty="0">
+                <a:solidFill>
+                  <a:srgbClr val="1A1A2E"/>
+                </a:solidFill>
+                <a:latin typeface="Calibri Light" pitchFamily="34" charset="0"/>
+                <a:ea typeface="Calibri Light" pitchFamily="34" charset="-122"/>
+                <a:cs typeface="Calibri Light" pitchFamily="34" charset="-120"/>
+              </a:rPr>
+              <a:t>Thank You</a:t>
+            </a:r>
+            <a:endParaRPr lang="en-US" sz="4800" dirty="0"/>
+          </a:p>
+        </p:txBody>
+      </p:sp>
+      <p:sp>
+        <p:nvSpPr>
+          <p:cNvPr id="12" name="Shape 5">
+            <a:extLst>
+              <a:ext uri="{FF2B5EF4-FFF2-40B4-BE49-F238E27FC236}">
+                <a16:creationId xmlns:a16="http://schemas.microsoft.com/office/drawing/2014/main" id="{F264C350-790C-B6CF-1332-7C912C88C4D5}"/>
+              </a:ext>
+            </a:extLst>
+          </p:cNvPr>
+          <p:cNvSpPr/>
+          <p:nvPr/>
+        </p:nvSpPr>
+        <p:spPr>
+          <a:xfrm>
+            <a:off x="487680" y="2493000"/>
+            <a:ext cx="5242560" cy="3108960"/>
+          </a:xfrm>
+          <a:prstGeom prst="rect">
+            <a:avLst/>
+          </a:prstGeom>
+          <a:solidFill>
+            <a:srgbClr val="FFF2CC"/>
+          </a:solidFill>
+          <a:ln w="19050">
+            <a:solidFill>
+              <a:srgbClr val="843C0C"/>
+            </a:solidFill>
+            <a:prstDash val="solid"/>
+          </a:ln>
+        </p:spPr>
+        <p:txBody>
+          <a:bodyPr/>
+          <a:lstStyle/>
+          <a:p>
+            <a:endParaRPr lang="en-US"/>
+          </a:p>
+        </p:txBody>
+      </p:sp>
+      <p:sp>
+        <p:nvSpPr>
+          <p:cNvPr id="13" name="Shape 6">
+            <a:extLst>
+              <a:ext uri="{FF2B5EF4-FFF2-40B4-BE49-F238E27FC236}">
+                <a16:creationId xmlns:a16="http://schemas.microsoft.com/office/drawing/2014/main" id="{80664EAC-6B4B-76A4-CCC3-4DC8A70D192F}"/>
+              </a:ext>
+            </a:extLst>
+          </p:cNvPr>
+          <p:cNvSpPr/>
+          <p:nvPr/>
+        </p:nvSpPr>
+        <p:spPr>
+          <a:xfrm>
+            <a:off x="670560" y="2432040"/>
+            <a:ext cx="2194560" cy="463296"/>
+          </a:xfrm>
+          <a:prstGeom prst="roundRect">
+            <a:avLst>
+              <a:gd name="adj" fmla="val 13158"/>
+            </a:avLst>
+          </a:prstGeom>
+          <a:solidFill>
+            <a:srgbClr val="843C0C"/>
+          </a:solidFill>
+          <a:ln w="12700">
+            <a:solidFill>
+              <a:srgbClr val="843C0C"/>
+            </a:solidFill>
+            <a:prstDash val="solid"/>
+          </a:ln>
+        </p:spPr>
+        <p:txBody>
+          <a:bodyPr/>
+          <a:lstStyle/>
+          <a:p>
+            <a:endParaRPr lang="en-US"/>
+          </a:p>
+        </p:txBody>
+      </p:sp>
+      <p:sp>
+        <p:nvSpPr>
+          <p:cNvPr id="14" name="Text 7">
+            <a:extLst>
+              <a:ext uri="{FF2B5EF4-FFF2-40B4-BE49-F238E27FC236}">
+                <a16:creationId xmlns:a16="http://schemas.microsoft.com/office/drawing/2014/main" id="{A36DA2F0-B276-7D80-CD56-3050A5F44CF8}"/>
+              </a:ext>
+            </a:extLst>
+          </p:cNvPr>
+          <p:cNvSpPr/>
+          <p:nvPr/>
+        </p:nvSpPr>
+        <p:spPr>
+          <a:xfrm>
+            <a:off x="670560" y="2432040"/>
+            <a:ext cx="2194560" cy="463296"/>
+          </a:xfrm>
+          <a:prstGeom prst="rect">
+            <a:avLst/>
+          </a:prstGeom>
+          <a:noFill/>
+          <a:ln/>
+        </p:spPr>
+        <p:txBody>
+          <a:bodyPr wrap="square" lIns="0" tIns="0" rIns="0" bIns="0" rtlCol="0" anchor="ctr"/>
+          <a:lstStyle/>
+          <a:p>
+            <a:pPr algn="ctr"/>
+            <a:r>
+              <a:rPr lang="en-US" sz="1467" b="1" dirty="0">
+                <a:solidFill>
+                  <a:srgbClr val="FFFFFF"/>
+                </a:solidFill>
+              </a:rPr>
+              <a:t>Manual Review</a:t>
+            </a:r>
+            <a:endParaRPr lang="en-US" sz="1467" dirty="0"/>
+          </a:p>
+        </p:txBody>
+      </p:sp>
+      <p:sp>
+        <p:nvSpPr>
+          <p:cNvPr id="15" name="Text 8">
+            <a:extLst>
+              <a:ext uri="{FF2B5EF4-FFF2-40B4-BE49-F238E27FC236}">
+                <a16:creationId xmlns:a16="http://schemas.microsoft.com/office/drawing/2014/main" id="{CAAB4395-B901-678D-8374-B0600E90D853}"/>
+              </a:ext>
+            </a:extLst>
+          </p:cNvPr>
+          <p:cNvSpPr/>
+          <p:nvPr/>
+        </p:nvSpPr>
+        <p:spPr>
+          <a:xfrm>
+            <a:off x="487680" y="2834376"/>
+            <a:ext cx="5242560" cy="731520"/>
+          </a:xfrm>
+          <a:prstGeom prst="rect">
+            <a:avLst/>
+          </a:prstGeom>
+          <a:noFill/>
+          <a:ln/>
+        </p:spPr>
+        <p:txBody>
+          <a:bodyPr wrap="square" lIns="0" tIns="0" rIns="0" bIns="0" rtlCol="0" anchor="ctr"/>
+          <a:lstStyle/>
+          <a:p>
+            <a:pPr algn="ctr"/>
+            <a:r>
+              <a:rPr lang="en-US" sz="3733" b="1" dirty="0">
+                <a:solidFill>
+                  <a:srgbClr val="C00000"/>
+                </a:solidFill>
+              </a:rPr>
+              <a:t>✕</a:t>
+            </a:r>
+            <a:endParaRPr lang="en-US" sz="3733" dirty="0"/>
+          </a:p>
+        </p:txBody>
+      </p:sp>
+      <p:sp>
+        <p:nvSpPr>
+          <p:cNvPr id="16" name="Text 9">
+            <a:extLst>
+              <a:ext uri="{FF2B5EF4-FFF2-40B4-BE49-F238E27FC236}">
+                <a16:creationId xmlns:a16="http://schemas.microsoft.com/office/drawing/2014/main" id="{01A4CE07-927B-E81F-616C-0C325FAC01CA}"/>
+              </a:ext>
+            </a:extLst>
+          </p:cNvPr>
+          <p:cNvSpPr/>
+          <p:nvPr/>
+        </p:nvSpPr>
+        <p:spPr>
+          <a:xfrm>
+            <a:off x="487680" y="3529320"/>
+            <a:ext cx="5242560" cy="731520"/>
+          </a:xfrm>
+          <a:prstGeom prst="rect">
+            <a:avLst/>
+          </a:prstGeom>
+          <a:noFill/>
+          <a:ln/>
+        </p:spPr>
+        <p:txBody>
+          <a:bodyPr wrap="square" lIns="0" tIns="0" rIns="0" bIns="0" rtlCol="0" anchor="ctr"/>
+          <a:lstStyle/>
+          <a:p>
+            <a:pPr algn="ctr"/>
+            <a:r>
+              <a:rPr lang="en-US" sz="4267" b="1" dirty="0">
+                <a:solidFill>
+                  <a:srgbClr val="843C0C"/>
+                </a:solidFill>
+              </a:rPr>
+              <a:t>4 – 8 Hours</a:t>
+            </a:r>
+            <a:endParaRPr lang="en-US" sz="4267" dirty="0"/>
+          </a:p>
+        </p:txBody>
+      </p:sp>
+      <p:sp>
+        <p:nvSpPr>
+          <p:cNvPr id="17" name="Text 10">
+            <a:extLst>
+              <a:ext uri="{FF2B5EF4-FFF2-40B4-BE49-F238E27FC236}">
+                <a16:creationId xmlns:a16="http://schemas.microsoft.com/office/drawing/2014/main" id="{5D8AC78F-4615-F34F-2635-3B0E1ACDD0B4}"/>
+              </a:ext>
+            </a:extLst>
+          </p:cNvPr>
+          <p:cNvSpPr/>
+          <p:nvPr/>
+        </p:nvSpPr>
+        <p:spPr>
+          <a:xfrm>
+            <a:off x="487680" y="4297416"/>
+            <a:ext cx="5242560" cy="426720"/>
+          </a:xfrm>
+          <a:prstGeom prst="rect">
+            <a:avLst/>
+          </a:prstGeom>
+          <a:noFill/>
+          <a:ln/>
+        </p:spPr>
+        <p:txBody>
+          <a:bodyPr wrap="square" lIns="0" tIns="0" rIns="0" bIns="0" rtlCol="0" anchor="ctr"/>
+          <a:lstStyle/>
+          <a:p>
+            <a:pPr algn="ctr"/>
+            <a:r>
+              <a:rPr lang="en-US" sz="1467" i="1" dirty="0">
+                <a:solidFill>
+                  <a:srgbClr val="595959"/>
+                </a:solidFill>
+              </a:rPr>
+              <a:t>Slow  ·  Inconsistent  ·  Unscalable</a:t>
+            </a:r>
+            <a:endParaRPr lang="en-US" sz="1467" dirty="0"/>
+          </a:p>
+        </p:txBody>
+      </p:sp>
+      <p:sp>
+        <p:nvSpPr>
+          <p:cNvPr id="18" name="Text 11">
+            <a:extLst>
+              <a:ext uri="{FF2B5EF4-FFF2-40B4-BE49-F238E27FC236}">
+                <a16:creationId xmlns:a16="http://schemas.microsoft.com/office/drawing/2014/main" id="{E04FEF8D-4412-75DF-A191-1FD8E8D929B6}"/>
+              </a:ext>
+            </a:extLst>
+          </p:cNvPr>
+          <p:cNvSpPr/>
+          <p:nvPr/>
+        </p:nvSpPr>
+        <p:spPr>
+          <a:xfrm>
+            <a:off x="487680" y="4687560"/>
+            <a:ext cx="5242560" cy="609600"/>
+          </a:xfrm>
+          <a:prstGeom prst="rect">
+            <a:avLst/>
+          </a:prstGeom>
+          <a:noFill/>
+          <a:ln/>
+        </p:spPr>
+        <p:txBody>
+          <a:bodyPr wrap="square" lIns="0" tIns="0" rIns="0" bIns="0" rtlCol="0" anchor="ctr"/>
+          <a:lstStyle/>
+          <a:p>
+            <a:pPr algn="ctr"/>
+            <a:r>
+              <a:rPr lang="en-US" sz="1333" dirty="0">
+                <a:solidFill>
+                  <a:srgbClr val="595959"/>
+                </a:solidFill>
+              </a:rPr>
+              <a:t>Manual effort, inconsistent standards,</a:t>
+            </a:r>
+            <a:endParaRPr lang="en-US" sz="1333" dirty="0"/>
+          </a:p>
+          <a:p>
+            <a:pPr algn="ctr"/>
+            <a:r>
+              <a:rPr lang="en-US" sz="1333" dirty="0">
+                <a:solidFill>
+                  <a:srgbClr val="595959"/>
+                </a:solidFill>
+              </a:rPr>
+              <a:t>constant review bottlenecks</a:t>
+            </a:r>
+            <a:endParaRPr lang="en-US" sz="1333" dirty="0"/>
+          </a:p>
+        </p:txBody>
+      </p:sp>
+      <p:sp>
+        <p:nvSpPr>
+          <p:cNvPr id="19" name="Text 12">
+            <a:extLst>
+              <a:ext uri="{FF2B5EF4-FFF2-40B4-BE49-F238E27FC236}">
+                <a16:creationId xmlns:a16="http://schemas.microsoft.com/office/drawing/2014/main" id="{D510A7F3-4C2A-A2BE-0FAE-0464CABF26E2}"/>
+              </a:ext>
+            </a:extLst>
+          </p:cNvPr>
+          <p:cNvSpPr/>
+          <p:nvPr/>
+        </p:nvSpPr>
+        <p:spPr>
+          <a:xfrm>
+            <a:off x="5730240" y="3567093"/>
+            <a:ext cx="731520" cy="609600"/>
+          </a:xfrm>
+          <a:prstGeom prst="rect">
+            <a:avLst/>
+          </a:prstGeom>
+          <a:noFill/>
+          <a:ln/>
+        </p:spPr>
+        <p:txBody>
+          <a:bodyPr wrap="square" lIns="0" tIns="0" rIns="0" bIns="0" rtlCol="0" anchor="ctr"/>
+          <a:lstStyle/>
+          <a:p>
+            <a:pPr algn="ctr"/>
+            <a:r>
+              <a:rPr lang="en-US" sz="1867" b="1" dirty="0">
+                <a:solidFill>
+                  <a:srgbClr val="BFBFBF"/>
+                </a:solidFill>
+              </a:rPr>
+              <a:t>VS</a:t>
+            </a:r>
+            <a:endParaRPr lang="en-US" sz="1867" dirty="0"/>
+          </a:p>
+        </p:txBody>
+      </p:sp>
+      <p:sp>
+        <p:nvSpPr>
+          <p:cNvPr id="20" name="Shape 13">
+            <a:extLst>
+              <a:ext uri="{FF2B5EF4-FFF2-40B4-BE49-F238E27FC236}">
+                <a16:creationId xmlns:a16="http://schemas.microsoft.com/office/drawing/2014/main" id="{EB1B5634-FB58-5EC7-573F-85758ACD0DC3}"/>
+              </a:ext>
+            </a:extLst>
+          </p:cNvPr>
+          <p:cNvSpPr/>
+          <p:nvPr/>
+        </p:nvSpPr>
+        <p:spPr>
+          <a:xfrm>
+            <a:off x="6461760" y="2493000"/>
+            <a:ext cx="5242560" cy="3108960"/>
+          </a:xfrm>
+          <a:prstGeom prst="rect">
+            <a:avLst/>
+          </a:prstGeom>
+          <a:solidFill>
+            <a:srgbClr val="EBF3FB"/>
+          </a:solidFill>
+          <a:ln w="19050">
+            <a:solidFill>
+              <a:srgbClr val="4472C4"/>
+            </a:solidFill>
+            <a:prstDash val="solid"/>
+          </a:ln>
+        </p:spPr>
+        <p:txBody>
+          <a:bodyPr/>
+          <a:lstStyle/>
+          <a:p>
+            <a:endParaRPr lang="en-US"/>
+          </a:p>
+        </p:txBody>
+      </p:sp>
+      <p:sp>
+        <p:nvSpPr>
+          <p:cNvPr id="21" name="Shape 14">
+            <a:extLst>
+              <a:ext uri="{FF2B5EF4-FFF2-40B4-BE49-F238E27FC236}">
+                <a16:creationId xmlns:a16="http://schemas.microsoft.com/office/drawing/2014/main" id="{FDCF5B33-1948-63ED-558E-8729FBBACF32}"/>
+              </a:ext>
+            </a:extLst>
+          </p:cNvPr>
+          <p:cNvSpPr/>
+          <p:nvPr/>
+        </p:nvSpPr>
+        <p:spPr>
+          <a:xfrm>
+            <a:off x="6644640" y="2432040"/>
+            <a:ext cx="2194560" cy="463296"/>
+          </a:xfrm>
+          <a:prstGeom prst="roundRect">
+            <a:avLst>
+              <a:gd name="adj" fmla="val 13158"/>
+            </a:avLst>
+          </a:prstGeom>
+          <a:solidFill>
+            <a:srgbClr val="203864"/>
+          </a:solidFill>
+          <a:ln w="12700">
+            <a:solidFill>
+              <a:srgbClr val="203864"/>
+            </a:solidFill>
+            <a:prstDash val="solid"/>
+          </a:ln>
+        </p:spPr>
+        <p:txBody>
+          <a:bodyPr/>
+          <a:lstStyle/>
+          <a:p>
+            <a:endParaRPr lang="en-US"/>
+          </a:p>
+        </p:txBody>
+      </p:sp>
+      <p:sp>
+        <p:nvSpPr>
+          <p:cNvPr id="22" name="Text 15">
+            <a:extLst>
+              <a:ext uri="{FF2B5EF4-FFF2-40B4-BE49-F238E27FC236}">
+                <a16:creationId xmlns:a16="http://schemas.microsoft.com/office/drawing/2014/main" id="{1F17EE20-9867-367D-DE88-0BC0647E01BA}"/>
+              </a:ext>
+            </a:extLst>
+          </p:cNvPr>
+          <p:cNvSpPr/>
+          <p:nvPr/>
+        </p:nvSpPr>
+        <p:spPr>
+          <a:xfrm>
+            <a:off x="6644640" y="2499360"/>
+            <a:ext cx="2194560" cy="463296"/>
+          </a:xfrm>
+          <a:prstGeom prst="rect">
+            <a:avLst/>
+          </a:prstGeom>
+          <a:noFill/>
+          <a:ln/>
+        </p:spPr>
+        <p:txBody>
+          <a:bodyPr wrap="square" lIns="0" tIns="0" rIns="0" bIns="0" rtlCol="0" anchor="ctr"/>
+          <a:lstStyle/>
+          <a:p>
+            <a:pPr algn="ctr"/>
+            <a:r>
+              <a:rPr lang="en-US" sz="1467" b="1" dirty="0">
+                <a:solidFill>
+                  <a:srgbClr val="FFFFFF"/>
+                </a:solidFill>
+              </a:rPr>
+              <a:t>SpecSentinel</a:t>
+            </a:r>
+            <a:endParaRPr lang="en-US" sz="1467" dirty="0"/>
+          </a:p>
+        </p:txBody>
+      </p:sp>
+      <p:sp>
+        <p:nvSpPr>
+          <p:cNvPr id="23" name="Text 16">
+            <a:extLst>
+              <a:ext uri="{FF2B5EF4-FFF2-40B4-BE49-F238E27FC236}">
+                <a16:creationId xmlns:a16="http://schemas.microsoft.com/office/drawing/2014/main" id="{93AEE782-8778-0461-7141-063B8B5EB014}"/>
+              </a:ext>
+            </a:extLst>
+          </p:cNvPr>
+          <p:cNvSpPr/>
+          <p:nvPr/>
+        </p:nvSpPr>
+        <p:spPr>
+          <a:xfrm>
+            <a:off x="6461760" y="2834376"/>
+            <a:ext cx="5242560" cy="731520"/>
+          </a:xfrm>
+          <a:prstGeom prst="rect">
+            <a:avLst/>
+          </a:prstGeom>
+          <a:noFill/>
+          <a:ln/>
+        </p:spPr>
+        <p:txBody>
+          <a:bodyPr wrap="square" lIns="0" tIns="0" rIns="0" bIns="0" rtlCol="0" anchor="ctr"/>
+          <a:lstStyle/>
+          <a:p>
+            <a:pPr algn="ctr"/>
+            <a:r>
+              <a:rPr lang="en-US" sz="3733" b="1" dirty="0">
+                <a:solidFill>
+                  <a:srgbClr val="375623"/>
+                </a:solidFill>
+              </a:rPr>
+              <a:t>✓</a:t>
+            </a:r>
+            <a:endParaRPr lang="en-US" sz="3733" dirty="0"/>
+          </a:p>
+        </p:txBody>
+      </p:sp>
+      <p:sp>
+        <p:nvSpPr>
+          <p:cNvPr id="24" name="Text 17">
+            <a:extLst>
+              <a:ext uri="{FF2B5EF4-FFF2-40B4-BE49-F238E27FC236}">
+                <a16:creationId xmlns:a16="http://schemas.microsoft.com/office/drawing/2014/main" id="{7E29D368-AE17-6597-A71D-F26127092CBC}"/>
+              </a:ext>
+            </a:extLst>
+          </p:cNvPr>
+          <p:cNvSpPr/>
+          <p:nvPr/>
+        </p:nvSpPr>
+        <p:spPr>
+          <a:xfrm>
+            <a:off x="6461760" y="3529320"/>
+            <a:ext cx="5242560" cy="731520"/>
+          </a:xfrm>
+          <a:prstGeom prst="rect">
+            <a:avLst/>
+          </a:prstGeom>
+          <a:noFill/>
+          <a:ln/>
+        </p:spPr>
+        <p:txBody>
+          <a:bodyPr wrap="square" lIns="0" tIns="0" rIns="0" bIns="0" rtlCol="0" anchor="ctr"/>
+          <a:lstStyle/>
+          <a:p>
+            <a:pPr algn="ctr"/>
+            <a:r>
+              <a:rPr lang="en-US" sz="4267" b="1" dirty="0">
+                <a:solidFill>
+                  <a:srgbClr val="203864"/>
+                </a:solidFill>
+              </a:rPr>
+              <a:t>4-8 Seconds</a:t>
+            </a:r>
+            <a:endParaRPr lang="en-US" sz="4267" dirty="0"/>
+          </a:p>
+        </p:txBody>
+      </p:sp>
+      <p:sp>
+        <p:nvSpPr>
+          <p:cNvPr id="25" name="Text 18">
+            <a:extLst>
+              <a:ext uri="{FF2B5EF4-FFF2-40B4-BE49-F238E27FC236}">
+                <a16:creationId xmlns:a16="http://schemas.microsoft.com/office/drawing/2014/main" id="{6668038F-0F40-2478-82C0-DF6178225F9A}"/>
+              </a:ext>
+            </a:extLst>
+          </p:cNvPr>
+          <p:cNvSpPr/>
+          <p:nvPr/>
+        </p:nvSpPr>
+        <p:spPr>
+          <a:xfrm>
+            <a:off x="6461760" y="4297416"/>
+            <a:ext cx="5242560" cy="426720"/>
+          </a:xfrm>
+          <a:prstGeom prst="rect">
+            <a:avLst/>
+          </a:prstGeom>
+          <a:noFill/>
+          <a:ln/>
+        </p:spPr>
+        <p:txBody>
+          <a:bodyPr wrap="square" lIns="0" tIns="0" rIns="0" bIns="0" rtlCol="0" anchor="ctr"/>
+          <a:lstStyle/>
+          <a:p>
+            <a:pPr algn="ctr"/>
+            <a:r>
+              <a:rPr lang="en-US" sz="1467" i="1" dirty="0">
+                <a:solidFill>
+                  <a:srgbClr val="595959"/>
+                </a:solidFill>
+              </a:rPr>
+              <a:t>Autonomous  ·  Intelligent  ·  Scalable</a:t>
+            </a:r>
+            <a:endParaRPr lang="en-US" sz="1467" dirty="0"/>
+          </a:p>
+        </p:txBody>
+      </p:sp>
+      <p:sp>
+        <p:nvSpPr>
+          <p:cNvPr id="26" name="Text 19">
+            <a:extLst>
+              <a:ext uri="{FF2B5EF4-FFF2-40B4-BE49-F238E27FC236}">
+                <a16:creationId xmlns:a16="http://schemas.microsoft.com/office/drawing/2014/main" id="{95E9E1C3-913A-619B-1F52-4D95C691F448}"/>
+              </a:ext>
+            </a:extLst>
+          </p:cNvPr>
+          <p:cNvSpPr/>
+          <p:nvPr/>
+        </p:nvSpPr>
+        <p:spPr>
+          <a:xfrm>
+            <a:off x="6461760" y="4687560"/>
+            <a:ext cx="5242560" cy="609600"/>
+          </a:xfrm>
+          <a:prstGeom prst="rect">
+            <a:avLst/>
+          </a:prstGeom>
+          <a:noFill/>
+          <a:ln/>
+        </p:spPr>
+        <p:txBody>
+          <a:bodyPr wrap="square" lIns="0" tIns="0" rIns="0" bIns="0" rtlCol="0" anchor="ctr"/>
+          <a:lstStyle/>
+          <a:p>
+            <a:pPr algn="ctr"/>
+            <a:r>
+              <a:rPr lang="en-US" sz="1333" dirty="0">
+                <a:solidFill>
+                  <a:srgbClr val="595959"/>
+                </a:solidFill>
+              </a:rPr>
+              <a:t>Agentic governance, OWASP-aligned,</a:t>
+            </a:r>
+            <a:endParaRPr lang="en-US" sz="1333" dirty="0"/>
+          </a:p>
+          <a:p>
+            <a:pPr algn="ctr"/>
+            <a:r>
+              <a:rPr lang="en-US" sz="1333" dirty="0">
+                <a:solidFill>
+                  <a:srgbClr val="595959"/>
+                </a:solidFill>
+              </a:rPr>
+              <a:t>zero manual effort required</a:t>
+            </a:r>
+            <a:endParaRPr lang="en-US" sz="1333" dirty="0"/>
+          </a:p>
+        </p:txBody>
+      </p:sp>
+      <p:sp>
+        <p:nvSpPr>
+          <p:cNvPr id="27" name="Shape 20">
+            <a:extLst>
+              <a:ext uri="{FF2B5EF4-FFF2-40B4-BE49-F238E27FC236}">
+                <a16:creationId xmlns:a16="http://schemas.microsoft.com/office/drawing/2014/main" id="{307809A2-514D-0A5C-4B19-EE986182C503}"/>
+              </a:ext>
+            </a:extLst>
+          </p:cNvPr>
+          <p:cNvSpPr/>
+          <p:nvPr/>
+        </p:nvSpPr>
+        <p:spPr>
+          <a:xfrm>
+            <a:off x="487680" y="5707050"/>
+            <a:ext cx="11216640" cy="633984"/>
+          </a:xfrm>
+          <a:prstGeom prst="rect">
+            <a:avLst/>
+          </a:prstGeom>
+          <a:solidFill>
+            <a:srgbClr val="4472C4"/>
+          </a:solidFill>
+          <a:ln w="12700">
+            <a:solidFill>
+              <a:srgbClr val="4472C4"/>
+            </a:solidFill>
+            <a:prstDash val="solid"/>
+          </a:ln>
+        </p:spPr>
+        <p:txBody>
+          <a:bodyPr/>
+          <a:lstStyle/>
+          <a:p>
+            <a:endParaRPr lang="en-US"/>
+          </a:p>
+        </p:txBody>
+      </p:sp>
+      <p:sp>
+        <p:nvSpPr>
+          <p:cNvPr id="28" name="Text 21">
+            <a:extLst>
+              <a:ext uri="{FF2B5EF4-FFF2-40B4-BE49-F238E27FC236}">
+                <a16:creationId xmlns:a16="http://schemas.microsoft.com/office/drawing/2014/main" id="{849AADD7-39B4-A080-3749-7EEF73F63DF9}"/>
+              </a:ext>
+            </a:extLst>
+          </p:cNvPr>
+          <p:cNvSpPr/>
+          <p:nvPr/>
+        </p:nvSpPr>
+        <p:spPr>
+          <a:xfrm>
+            <a:off x="487680" y="5707050"/>
+            <a:ext cx="11216640" cy="633984"/>
+          </a:xfrm>
+          <a:prstGeom prst="rect">
+            <a:avLst/>
+          </a:prstGeom>
+          <a:noFill/>
+          <a:ln/>
+        </p:spPr>
+        <p:txBody>
+          <a:bodyPr wrap="square" lIns="0" tIns="0" rIns="0" bIns="0" rtlCol="0" anchor="ctr"/>
+          <a:lstStyle/>
+          <a:p>
+            <a:pPr algn="ctr"/>
+            <a:r>
+              <a:rPr lang="en-US" sz="1733" b="1" dirty="0">
+                <a:solidFill>
+                  <a:srgbClr val="FFFFFF"/>
+                </a:solidFill>
+              </a:rPr>
+              <a:t>SpecSentinel  —  Agentic Governance for the API-First Enterprise  |  Powered by IBM watsonx.ai</a:t>
+            </a:r>
+            <a:endParaRPr lang="en-US" sz="1733" dirty="0"/>
+          </a:p>
+        </p:txBody>
+      </p:sp>
+      <p:sp>
+        <p:nvSpPr>
+          <p:cNvPr id="31" name="Shape 3">
+            <a:extLst>
+              <a:ext uri="{FF2B5EF4-FFF2-40B4-BE49-F238E27FC236}">
+                <a16:creationId xmlns:a16="http://schemas.microsoft.com/office/drawing/2014/main" id="{AF346D54-76F0-C4A7-A538-9C741F4B45D3}"/>
+              </a:ext>
+            </a:extLst>
+          </p:cNvPr>
+          <p:cNvSpPr/>
+          <p:nvPr/>
+        </p:nvSpPr>
+        <p:spPr>
+          <a:xfrm>
+            <a:off x="488611" y="1252295"/>
+            <a:ext cx="11216640" cy="1072896"/>
+          </a:xfrm>
+          <a:prstGeom prst="rect">
+            <a:avLst/>
+          </a:prstGeom>
+          <a:solidFill>
+            <a:srgbClr val="203864"/>
+          </a:solidFill>
+          <a:ln w="12700">
+            <a:solidFill>
+              <a:srgbClr val="203864"/>
+            </a:solidFill>
+            <a:prstDash val="solid"/>
+          </a:ln>
+        </p:spPr>
+        <p:txBody>
+          <a:bodyPr/>
+          <a:lstStyle/>
+          <a:p>
+            <a:endParaRPr lang="en-US"/>
+          </a:p>
+        </p:txBody>
+      </p:sp>
+      <p:sp>
+        <p:nvSpPr>
+          <p:cNvPr id="30" name="Text 4">
+            <a:extLst>
+              <a:ext uri="{FF2B5EF4-FFF2-40B4-BE49-F238E27FC236}">
+                <a16:creationId xmlns:a16="http://schemas.microsoft.com/office/drawing/2014/main" id="{0B6E7392-73D6-397D-BE45-07807C5A316C}"/>
+              </a:ext>
+            </a:extLst>
+          </p:cNvPr>
+          <p:cNvSpPr/>
+          <p:nvPr/>
+        </p:nvSpPr>
+        <p:spPr>
+          <a:xfrm>
+            <a:off x="487680" y="1268190"/>
+            <a:ext cx="11216640" cy="1072896"/>
+          </a:xfrm>
+          <a:prstGeom prst="rect">
+            <a:avLst/>
+          </a:prstGeom>
+          <a:noFill/>
+          <a:ln/>
+        </p:spPr>
+        <p:txBody>
+          <a:bodyPr wrap="square" lIns="0" tIns="0" rIns="0" bIns="0" rtlCol="0" anchor="ctr"/>
+          <a:lstStyle/>
+          <a:p>
+            <a:pPr algn="ctr"/>
+            <a:r>
+              <a:rPr lang="en-US" sz="2000" b="1" dirty="0">
+                <a:solidFill>
+                  <a:srgbClr val="FFFFFF"/>
+                </a:solidFill>
+              </a:rPr>
+              <a:t>The API economy is growing faster than human reviewers can keep up.</a:t>
+            </a:r>
+            <a:endParaRPr lang="en-US" sz="2000" dirty="0"/>
+          </a:p>
+          <a:p>
+            <a:pPr algn="ctr"/>
+            <a:r>
+              <a:rPr lang="en-US" sz="2000" b="1" dirty="0">
+                <a:solidFill>
+                  <a:srgbClr val="FFFFFF"/>
+                </a:solidFill>
+              </a:rPr>
+              <a:t>It’s time to let agents govern at agent speed.</a:t>
+            </a:r>
+            <a:endParaRPr lang="en-US" sz="2000" dirty="0"/>
+          </a:p>
+        </p:txBody>
+      </p:sp>
     </p:spTree>
     <p:extLst>
       <p:ext uri="{BB962C8B-B14F-4D97-AF65-F5344CB8AC3E}">
-        <p14:creationId xmlns:p14="http://schemas.microsoft.com/office/powerpoint/2010/main" val="1967266968"/>
+        <p14:creationId xmlns:p14="http://schemas.microsoft.com/office/powerpoint/2010/main" val="822753257"/>
       </p:ext>
     </p:extLst>
   </p:cSld>
